--- a/GenAI/wk4_embedding_vectorDB_SemanticSearch_RAG_OpenAI/2_vectorDB_definition_Application.pptx
+++ b/GenAI/wk4_embedding_vectorDB_SemanticSearch_RAG_OpenAI/2_vectorDB_definition_Application.pptx
@@ -5,28 +5,26 @@
     <p:sldMasterId id="2147483648" r:id="rId1"/>
   </p:sldMasterIdLst>
   <p:notesMasterIdLst>
-    <p:notesMasterId r:id="rId18"/>
+    <p:notesMasterId r:id="rId19"/>
   </p:notesMasterIdLst>
-  <p:handoutMasterIdLst>
-    <p:handoutMasterId r:id="rId19"/>
-  </p:handoutMasterIdLst>
   <p:sldIdLst>
     <p:sldId id="257" r:id="rId2"/>
     <p:sldId id="290" r:id="rId3"/>
-    <p:sldId id="279" r:id="rId4"/>
-    <p:sldId id="280" r:id="rId5"/>
-    <p:sldId id="294" r:id="rId6"/>
+    <p:sldId id="295" r:id="rId4"/>
+    <p:sldId id="279" r:id="rId5"/>
+    <p:sldId id="280" r:id="rId6"/>
     <p:sldId id="281" r:id="rId7"/>
     <p:sldId id="276" r:id="rId8"/>
-    <p:sldId id="293" r:id="rId9"/>
-    <p:sldId id="291" r:id="rId10"/>
-    <p:sldId id="292" r:id="rId11"/>
-    <p:sldId id="289" r:id="rId12"/>
-    <p:sldId id="287" r:id="rId13"/>
-    <p:sldId id="283" r:id="rId14"/>
-    <p:sldId id="288" r:id="rId15"/>
-    <p:sldId id="285" r:id="rId16"/>
-    <p:sldId id="275" r:id="rId17"/>
+    <p:sldId id="296" r:id="rId9"/>
+    <p:sldId id="293" r:id="rId10"/>
+    <p:sldId id="291" r:id="rId11"/>
+    <p:sldId id="292" r:id="rId12"/>
+    <p:sldId id="289" r:id="rId13"/>
+    <p:sldId id="287" r:id="rId14"/>
+    <p:sldId id="283" r:id="rId15"/>
+    <p:sldId id="288" r:id="rId16"/>
+    <p:sldId id="285" r:id="rId17"/>
+    <p:sldId id="275" r:id="rId18"/>
   </p:sldIdLst>
   <p:sldSz cx="12192000" cy="6858000"/>
   <p:notesSz cx="6858000" cy="9144000"/>
@@ -129,200 +127,8 @@
     <p:ext uri="{EFAFB233-063F-42B5-8137-9DF3F51BA10A}">
       <p15:sldGuideLst xmlns:p15="http://schemas.microsoft.com/office/powerpoint/2012/main"/>
     </p:ext>
-    <p:ext uri="{2D200454-40CA-4A62-9FC3-DE9A4176ACB9}">
-      <p15:notesGuideLst xmlns:p15="http://schemas.microsoft.com/office/powerpoint/2012/main"/>
-    </p:ext>
   </p:extLst>
 </p:presentation>
-</file>
-
-<file path=ppt/handoutMasters/handoutMaster1.xml><?xml version="1.0" encoding="utf-8"?>
-<p:handoutMaster xmlns:a="http://schemas.openxmlformats.org/drawingml/2006/main" xmlns:r="http://schemas.openxmlformats.org/officeDocument/2006/relationships" xmlns:p="http://schemas.openxmlformats.org/presentationml/2006/main">
-  <p:cSld>
-    <p:bg>
-      <p:bgRef idx="1001">
-        <a:schemeClr val="bg1"/>
-      </p:bgRef>
-    </p:bg>
-    <p:spTree>
-      <p:nvGrpSpPr>
-        <p:cNvPr id="1" name=""/>
-        <p:cNvGrpSpPr/>
-        <p:nvPr/>
-      </p:nvGrpSpPr>
-      <p:grpSpPr>
-        <a:xfrm>
-          <a:off x="0" y="0"/>
-          <a:ext cx="0" cy="0"/>
-          <a:chOff x="0" y="0"/>
-          <a:chExt cx="0" cy="0"/>
-        </a:xfrm>
-      </p:grpSpPr>
-      <p:sp>
-        <p:nvSpPr>
-          <p:cNvPr id="2" name="Header Placeholder 1">
-            <a:extLst>
-              <a:ext uri="{FF2B5EF4-FFF2-40B4-BE49-F238E27FC236}">
-                <a16:creationId xmlns:a16="http://schemas.microsoft.com/office/drawing/2014/main" id="{1ACA3A45-07AA-881E-EBAC-FAE1FFF9B3BB}"/>
-              </a:ext>
-            </a:extLst>
-          </p:cNvPr>
-          <p:cNvSpPr>
-            <a:spLocks noGrp="1"/>
-          </p:cNvSpPr>
-          <p:nvPr>
-            <p:ph type="hdr" sz="quarter"/>
-          </p:nvPr>
-        </p:nvSpPr>
-        <p:spPr>
-          <a:xfrm>
-            <a:off x="0" y="0"/>
-            <a:ext cx="2971800" cy="458788"/>
-          </a:xfrm>
-          <a:prstGeom prst="rect">
-            <a:avLst/>
-          </a:prstGeom>
-        </p:spPr>
-        <p:txBody>
-          <a:bodyPr vert="horz" lIns="91440" tIns="45720" rIns="91440" bIns="45720" rtlCol="0"/>
-          <a:lstStyle>
-            <a:lvl1pPr algn="l">
-              <a:defRPr sz="1200"/>
-            </a:lvl1pPr>
-          </a:lstStyle>
-          <a:p>
-            <a:endParaRPr lang="en-US"/>
-          </a:p>
-        </p:txBody>
-      </p:sp>
-      <p:sp>
-        <p:nvSpPr>
-          <p:cNvPr id="3" name="Date Placeholder 2">
-            <a:extLst>
-              <a:ext uri="{FF2B5EF4-FFF2-40B4-BE49-F238E27FC236}">
-                <a16:creationId xmlns:a16="http://schemas.microsoft.com/office/drawing/2014/main" id="{B72C2385-62BD-1B9C-A617-554DDB21E0F4}"/>
-              </a:ext>
-            </a:extLst>
-          </p:cNvPr>
-          <p:cNvSpPr>
-            <a:spLocks noGrp="1"/>
-          </p:cNvSpPr>
-          <p:nvPr>
-            <p:ph type="dt" sz="quarter" idx="1"/>
-          </p:nvPr>
-        </p:nvSpPr>
-        <p:spPr>
-          <a:xfrm>
-            <a:off x="3884613" y="0"/>
-            <a:ext cx="2971800" cy="458788"/>
-          </a:xfrm>
-          <a:prstGeom prst="rect">
-            <a:avLst/>
-          </a:prstGeom>
-        </p:spPr>
-        <p:txBody>
-          <a:bodyPr vert="horz" lIns="91440" tIns="45720" rIns="91440" bIns="45720" rtlCol="0"/>
-          <a:lstStyle>
-            <a:lvl1pPr algn="r">
-              <a:defRPr sz="1200"/>
-            </a:lvl1pPr>
-          </a:lstStyle>
-          <a:p>
-            <a:fld id="{7BAEECA8-D063-486F-AE31-5020270C1449}" type="datetimeFigureOut">
-              <a:rPr lang="en-US" smtClean="0"/>
-              <a:t>9/9/2026</a:t>
-            </a:fld>
-            <a:endParaRPr lang="en-US"/>
-          </a:p>
-        </p:txBody>
-      </p:sp>
-      <p:sp>
-        <p:nvSpPr>
-          <p:cNvPr id="4" name="Footer Placeholder 3">
-            <a:extLst>
-              <a:ext uri="{FF2B5EF4-FFF2-40B4-BE49-F238E27FC236}">
-                <a16:creationId xmlns:a16="http://schemas.microsoft.com/office/drawing/2014/main" id="{C5328A6F-7933-1F9C-E9F6-B4A61026FBA4}"/>
-              </a:ext>
-            </a:extLst>
-          </p:cNvPr>
-          <p:cNvSpPr>
-            <a:spLocks noGrp="1"/>
-          </p:cNvSpPr>
-          <p:nvPr>
-            <p:ph type="ftr" sz="quarter" idx="2"/>
-          </p:nvPr>
-        </p:nvSpPr>
-        <p:spPr>
-          <a:xfrm>
-            <a:off x="0" y="8685213"/>
-            <a:ext cx="2971800" cy="458787"/>
-          </a:xfrm>
-          <a:prstGeom prst="rect">
-            <a:avLst/>
-          </a:prstGeom>
-        </p:spPr>
-        <p:txBody>
-          <a:bodyPr vert="horz" lIns="91440" tIns="45720" rIns="91440" bIns="45720" rtlCol="0" anchor="b"/>
-          <a:lstStyle>
-            <a:lvl1pPr algn="l">
-              <a:defRPr sz="1200"/>
-            </a:lvl1pPr>
-          </a:lstStyle>
-          <a:p>
-            <a:endParaRPr lang="en-US"/>
-          </a:p>
-        </p:txBody>
-      </p:sp>
-      <p:sp>
-        <p:nvSpPr>
-          <p:cNvPr id="5" name="Slide Number Placeholder 4">
-            <a:extLst>
-              <a:ext uri="{FF2B5EF4-FFF2-40B4-BE49-F238E27FC236}">
-                <a16:creationId xmlns:a16="http://schemas.microsoft.com/office/drawing/2014/main" id="{66F9A57F-3A38-6EDA-B76D-A3DB4F6978A7}"/>
-              </a:ext>
-            </a:extLst>
-          </p:cNvPr>
-          <p:cNvSpPr>
-            <a:spLocks noGrp="1"/>
-          </p:cNvSpPr>
-          <p:nvPr>
-            <p:ph type="sldNum" sz="quarter" idx="3"/>
-          </p:nvPr>
-        </p:nvSpPr>
-        <p:spPr>
-          <a:xfrm>
-            <a:off x="3884613" y="8685213"/>
-            <a:ext cx="2971800" cy="458787"/>
-          </a:xfrm>
-          <a:prstGeom prst="rect">
-            <a:avLst/>
-          </a:prstGeom>
-        </p:spPr>
-        <p:txBody>
-          <a:bodyPr vert="horz" lIns="91440" tIns="45720" rIns="91440" bIns="45720" rtlCol="0" anchor="b"/>
-          <a:lstStyle>
-            <a:lvl1pPr algn="r">
-              <a:defRPr sz="1200"/>
-            </a:lvl1pPr>
-          </a:lstStyle>
-          <a:p>
-            <a:fld id="{5793F6CE-D1D9-4B7B-9040-C7CAC074A6CE}" type="slidenum">
-              <a:rPr lang="en-US" smtClean="0"/>
-              <a:t>‹#›</a:t>
-            </a:fld>
-            <a:endParaRPr lang="en-US"/>
-          </a:p>
-        </p:txBody>
-      </p:sp>
-    </p:spTree>
-    <p:extLst>
-      <p:ext uri="{BB962C8B-B14F-4D97-AF65-F5344CB8AC3E}">
-        <p14:creationId xmlns:p14="http://schemas.microsoft.com/office/powerpoint/2010/main" val="397613359"/>
-      </p:ext>
-    </p:extLst>
-  </p:cSld>
-  <p:clrMap bg1="lt1" tx1="dk1" bg2="lt2" tx2="dk2" accent1="accent1" accent2="accent2" accent3="accent3" accent4="accent4" accent5="accent5" accent6="accent6" hlink="hlink" folHlink="folHlink"/>
-</p:handoutMaster>
 </file>
 
 <file path=ppt/ink/ink1.xml><?xml version="1.0" encoding="utf-8"?>
@@ -341,15 +147,15 @@
           <inkml:channelProperty channel="F" name="resolution" value="0" units="1/dev"/>
         </inkml:channelProperties>
       </inkml:inkSource>
-      <inkml:timestamp xml:id="ts0" timeString="2026-09-08T17:07:50.190"/>
+      <inkml:timestamp xml:id="ts0" timeString="2026-10-02T16:05:52.323"/>
     </inkml:context>
     <inkml:brush xml:id="br0">
-      <inkml:brushProperty name="width" value="0.035" units="cm"/>
-      <inkml:brushProperty name="height" value="0.035" units="cm"/>
-      <inkml:brushProperty name="color" value="#FF0000"/>
+      <inkml:brushProperty name="width" value="0.1" units="cm"/>
+      <inkml:brushProperty name="height" value="0.1" units="cm"/>
+      <inkml:brushProperty name="color" value="#FFC114"/>
     </inkml:brush>
   </inkml:definitions>
-  <inkml:trace contextRef="#ctx0" brushRef="#br0">0 0 24575,'5'0'0,"10"0"0,8 10 0,9 2 0,-1 9 0,4 1 0,5 1 0,0 6 0,-2-1 0,2 2 0,4 3 0,-2-1 0,2-6 0,3 2 0,2 2 0,-12-6 0,-11-5-8191</inkml:trace>
+  <inkml:trace contextRef="#ctx0" brushRef="#br0">0 1517 24575,'6'-1'0,"-1"-1"0,0 1 0,1-1 0,-1 0 0,0-1 0,0 1 0,0-1 0,6-5 0,9-4 0,0 1 0,-1-1 0,31-26 0,-32 24 0,1 0 0,37-21 0,3 9 0,2 2 0,0 3 0,79-16 0,196-24 0,-289 54 0,234-18 0,-74 10 0,133 6 0,-244 11 0,1-4 0,123-19 0,-134 5 0,-18 2 0,104-7 0,404 5 0,315 7 0,-529 35 0,56 0 0,4-3 0,-73-1 0,-211-19 0,320 19 0,577 36 0,-9-31 0,23-6 0,-653-19 0,46 15 0,159 0 0,-435-29 0,210-41 0,-217 27 0,386-77 0,-500 93 0,196-50 0,-198 46 0,-2-2 0,1-1 0,60-35 0,169-90 0,-22 14 0,-214 105 0,-1-2 0,48-45 0,-2 1 0,-64 54 0,0-1 0,-1-1 0,0 0 0,-2-2 0,0 1 0,-1-1 0,-1-1 0,9-22 0,29-48 0,-13 12 0,-31 64 0,0 0 0,2 1 0,-1 0 0,1 0 0,1 0 0,13-15 0,-20 26 0,0 1 0,0-1 0,0 1 0,1-1 0,-1 1 0,1 0 0,-1 0 0,1 0 0,-1 0 0,1 0 0,-1 0 0,1 0 0,0 0 0,0 1 0,-1-1 0,1 1 0,0-1 0,0 1 0,0 0 0,-1 0 0,1 0 0,0 0 0,0 0 0,0 0 0,0 0 0,0 0 0,-1 1 0,1-1 0,0 1 0,0-1 0,-1 1 0,1 0 0,0 0 0,-1 0 0,1 0 0,0 0 0,-1 0 0,0 0 0,1 0 0,1 2 0,5 7 0,0-1 0,-1 1 0,0 0 0,0 1 0,5 11 0,-2-2 0,23 34 0,43 55 0,-59-89 0,1 0 0,1-1 0,1 0 0,0-2 0,30 20 0,-8-11 0,0-2 0,2-1 0,1-3 0,0-1 0,1-3 0,1-2 0,84 15 0,136 25 0,21 3 0,397 62 0,-27-5 0,-411-73 0,325 38 0,-354-55 0,22 2 0,190 29 0,-46 2 0,-340-52 0,-3-2 0,0-2 0,0-2 0,50-8 0,25-1 0,-5 6 0,0 4 0,0 5 0,145 26 0,-133-12 0,1-5 0,223-3 0,-316-9 0,-1 1 0,0 1 0,44 12 0,-35-7 0,44 4 0,-47-10 0,-1 1 0,1 2 0,37 11 0,-35-7 0,60 9 0,-68-15 0,1 1 0,-2 2 0,57 20 0,-53-13 0,149 72 0,-160-73 0,-1 1 0,0 0 0,0 1 0,-2 1 0,34 36 0,-35-27-1365,-5-1-5461</inkml:trace>
 </inkml:ink>
 </file>
 
@@ -369,7 +175,7 @@
           <inkml:channelProperty channel="F" name="resolution" value="0" units="1/dev"/>
         </inkml:channelProperties>
       </inkml:inkSource>
-      <inkml:timestamp xml:id="ts0" timeString="2026-09-08T17:08:19.415"/>
+      <inkml:timestamp xml:id="ts0" timeString="2026-10-02T16:08:22.838"/>
     </inkml:context>
     <inkml:brush xml:id="br0">
       <inkml:brushProperty name="width" value="0.035" units="cm"/>
@@ -377,7 +183,7 @@
       <inkml:brushProperty name="color" value="#FFC114"/>
     </inkml:brush>
   </inkml:definitions>
-  <inkml:trace contextRef="#ctx0" brushRef="#br0">257 0 24575,'-9'0'0,"-4"5"0,-3 1 0,0 9 0,-1 12 0,-3 5 0,-7 2 0,1 5 0,5 5 0,-3-6 0,2 1 0,5 3 0,1-1 0,3-8-8191</inkml:trace>
+  <inkml:trace contextRef="#ctx0" brushRef="#br0">0 0 24575,'5'0'0,"10"0"0,8 10 0,9 2 0,-1 9 0,4 1 0,5 1 0,0 6 0,-2-1 0,2 2 0,4 3 0,-2-1 0,2-6 0,3 2 0,2 2 0,-12-6 0,-11-5-8191</inkml:trace>
 </inkml:ink>
 </file>
 
@@ -397,7 +203,7 @@
           <inkml:channelProperty channel="F" name="resolution" value="0" units="1/dev"/>
         </inkml:channelProperties>
       </inkml:inkSource>
-      <inkml:timestamp xml:id="ts0" timeString="2026-09-08T17:08:26.782"/>
+      <inkml:timestamp xml:id="ts0" timeString="2026-10-02T16:08:22.839"/>
     </inkml:context>
     <inkml:brush xml:id="br0">
       <inkml:brushProperty name="width" value="0.035" units="cm"/>
@@ -405,7 +211,7 @@
       <inkml:brushProperty name="color" value="#FFC114"/>
     </inkml:brush>
   </inkml:definitions>
-  <inkml:trace contextRef="#ctx0" brushRef="#br0">0 0 24575,'5'0'0,"10"0"0,8 10 0,9 2 0,-1 9 0,4 1 0,5 1 0,0 6 0,-2-1 0,2 2 0,4 3 0,-2-1 0,2-6 0,3 2 0,2 2 0,-12-6 0,-11-5-8191</inkml:trace>
+  <inkml:trace contextRef="#ctx0" brushRef="#br0">257 0 24575,'-9'0'0,"-4"5"0,-3 1 0,0 9 0,-1 12 0,-3 5 0,-7 2 0,1 5 0,5 5 0,-3-6 0,2 1 0,5 3 0,1-1 0,3-8-8191</inkml:trace>
 </inkml:ink>
 </file>
 
@@ -425,7 +231,7 @@
           <inkml:channelProperty channel="F" name="resolution" value="0" units="1/dev"/>
         </inkml:channelProperties>
       </inkml:inkSource>
-      <inkml:timestamp xml:id="ts0" timeString="2026-09-08T17:08:26.783"/>
+      <inkml:timestamp xml:id="ts0" timeString="2026-10-02T16:08:22.840"/>
     </inkml:context>
     <inkml:brush xml:id="br0">
       <inkml:brushProperty name="width" value="0.035" units="cm"/>
@@ -433,7 +239,7 @@
       <inkml:brushProperty name="color" value="#FFC114"/>
     </inkml:brush>
   </inkml:definitions>
-  <inkml:trace contextRef="#ctx0" brushRef="#br0">257 0 24575,'-9'0'0,"-4"5"0,-3 1 0,0 9 0,-1 12 0,-3 5 0,-7 2 0,1 5 0,5 5 0,-3-6 0,2 1 0,5 3 0,1-1 0,3-8-8191</inkml:trace>
+  <inkml:trace contextRef="#ctx0" brushRef="#br0">0 0 24575,'5'0'0,"10"0"0,8 10 0,9 2 0,-1 9 0,4 1 0,5 1 0,0 6 0,-2-1 0,2 2 0,4 3 0,-2-1 0,2-6 0,3 2 0,2 2 0,-12-6 0,-11-5-8191</inkml:trace>
 </inkml:ink>
 </file>
 
@@ -453,15 +259,15 @@
           <inkml:channelProperty channel="F" name="resolution" value="0" units="1/dev"/>
         </inkml:channelProperties>
       </inkml:inkSource>
-      <inkml:timestamp xml:id="ts0" timeString="2026-09-08T17:09:16.809"/>
+      <inkml:timestamp xml:id="ts0" timeString="2026-10-02T16:08:22.841"/>
     </inkml:context>
     <inkml:brush xml:id="br0">
       <inkml:brushProperty name="width" value="0.035" units="cm"/>
       <inkml:brushProperty name="height" value="0.035" units="cm"/>
-      <inkml:brushProperty name="color" value="#FF0000"/>
+      <inkml:brushProperty name="color" value="#FFC114"/>
     </inkml:brush>
   </inkml:definitions>
-  <inkml:trace contextRef="#ctx0" brushRef="#br0">0 0 24575,'5'0'0,"10"0"0,8 10 0,9 2 0,-1 9 0,4 1 0,5 1 0,0 6 0,-2-1 0,2 2 0,4 3 0,-2-1 0,2-6 0,3 2 0,2 2 0,-12-6 0,-11-5-8191</inkml:trace>
+  <inkml:trace contextRef="#ctx0" brushRef="#br0">257 0 24575,'-9'0'0,"-4"5"0,-3 1 0,0 9 0,-1 12 0,-3 5 0,-7 2 0,1 5 0,5 5 0,-3-6 0,2 1 0,5 3 0,1-1 0,3-8-8191</inkml:trace>
 </inkml:ink>
 </file>
 
@@ -481,7 +287,7 @@
           <inkml:channelProperty channel="F" name="resolution" value="0" units="1/dev"/>
         </inkml:channelProperties>
       </inkml:inkSource>
-      <inkml:timestamp xml:id="ts0" timeString="2026-09-08T17:09:16.810"/>
+      <inkml:timestamp xml:id="ts0" timeString="2026-10-02T16:08:22.842"/>
     </inkml:context>
     <inkml:brush xml:id="br0">
       <inkml:brushProperty name="width" value="0.035" units="cm"/>
@@ -489,7 +295,7 @@
       <inkml:brushProperty name="color" value="#FF0000"/>
     </inkml:brush>
   </inkml:definitions>
-  <inkml:trace contextRef="#ctx0" brushRef="#br0">257 0 24575,'-9'0'0,"-4"5"0,-3 1 0,0 9 0,-1 12 0,-3 5 0,-7 2 0,1 5 0,5 5 0,-3-6 0,2 1 0,5 3 0,1-1 0,3-8-8191</inkml:trace>
+  <inkml:trace contextRef="#ctx0" brushRef="#br0">0 0 24575,'5'0'0,"10"0"0,8 10 0,9 2 0,-1 9 0,4 1 0,5 1 0,0 6 0,-2-1 0,2 2 0,4 3 0,-2-1 0,2-6 0,3 2 0,2 2 0,-12-6 0,-11-5-8191</inkml:trace>
 </inkml:ink>
 </file>
 
@@ -509,15 +315,15 @@
           <inkml:channelProperty channel="F" name="resolution" value="0" units="1/dev"/>
         </inkml:channelProperties>
       </inkml:inkSource>
-      <inkml:timestamp xml:id="ts0" timeString="2026-09-08T17:09:55.558"/>
+      <inkml:timestamp xml:id="ts0" timeString="2026-10-02T16:08:22.843"/>
     </inkml:context>
     <inkml:brush xml:id="br0">
       <inkml:brushProperty name="width" value="0.035" units="cm"/>
       <inkml:brushProperty name="height" value="0.035" units="cm"/>
-      <inkml:brushProperty name="color" value="#C00000"/>
+      <inkml:brushProperty name="color" value="#FF0000"/>
     </inkml:brush>
   </inkml:definitions>
-  <inkml:trace contextRef="#ctx0" brushRef="#br0">0 0 24575,'5'0'0,"10"0"0,8 10 0,9 2 0,-1 9 0,4 1 0,5 1 0,0 6 0,-2-1 0,2 2 0,4 3 0,-2-1 0,2-6 0,3 2 0,2 2 0,-12-6 0,-11-5-8191</inkml:trace>
+  <inkml:trace contextRef="#ctx0" brushRef="#br0">257 0 24575,'-9'0'0,"-4"5"0,-3 1 0,0 9 0,-1 12 0,-3 5 0,-7 2 0,1 5 0,5 5 0,-3-6 0,2 1 0,5 3 0,1-1 0,3-8-8191</inkml:trace>
 </inkml:ink>
 </file>
 
@@ -537,7 +343,7 @@
           <inkml:channelProperty channel="F" name="resolution" value="0" units="1/dev"/>
         </inkml:channelProperties>
       </inkml:inkSource>
-      <inkml:timestamp xml:id="ts0" timeString="2026-09-08T17:09:55.559"/>
+      <inkml:timestamp xml:id="ts0" timeString="2026-10-02T16:08:22.844"/>
     </inkml:context>
     <inkml:brush xml:id="br0">
       <inkml:brushProperty name="width" value="0.035" units="cm"/>
@@ -545,7 +351,7 @@
       <inkml:brushProperty name="color" value="#C00000"/>
     </inkml:brush>
   </inkml:definitions>
-  <inkml:trace contextRef="#ctx0" brushRef="#br0">257 0 24575,'-9'0'0,"-4"5"0,-3 1 0,0 9 0,-1 12 0,-3 5 0,-7 2 0,1 5 0,5 5 0,-3-6 0,2 1 0,5 3 0,1-1 0,3-8-8191</inkml:trace>
+  <inkml:trace contextRef="#ctx0" brushRef="#br0">0 0 24575,'5'0'0,"10"0"0,8 10 0,9 2 0,-1 9 0,4 1 0,5 1 0,0 6 0,-2-1 0,2 2 0,4 3 0,-2-1 0,2-6 0,3 2 0,2 2 0,-12-6 0,-11-5-8191</inkml:trace>
 </inkml:ink>
 </file>
 
@@ -565,15 +371,15 @@
           <inkml:channelProperty channel="F" name="resolution" value="0" units="1/dev"/>
         </inkml:channelProperties>
       </inkml:inkSource>
-      <inkml:timestamp xml:id="ts0" timeString="2026-09-08T17:10:13.579"/>
+      <inkml:timestamp xml:id="ts0" timeString="2026-10-02T16:08:22.845"/>
     </inkml:context>
     <inkml:brush xml:id="br0">
       <inkml:brushProperty name="width" value="0.035" units="cm"/>
       <inkml:brushProperty name="height" value="0.035" units="cm"/>
-      <inkml:brushProperty name="color" value="#002060"/>
+      <inkml:brushProperty name="color" value="#C00000"/>
     </inkml:brush>
   </inkml:definitions>
-  <inkml:trace contextRef="#ctx0" brushRef="#br0">0 0 24575,'5'0'0,"10"0"0,8 10 0,9 2 0,-1 9 0,4 1 0,5 1 0,0 6 0,-2-1 0,2 2 0,4 3 0,-2-1 0,2-6 0,3 2 0,2 2 0,-12-6 0,-11-5-8191</inkml:trace>
+  <inkml:trace contextRef="#ctx0" brushRef="#br0">257 0 24575,'-9'0'0,"-4"5"0,-3 1 0,0 9 0,-1 12 0,-3 5 0,-7 2 0,1 5 0,5 5 0,-3-6 0,2 1 0,5 3 0,1-1 0,3-8-8191</inkml:trace>
 </inkml:ink>
 </file>
 
@@ -593,7 +399,7 @@
           <inkml:channelProperty channel="F" name="resolution" value="0" units="1/dev"/>
         </inkml:channelProperties>
       </inkml:inkSource>
-      <inkml:timestamp xml:id="ts0" timeString="2026-09-08T17:10:13.580"/>
+      <inkml:timestamp xml:id="ts0" timeString="2026-10-02T16:08:22.846"/>
     </inkml:context>
     <inkml:brush xml:id="br0">
       <inkml:brushProperty name="width" value="0.035" units="cm"/>
@@ -601,7 +407,7 @@
       <inkml:brushProperty name="color" value="#002060"/>
     </inkml:brush>
   </inkml:definitions>
-  <inkml:trace contextRef="#ctx0" brushRef="#br0">257 0 24575,'-9'0'0,"-4"5"0,-3 1 0,0 9 0,-1 12 0,-3 5 0,-7 2 0,1 5 0,5 5 0,-3-6 0,2 1 0,5 3 0,1-1 0,3-8-8191</inkml:trace>
+  <inkml:trace contextRef="#ctx0" brushRef="#br0">0 0 24575,'5'0'0,"10"0"0,8 10 0,9 2 0,-1 9 0,4 1 0,5 1 0,0 6 0,-2-1 0,2 2 0,4 3 0,-2-1 0,2-6 0,3 2 0,2 2 0,-12-6 0,-11-5-8191</inkml:trace>
 </inkml:ink>
 </file>
 
@@ -621,7 +427,7 @@
           <inkml:channelProperty channel="F" name="resolution" value="0" units="1/dev"/>
         </inkml:channelProperties>
       </inkml:inkSource>
-      <inkml:timestamp xml:id="ts0" timeString="2026-09-08T17:10:37.802"/>
+      <inkml:timestamp xml:id="ts0" timeString="2026-10-02T16:08:22.847"/>
     </inkml:context>
     <inkml:brush xml:id="br0">
       <inkml:brushProperty name="width" value="0.035" units="cm"/>
@@ -629,7 +435,7 @@
       <inkml:brushProperty name="color" value="#002060"/>
     </inkml:brush>
   </inkml:definitions>
-  <inkml:trace contextRef="#ctx0" brushRef="#br0">0 0 24575,'5'0'0,"10"0"0,8 10 0,9 2 0,-1 9 0,4 1 0,5 1 0,0 6 0,-2-1 0,2 2 0,4 3 0,-2-1 0,2-6 0,3 2 0,2 2 0,-12-6 0,-11-5-8191</inkml:trace>
+  <inkml:trace contextRef="#ctx0" brushRef="#br0">257 0 24575,'-9'0'0,"-4"5"0,-3 1 0,0 9 0,-1 12 0,-3 5 0,-7 2 0,1 5 0,5 5 0,-3-6 0,2 1 0,5 3 0,1-1 0,3-8-8191</inkml:trace>
 </inkml:ink>
 </file>
 
@@ -649,7 +455,7 @@
           <inkml:channelProperty channel="F" name="resolution" value="0" units="1/dev"/>
         </inkml:channelProperties>
       </inkml:inkSource>
-      <inkml:timestamp xml:id="ts0" timeString="2026-09-08T17:07:51.845"/>
+      <inkml:timestamp xml:id="ts0" timeString="2026-10-02T16:08:22.830"/>
     </inkml:context>
     <inkml:brush xml:id="br0">
       <inkml:brushProperty name="width" value="0.035" units="cm"/>
@@ -657,7 +463,7 @@
       <inkml:brushProperty name="color" value="#FF0000"/>
     </inkml:brush>
   </inkml:definitions>
-  <inkml:trace contextRef="#ctx0" brushRef="#br0">257 0 24575,'-9'0'0,"-4"5"0,-3 1 0,0 9 0,-1 12 0,-3 5 0,-7 2 0,1 5 0,5 5 0,-3-6 0,2 1 0,5 3 0,1-1 0,3-8-8191</inkml:trace>
+  <inkml:trace contextRef="#ctx0" brushRef="#br0">0 0 24575,'5'0'0,"10"0"0,8 10 0,9 2 0,-1 9 0,4 1 0,5 1 0,0 6 0,-2-1 0,2 2 0,4 3 0,-2-1 0,2-6 0,3 2 0,2 2 0,-12-6 0,-11-5-8191</inkml:trace>
 </inkml:ink>
 </file>
 
@@ -677,7 +483,7 @@
           <inkml:channelProperty channel="F" name="resolution" value="0" units="1/dev"/>
         </inkml:channelProperties>
       </inkml:inkSource>
-      <inkml:timestamp xml:id="ts0" timeString="2026-09-08T17:10:37.803"/>
+      <inkml:timestamp xml:id="ts0" timeString="2026-10-02T16:08:22.848"/>
     </inkml:context>
     <inkml:brush xml:id="br0">
       <inkml:brushProperty name="width" value="0.035" units="cm"/>
@@ -685,7 +491,7 @@
       <inkml:brushProperty name="color" value="#002060"/>
     </inkml:brush>
   </inkml:definitions>
-  <inkml:trace contextRef="#ctx0" brushRef="#br0">257 0 24575,'-9'0'0,"-4"5"0,-3 1 0,0 9 0,-1 12 0,-3 5 0,-7 2 0,1 5 0,5 5 0,-3-6 0,2 1 0,5 3 0,1-1 0,3-8-8191</inkml:trace>
+  <inkml:trace contextRef="#ctx0" brushRef="#br0">0 0 24575,'5'0'0,"10"0"0,8 10 0,9 2 0,-1 9 0,4 1 0,5 1 0,0 6 0,-2-1 0,2 2 0,4 3 0,-2-1 0,2-6 0,3 2 0,2 2 0,-12-6 0,-11-5-8191</inkml:trace>
 </inkml:ink>
 </file>
 
@@ -705,7 +511,7 @@
           <inkml:channelProperty channel="F" name="resolution" value="0" units="1/dev"/>
         </inkml:channelProperties>
       </inkml:inkSource>
-      <inkml:timestamp xml:id="ts0" timeString="2026-09-08T17:10:42.945"/>
+      <inkml:timestamp xml:id="ts0" timeString="2026-10-02T16:08:22.849"/>
     </inkml:context>
     <inkml:brush xml:id="br0">
       <inkml:brushProperty name="width" value="0.035" units="cm"/>
@@ -713,7 +519,7 @@
       <inkml:brushProperty name="color" value="#002060"/>
     </inkml:brush>
   </inkml:definitions>
-  <inkml:trace contextRef="#ctx0" brushRef="#br0">0 0 24575,'5'0'0,"10"0"0,8 10 0,9 2 0,-1 9 0,4 1 0,5 1 0,0 6 0,-2-1 0,2 2 0,4 3 0,-2-1 0,2-6 0,3 2 0,2 2 0,-12-6 0,-11-5-8191</inkml:trace>
+  <inkml:trace contextRef="#ctx0" brushRef="#br0">257 0 24575,'-9'0'0,"-4"5"0,-3 1 0,0 9 0,-1 12 0,-3 5 0,-7 2 0,1 5 0,5 5 0,-3-6 0,2 1 0,5 3 0,1-1 0,3-8-8191</inkml:trace>
 </inkml:ink>
 </file>
 
@@ -733,7 +539,35 @@
           <inkml:channelProperty channel="F" name="resolution" value="0" units="1/dev"/>
         </inkml:channelProperties>
       </inkml:inkSource>
-      <inkml:timestamp xml:id="ts0" timeString="2026-09-08T17:10:42.946"/>
+      <inkml:timestamp xml:id="ts0" timeString="2026-10-02T16:08:22.850"/>
+    </inkml:context>
+    <inkml:brush xml:id="br0">
+      <inkml:brushProperty name="width" value="0.035" units="cm"/>
+      <inkml:brushProperty name="height" value="0.035" units="cm"/>
+      <inkml:brushProperty name="color" value="#002060"/>
+    </inkml:brush>
+  </inkml:definitions>
+  <inkml:trace contextRef="#ctx0" brushRef="#br0">0 0 24575,'5'0'0,"10"0"0,8 10 0,9 2 0,-1 9 0,4 1 0,5 1 0,0 6 0,-2-1 0,2 2 0,4 3 0,-2-1 0,2-6 0,3 2 0,2 2 0,-12-6 0,-11-5-8191</inkml:trace>
+</inkml:ink>
+</file>
+
+<file path=ppt/ink/ink23.xml><?xml version="1.0" encoding="utf-8"?>
+<inkml:ink xmlns:inkml="http://www.w3.org/2003/InkML">
+  <inkml:definitions>
+    <inkml:context xml:id="ctx0">
+      <inkml:inkSource xml:id="inkSrc0">
+        <inkml:traceFormat>
+          <inkml:channel name="X" type="integer" min="-2.14748E9" max="2.14748E9" units="cm"/>
+          <inkml:channel name="Y" type="integer" min="-2.14748E9" max="2.14748E9" units="cm"/>
+          <inkml:channel name="F" type="integer" max="32767" units="dev"/>
+        </inkml:traceFormat>
+        <inkml:channelProperties>
+          <inkml:channelProperty channel="X" name="resolution" value="1000" units="1/cm"/>
+          <inkml:channelProperty channel="Y" name="resolution" value="1000" units="1/cm"/>
+          <inkml:channelProperty channel="F" name="resolution" value="0" units="1/dev"/>
+        </inkml:channelProperties>
+      </inkml:inkSource>
+      <inkml:timestamp xml:id="ts0" timeString="2026-10-02T16:08:22.851"/>
     </inkml:context>
     <inkml:brush xml:id="br0">
       <inkml:brushProperty name="width" value="0.035" units="cm"/>
@@ -745,7 +579,7 @@
 </inkml:ink>
 </file>
 
-<file path=ppt/ink/ink23.xml><?xml version="1.0" encoding="utf-8"?>
+<file path=ppt/ink/ink24.xml><?xml version="1.0" encoding="utf-8"?>
 <inkml:ink xmlns:inkml="http://www.w3.org/2003/InkML">
   <inkml:definitions>
     <inkml:context xml:id="ctx0">
@@ -777,7 +611,7 @@
 </inkml:ink>
 </file>
 
-<file path=ppt/ink/ink24.xml><?xml version="1.0" encoding="utf-8"?>
+<file path=ppt/ink/ink25.xml><?xml version="1.0" encoding="utf-8"?>
 <inkml:ink xmlns:inkml="http://www.w3.org/2003/InkML">
   <inkml:definitions>
     <inkml:context xml:id="ctx0">
@@ -809,7 +643,7 @@
 </inkml:ink>
 </file>
 
-<file path=ppt/ink/ink25.xml><?xml version="1.0" encoding="utf-8"?>
+<file path=ppt/ink/ink26.xml><?xml version="1.0" encoding="utf-8"?>
 <inkml:ink xmlns:inkml="http://www.w3.org/2003/InkML">
   <inkml:definitions>
     <inkml:context xml:id="ctx0">
@@ -841,7 +675,7 @@
 </inkml:ink>
 </file>
 
-<file path=ppt/ink/ink26.xml><?xml version="1.0" encoding="utf-8"?>
+<file path=ppt/ink/ink27.xml><?xml version="1.0" encoding="utf-8"?>
 <inkml:ink xmlns:inkml="http://www.w3.org/2003/InkML">
   <inkml:definitions>
     <inkml:context xml:id="ctx0">
@@ -873,7 +707,7 @@
 </inkml:ink>
 </file>
 
-<file path=ppt/ink/ink27.xml><?xml version="1.0" encoding="utf-8"?>
+<file path=ppt/ink/ink28.xml><?xml version="1.0" encoding="utf-8"?>
 <inkml:ink xmlns:inkml="http://www.w3.org/2003/InkML">
   <inkml:definitions>
     <inkml:context xml:id="ctx0">
@@ -905,7 +739,7 @@
 </inkml:ink>
 </file>
 
-<file path=ppt/ink/ink28.xml><?xml version="1.0" encoding="utf-8"?>
+<file path=ppt/ink/ink29.xml><?xml version="1.0" encoding="utf-8"?>
 <inkml:ink xmlns:inkml="http://www.w3.org/2003/InkML">
   <inkml:definitions>
     <inkml:context xml:id="ctx0">
@@ -937,7 +771,35 @@
 </inkml:ink>
 </file>
 
-<file path=ppt/ink/ink29.xml><?xml version="1.0" encoding="utf-8"?>
+<file path=ppt/ink/ink3.xml><?xml version="1.0" encoding="utf-8"?>
+<inkml:ink xmlns:inkml="http://www.w3.org/2003/InkML">
+  <inkml:definitions>
+    <inkml:context xml:id="ctx0">
+      <inkml:inkSource xml:id="inkSrc0">
+        <inkml:traceFormat>
+          <inkml:channel name="X" type="integer" min="-2.14748E9" max="2.14748E9" units="cm"/>
+          <inkml:channel name="Y" type="integer" min="-2.14748E9" max="2.14748E9" units="cm"/>
+          <inkml:channel name="F" type="integer" max="32767" units="dev"/>
+        </inkml:traceFormat>
+        <inkml:channelProperties>
+          <inkml:channelProperty channel="X" name="resolution" value="1000" units="1/cm"/>
+          <inkml:channelProperty channel="Y" name="resolution" value="1000" units="1/cm"/>
+          <inkml:channelProperty channel="F" name="resolution" value="0" units="1/dev"/>
+        </inkml:channelProperties>
+      </inkml:inkSource>
+      <inkml:timestamp xml:id="ts0" timeString="2026-10-02T16:08:22.831"/>
+    </inkml:context>
+    <inkml:brush xml:id="br0">
+      <inkml:brushProperty name="width" value="0.035" units="cm"/>
+      <inkml:brushProperty name="height" value="0.035" units="cm"/>
+      <inkml:brushProperty name="color" value="#FF0000"/>
+    </inkml:brush>
+  </inkml:definitions>
+  <inkml:trace contextRef="#ctx0" brushRef="#br0">257 0 24575,'-9'0'0,"-4"5"0,-3 1 0,0 9 0,-1 12 0,-3 5 0,-7 2 0,1 5 0,5 5 0,-3-6 0,2 1 0,5 3 0,1-1 0,3-8-8191</inkml:trace>
+</inkml:ink>
+</file>
+
+<file path=ppt/ink/ink30.xml><?xml version="1.0" encoding="utf-8"?>
 <inkml:ink xmlns:inkml="http://www.w3.org/2003/InkML">
   <inkml:definitions>
     <inkml:context xml:id="ctx0">
@@ -969,35 +831,7 @@
 </inkml:ink>
 </file>
 
-<file path=ppt/ink/ink3.xml><?xml version="1.0" encoding="utf-8"?>
-<inkml:ink xmlns:inkml="http://www.w3.org/2003/InkML">
-  <inkml:definitions>
-    <inkml:context xml:id="ctx0">
-      <inkml:inkSource xml:id="inkSrc0">
-        <inkml:traceFormat>
-          <inkml:channel name="X" type="integer" min="-2.14748E9" max="2.14748E9" units="cm"/>
-          <inkml:channel name="Y" type="integer" min="-2.14748E9" max="2.14748E9" units="cm"/>
-          <inkml:channel name="F" type="integer" max="32767" units="dev"/>
-        </inkml:traceFormat>
-        <inkml:channelProperties>
-          <inkml:channelProperty channel="X" name="resolution" value="1000" units="1/cm"/>
-          <inkml:channelProperty channel="Y" name="resolution" value="1000" units="1/cm"/>
-          <inkml:channelProperty channel="F" name="resolution" value="0" units="1/dev"/>
-        </inkml:channelProperties>
-      </inkml:inkSource>
-      <inkml:timestamp xml:id="ts0" timeString="2026-09-08T17:07:58.262"/>
-    </inkml:context>
-    <inkml:brush xml:id="br0">
-      <inkml:brushProperty name="width" value="0.035" units="cm"/>
-      <inkml:brushProperty name="height" value="0.035" units="cm"/>
-      <inkml:brushProperty name="color" value="#FFC114"/>
-    </inkml:brush>
-  </inkml:definitions>
-  <inkml:trace contextRef="#ctx0" brushRef="#br0">0 0 24575,'5'0'0,"10"0"0,8 10 0,9 2 0,-1 9 0,4 1 0,5 1 0,0 6 0,-2-1 0,2 2 0,4 3 0,-2-1 0,2-6 0,3 2 0,2 2 0,-12-6 0,-11-5-8191</inkml:trace>
-</inkml:ink>
-</file>
-
-<file path=ppt/ink/ink30.xml><?xml version="1.0" encoding="utf-8"?>
+<file path=ppt/ink/ink31.xml><?xml version="1.0" encoding="utf-8"?>
 <inkml:ink xmlns:inkml="http://www.w3.org/2003/InkML">
   <inkml:definitions>
     <inkml:context xml:id="ctx0">
@@ -1029,7 +863,7 @@
 </inkml:ink>
 </file>
 
-<file path=ppt/ink/ink31.xml><?xml version="1.0" encoding="utf-8"?>
+<file path=ppt/ink/ink32.xml><?xml version="1.0" encoding="utf-8"?>
 <inkml:ink xmlns:inkml="http://www.w3.org/2003/InkML">
   <inkml:definitions>
     <inkml:context xml:id="ctx0">
@@ -1061,7 +895,7 @@
 </inkml:ink>
 </file>
 
-<file path=ppt/ink/ink32.xml><?xml version="1.0" encoding="utf-8"?>
+<file path=ppt/ink/ink33.xml><?xml version="1.0" encoding="utf-8"?>
 <inkml:ink xmlns:inkml="http://www.w3.org/2003/InkML">
   <inkml:definitions>
     <inkml:context xml:id="ctx0">
@@ -1093,7 +927,7 @@
 </inkml:ink>
 </file>
 
-<file path=ppt/ink/ink33.xml><?xml version="1.0" encoding="utf-8"?>
+<file path=ppt/ink/ink34.xml><?xml version="1.0" encoding="utf-8"?>
 <inkml:ink xmlns:inkml="http://www.w3.org/2003/InkML">
   <inkml:definitions>
     <inkml:context xml:id="ctx0">
@@ -1125,7 +959,7 @@
 </inkml:ink>
 </file>
 
-<file path=ppt/ink/ink34.xml><?xml version="1.0" encoding="utf-8"?>
+<file path=ppt/ink/ink35.xml><?xml version="1.0" encoding="utf-8"?>
 <inkml:ink xmlns:inkml="http://www.w3.org/2003/InkML">
   <inkml:definitions>
     <inkml:context xml:id="ctx0">
@@ -1157,7 +991,7 @@
 </inkml:ink>
 </file>
 
-<file path=ppt/ink/ink35.xml><?xml version="1.0" encoding="utf-8"?>
+<file path=ppt/ink/ink36.xml><?xml version="1.0" encoding="utf-8"?>
 <inkml:ink xmlns:inkml="http://www.w3.org/2003/InkML">
   <inkml:definitions>
     <inkml:context xml:id="ctx0">
@@ -1189,7 +1023,7 @@
 </inkml:ink>
 </file>
 
-<file path=ppt/ink/ink36.xml><?xml version="1.0" encoding="utf-8"?>
+<file path=ppt/ink/ink37.xml><?xml version="1.0" encoding="utf-8"?>
 <inkml:ink xmlns:inkml="http://www.w3.org/2003/InkML">
   <inkml:definitions>
     <inkml:context xml:id="ctx0">
@@ -1221,7 +1055,7 @@
 </inkml:ink>
 </file>
 
-<file path=ppt/ink/ink37.xml><?xml version="1.0" encoding="utf-8"?>
+<file path=ppt/ink/ink38.xml><?xml version="1.0" encoding="utf-8"?>
 <inkml:ink xmlns:inkml="http://www.w3.org/2003/InkML">
   <inkml:definitions>
     <inkml:context xml:id="ctx0">
@@ -1253,7 +1087,7 @@
 </inkml:ink>
 </file>
 
-<file path=ppt/ink/ink38.xml><?xml version="1.0" encoding="utf-8"?>
+<file path=ppt/ink/ink39.xml><?xml version="1.0" encoding="utf-8"?>
 <inkml:ink xmlns:inkml="http://www.w3.org/2003/InkML">
   <inkml:definitions>
     <inkml:context xml:id="ctx0">
@@ -1285,7 +1119,35 @@
 </inkml:ink>
 </file>
 
-<file path=ppt/ink/ink39.xml><?xml version="1.0" encoding="utf-8"?>
+<file path=ppt/ink/ink4.xml><?xml version="1.0" encoding="utf-8"?>
+<inkml:ink xmlns:inkml="http://www.w3.org/2003/InkML">
+  <inkml:definitions>
+    <inkml:context xml:id="ctx0">
+      <inkml:inkSource xml:id="inkSrc0">
+        <inkml:traceFormat>
+          <inkml:channel name="X" type="integer" min="-2.14748E9" max="2.14748E9" units="cm"/>
+          <inkml:channel name="Y" type="integer" min="-2.14748E9" max="2.14748E9" units="cm"/>
+          <inkml:channel name="F" type="integer" max="32767" units="dev"/>
+        </inkml:traceFormat>
+        <inkml:channelProperties>
+          <inkml:channelProperty channel="X" name="resolution" value="1000" units="1/cm"/>
+          <inkml:channelProperty channel="Y" name="resolution" value="1000" units="1/cm"/>
+          <inkml:channelProperty channel="F" name="resolution" value="0" units="1/dev"/>
+        </inkml:channelProperties>
+      </inkml:inkSource>
+      <inkml:timestamp xml:id="ts0" timeString="2026-10-02T16:08:22.832"/>
+    </inkml:context>
+    <inkml:brush xml:id="br0">
+      <inkml:brushProperty name="width" value="0.035" units="cm"/>
+      <inkml:brushProperty name="height" value="0.035" units="cm"/>
+      <inkml:brushProperty name="color" value="#FFC114"/>
+    </inkml:brush>
+  </inkml:definitions>
+  <inkml:trace contextRef="#ctx0" brushRef="#br0">0 0 24575,'5'0'0,"10"0"0,8 10 0,9 2 0,-1 9 0,4 1 0,5 1 0,0 6 0,-2-1 0,2 2 0,4 3 0,-2-1 0,2-6 0,3 2 0,2 2 0,-12-6 0,-11-5-8191</inkml:trace>
+</inkml:ink>
+</file>
+
+<file path=ppt/ink/ink40.xml><?xml version="1.0" encoding="utf-8"?>
 <inkml:ink xmlns:inkml="http://www.w3.org/2003/InkML">
   <inkml:definitions>
     <inkml:context xml:id="ctx0">
@@ -1317,35 +1179,7 @@
 </inkml:ink>
 </file>
 
-<file path=ppt/ink/ink4.xml><?xml version="1.0" encoding="utf-8"?>
-<inkml:ink xmlns:inkml="http://www.w3.org/2003/InkML">
-  <inkml:definitions>
-    <inkml:context xml:id="ctx0">
-      <inkml:inkSource xml:id="inkSrc0">
-        <inkml:traceFormat>
-          <inkml:channel name="X" type="integer" min="-2.14748E9" max="2.14748E9" units="cm"/>
-          <inkml:channel name="Y" type="integer" min="-2.14748E9" max="2.14748E9" units="cm"/>
-          <inkml:channel name="F" type="integer" max="32767" units="dev"/>
-        </inkml:traceFormat>
-        <inkml:channelProperties>
-          <inkml:channelProperty channel="X" name="resolution" value="1000" units="1/cm"/>
-          <inkml:channelProperty channel="Y" name="resolution" value="1000" units="1/cm"/>
-          <inkml:channelProperty channel="F" name="resolution" value="0" units="1/dev"/>
-        </inkml:channelProperties>
-      </inkml:inkSource>
-      <inkml:timestamp xml:id="ts0" timeString="2026-09-08T17:07:58.263"/>
-    </inkml:context>
-    <inkml:brush xml:id="br0">
-      <inkml:brushProperty name="width" value="0.035" units="cm"/>
-      <inkml:brushProperty name="height" value="0.035" units="cm"/>
-      <inkml:brushProperty name="color" value="#FFC114"/>
-    </inkml:brush>
-  </inkml:definitions>
-  <inkml:trace contextRef="#ctx0" brushRef="#br0">257 0 24575,'-9'0'0,"-4"5"0,-3 1 0,0 9 0,-1 12 0,-3 5 0,-7 2 0,1 5 0,5 5 0,-3-6 0,2 1 0,5 3 0,1-1 0,3-8-8191</inkml:trace>
-</inkml:ink>
-</file>
-
-<file path=ppt/ink/ink40.xml><?xml version="1.0" encoding="utf-8"?>
+<file path=ppt/ink/ink41.xml><?xml version="1.0" encoding="utf-8"?>
 <inkml:ink xmlns:inkml="http://www.w3.org/2003/InkML">
   <inkml:definitions>
     <inkml:context xml:id="ctx0">
@@ -1377,7 +1211,7 @@
 </inkml:ink>
 </file>
 
-<file path=ppt/ink/ink41.xml><?xml version="1.0" encoding="utf-8"?>
+<file path=ppt/ink/ink42.xml><?xml version="1.0" encoding="utf-8"?>
 <inkml:ink xmlns:inkml="http://www.w3.org/2003/InkML">
   <inkml:definitions>
     <inkml:context xml:id="ctx0">
@@ -1409,7 +1243,7 @@
 </inkml:ink>
 </file>
 
-<file path=ppt/ink/ink42.xml><?xml version="1.0" encoding="utf-8"?>
+<file path=ppt/ink/ink43.xml><?xml version="1.0" encoding="utf-8"?>
 <inkml:ink xmlns:inkml="http://www.w3.org/2003/InkML">
   <inkml:definitions>
     <inkml:context xml:id="ctx0">
@@ -1441,7 +1275,7 @@
 </inkml:ink>
 </file>
 
-<file path=ppt/ink/ink43.xml><?xml version="1.0" encoding="utf-8"?>
+<file path=ppt/ink/ink44.xml><?xml version="1.0" encoding="utf-8"?>
 <inkml:ink xmlns:inkml="http://www.w3.org/2003/InkML">
   <inkml:definitions>
     <inkml:context xml:id="ctx0">
@@ -1473,7 +1307,7 @@
 </inkml:ink>
 </file>
 
-<file path=ppt/ink/ink44.xml><?xml version="1.0" encoding="utf-8"?>
+<file path=ppt/ink/ink45.xml><?xml version="1.0" encoding="utf-8"?>
 <inkml:ink xmlns:inkml="http://www.w3.org/2003/InkML">
   <inkml:definitions>
     <inkml:context xml:id="ctx0">
@@ -1505,7 +1339,7 @@
 </inkml:ink>
 </file>
 
-<file path=ppt/ink/ink45.xml><?xml version="1.0" encoding="utf-8"?>
+<file path=ppt/ink/ink46.xml><?xml version="1.0" encoding="utf-8"?>
 <inkml:ink xmlns:inkml="http://www.w3.org/2003/InkML">
   <inkml:definitions>
     <inkml:context xml:id="ctx0">
@@ -1537,7 +1371,7 @@
 </inkml:ink>
 </file>
 
-<file path=ppt/ink/ink46.xml><?xml version="1.0" encoding="utf-8"?>
+<file path=ppt/ink/ink47.xml><?xml version="1.0" encoding="utf-8"?>
 <inkml:ink xmlns:inkml="http://www.w3.org/2003/InkML">
   <inkml:definitions>
     <inkml:context xml:id="ctx0">
@@ -1569,7 +1403,7 @@
 </inkml:ink>
 </file>
 
-<file path=ppt/ink/ink47.xml><?xml version="1.0" encoding="utf-8"?>
+<file path=ppt/ink/ink48.xml><?xml version="1.0" encoding="utf-8"?>
 <inkml:ink xmlns:inkml="http://www.w3.org/2003/InkML">
   <inkml:definitions>
     <inkml:context xml:id="ctx0">
@@ -1601,7 +1435,7 @@
 </inkml:ink>
 </file>
 
-<file path=ppt/ink/ink48.xml><?xml version="1.0" encoding="utf-8"?>
+<file path=ppt/ink/ink49.xml><?xml version="1.0" encoding="utf-8"?>
 <inkml:ink xmlns:inkml="http://www.w3.org/2003/InkML">
   <inkml:definitions>
     <inkml:context xml:id="ctx0">
@@ -1633,7 +1467,35 @@
 </inkml:ink>
 </file>
 
-<file path=ppt/ink/ink49.xml><?xml version="1.0" encoding="utf-8"?>
+<file path=ppt/ink/ink5.xml><?xml version="1.0" encoding="utf-8"?>
+<inkml:ink xmlns:inkml="http://www.w3.org/2003/InkML">
+  <inkml:definitions>
+    <inkml:context xml:id="ctx0">
+      <inkml:inkSource xml:id="inkSrc0">
+        <inkml:traceFormat>
+          <inkml:channel name="X" type="integer" min="-2.14748E9" max="2.14748E9" units="cm"/>
+          <inkml:channel name="Y" type="integer" min="-2.14748E9" max="2.14748E9" units="cm"/>
+          <inkml:channel name="F" type="integer" max="32767" units="dev"/>
+        </inkml:traceFormat>
+        <inkml:channelProperties>
+          <inkml:channelProperty channel="X" name="resolution" value="1000" units="1/cm"/>
+          <inkml:channelProperty channel="Y" name="resolution" value="1000" units="1/cm"/>
+          <inkml:channelProperty channel="F" name="resolution" value="0" units="1/dev"/>
+        </inkml:channelProperties>
+      </inkml:inkSource>
+      <inkml:timestamp xml:id="ts0" timeString="2026-10-02T16:08:22.833"/>
+    </inkml:context>
+    <inkml:brush xml:id="br0">
+      <inkml:brushProperty name="width" value="0.035" units="cm"/>
+      <inkml:brushProperty name="height" value="0.035" units="cm"/>
+      <inkml:brushProperty name="color" value="#FFC114"/>
+    </inkml:brush>
+  </inkml:definitions>
+  <inkml:trace contextRef="#ctx0" brushRef="#br0">257 0 24575,'-9'0'0,"-4"5"0,-3 1 0,0 9 0,-1 12 0,-3 5 0,-7 2 0,1 5 0,5 5 0,-3-6 0,2 1 0,5 3 0,1-1 0,3-8-8191</inkml:trace>
+</inkml:ink>
+</file>
+
+<file path=ppt/ink/ink50.xml><?xml version="1.0" encoding="utf-8"?>
 <inkml:ink xmlns:inkml="http://www.w3.org/2003/InkML">
   <inkml:definitions>
     <inkml:context xml:id="ctx0">
@@ -1665,35 +1527,7 @@
 </inkml:ink>
 </file>
 
-<file path=ppt/ink/ink5.xml><?xml version="1.0" encoding="utf-8"?>
-<inkml:ink xmlns:inkml="http://www.w3.org/2003/InkML">
-  <inkml:definitions>
-    <inkml:context xml:id="ctx0">
-      <inkml:inkSource xml:id="inkSrc0">
-        <inkml:traceFormat>
-          <inkml:channel name="X" type="integer" min="-2.14748E9" max="2.14748E9" units="cm"/>
-          <inkml:channel name="Y" type="integer" min="-2.14748E9" max="2.14748E9" units="cm"/>
-          <inkml:channel name="F" type="integer" max="32767" units="dev"/>
-        </inkml:traceFormat>
-        <inkml:channelProperties>
-          <inkml:channelProperty channel="X" name="resolution" value="1000" units="1/cm"/>
-          <inkml:channelProperty channel="Y" name="resolution" value="1000" units="1/cm"/>
-          <inkml:channelProperty channel="F" name="resolution" value="0" units="1/dev"/>
-        </inkml:channelProperties>
-      </inkml:inkSource>
-      <inkml:timestamp xml:id="ts0" timeString="2026-09-08T17:08:06.420"/>
-    </inkml:context>
-    <inkml:brush xml:id="br0">
-      <inkml:brushProperty name="width" value="0.035" units="cm"/>
-      <inkml:brushProperty name="height" value="0.035" units="cm"/>
-      <inkml:brushProperty name="color" value="#FFC114"/>
-    </inkml:brush>
-  </inkml:definitions>
-  <inkml:trace contextRef="#ctx0" brushRef="#br0">0 0 24575,'5'0'0,"10"0"0,8 10 0,9 2 0,-1 9 0,4 1 0,5 1 0,0 6 0,-2-1 0,2 2 0,4 3 0,-2-1 0,2-6 0,3 2 0,2 2 0,-12-6 0,-11-5-8191</inkml:trace>
-</inkml:ink>
-</file>
-
-<file path=ppt/ink/ink50.xml><?xml version="1.0" encoding="utf-8"?>
+<file path=ppt/ink/ink51.xml><?xml version="1.0" encoding="utf-8"?>
 <inkml:ink xmlns:inkml="http://www.w3.org/2003/InkML">
   <inkml:definitions>
     <inkml:context xml:id="ctx0">
@@ -1725,7 +1559,7 @@
 </inkml:ink>
 </file>
 
-<file path=ppt/ink/ink51.xml><?xml version="1.0" encoding="utf-8"?>
+<file path=ppt/ink/ink52.xml><?xml version="1.0" encoding="utf-8"?>
 <inkml:ink xmlns:inkml="http://www.w3.org/2003/InkML">
   <inkml:definitions>
     <inkml:context xml:id="ctx0">
@@ -1757,7 +1591,7 @@
 </inkml:ink>
 </file>
 
-<file path=ppt/ink/ink52.xml><?xml version="1.0" encoding="utf-8"?>
+<file path=ppt/ink/ink53.xml><?xml version="1.0" encoding="utf-8"?>
 <inkml:ink xmlns:inkml="http://www.w3.org/2003/InkML">
   <inkml:definitions>
     <inkml:context xml:id="ctx0">
@@ -1785,7 +1619,7 @@
 </inkml:ink>
 </file>
 
-<file path=ppt/ink/ink53.xml><?xml version="1.0" encoding="utf-8"?>
+<file path=ppt/ink/ink54.xml><?xml version="1.0" encoding="utf-8"?>
 <inkml:ink xmlns:inkml="http://www.w3.org/2003/InkML">
   <inkml:definitions>
     <inkml:context xml:id="ctx0">
@@ -1813,7 +1647,7 @@
 </inkml:ink>
 </file>
 
-<file path=ppt/ink/ink54.xml><?xml version="1.0" encoding="utf-8"?>
+<file path=ppt/ink/ink55.xml><?xml version="1.0" encoding="utf-8"?>
 <inkml:ink xmlns:inkml="http://www.w3.org/2003/InkML">
   <inkml:definitions>
     <inkml:context xml:id="ctx0">
@@ -1841,7 +1675,7 @@
 </inkml:ink>
 </file>
 
-<file path=ppt/ink/ink55.xml><?xml version="1.0" encoding="utf-8"?>
+<file path=ppt/ink/ink56.xml><?xml version="1.0" encoding="utf-8"?>
 <inkml:ink xmlns:inkml="http://www.w3.org/2003/InkML">
   <inkml:definitions>
     <inkml:context xml:id="ctx0">
@@ -1866,34 +1700,6 @@
     </inkml:brush>
   </inkml:definitions>
   <inkml:trace contextRef="#ctx0" brushRef="#br0">0 0 24575,'3545'0'-1365,"-3515"0"-5461</inkml:trace>
-</inkml:ink>
-</file>
-
-<file path=ppt/ink/ink56.xml><?xml version="1.0" encoding="utf-8"?>
-<inkml:ink xmlns:inkml="http://www.w3.org/2003/InkML">
-  <inkml:definitions>
-    <inkml:context xml:id="ctx0">
-      <inkml:inkSource xml:id="inkSrc0">
-        <inkml:traceFormat>
-          <inkml:channel name="X" type="integer" min="-2.14748E9" max="2.14748E9" units="cm"/>
-          <inkml:channel name="Y" type="integer" min="-2.14748E9" max="2.14748E9" units="cm"/>
-          <inkml:channel name="F" type="integer" max="32767" units="dev"/>
-        </inkml:traceFormat>
-        <inkml:channelProperties>
-          <inkml:channelProperty channel="X" name="resolution" value="1000" units="1/cm"/>
-          <inkml:channelProperty channel="Y" name="resolution" value="1000" units="1/cm"/>
-          <inkml:channelProperty channel="F" name="resolution" value="0" units="1/dev"/>
-        </inkml:channelProperties>
-      </inkml:inkSource>
-      <inkml:timestamp xml:id="ts0" timeString="2026-06-12T11:26:12.083"/>
-    </inkml:context>
-    <inkml:brush xml:id="br0">
-      <inkml:brushProperty name="width" value="0.1" units="cm"/>
-      <inkml:brushProperty name="height" value="0.1" units="cm"/>
-      <inkml:brushProperty name="color" value="#5B2D90"/>
-    </inkml:brush>
-  </inkml:definitions>
-  <inkml:trace contextRef="#ctx0" brushRef="#br0">1 104 24575,'26'-1'0,"1"-2"0,0-1 0,29-8 0,34-6 0,69-3 0,-11 0 0,203-2 0,346 25-1365,-664-2-5461</inkml:trace>
 </inkml:ink>
 </file>
 
@@ -1941,6 +1747,34 @@
           <inkml:channelProperty channel="F" name="resolution" value="0" units="1/dev"/>
         </inkml:channelProperties>
       </inkml:inkSource>
+      <inkml:timestamp xml:id="ts0" timeString="2026-06-12T11:26:12.083"/>
+    </inkml:context>
+    <inkml:brush xml:id="br0">
+      <inkml:brushProperty name="width" value="0.1" units="cm"/>
+      <inkml:brushProperty name="height" value="0.1" units="cm"/>
+      <inkml:brushProperty name="color" value="#5B2D90"/>
+    </inkml:brush>
+  </inkml:definitions>
+  <inkml:trace contextRef="#ctx0" brushRef="#br0">1 104 24575,'26'-1'0,"1"-2"0,0-1 0,29-8 0,34-6 0,69-3 0,-11 0 0,203-2 0,346 25-1365,-664-2-5461</inkml:trace>
+</inkml:ink>
+</file>
+
+<file path=ppt/ink/ink59.xml><?xml version="1.0" encoding="utf-8"?>
+<inkml:ink xmlns:inkml="http://www.w3.org/2003/InkML">
+  <inkml:definitions>
+    <inkml:context xml:id="ctx0">
+      <inkml:inkSource xml:id="inkSrc0">
+        <inkml:traceFormat>
+          <inkml:channel name="X" type="integer" min="-2.14748E9" max="2.14748E9" units="cm"/>
+          <inkml:channel name="Y" type="integer" min="-2.14748E9" max="2.14748E9" units="cm"/>
+          <inkml:channel name="F" type="integer" max="32767" units="dev"/>
+        </inkml:traceFormat>
+        <inkml:channelProperties>
+          <inkml:channelProperty channel="X" name="resolution" value="1000" units="1/cm"/>
+          <inkml:channelProperty channel="Y" name="resolution" value="1000" units="1/cm"/>
+          <inkml:channelProperty channel="F" name="resolution" value="0" units="1/dev"/>
+        </inkml:channelProperties>
+      </inkml:inkSource>
       <inkml:timestamp xml:id="ts0" timeString="2026-09-05T14:30:17.554"/>
     </inkml:context>
     <inkml:brush xml:id="br0">
@@ -1953,7 +1787,35 @@
 </inkml:ink>
 </file>
 
-<file path=ppt/ink/ink59.xml><?xml version="1.0" encoding="utf-8"?>
+<file path=ppt/ink/ink6.xml><?xml version="1.0" encoding="utf-8"?>
+<inkml:ink xmlns:inkml="http://www.w3.org/2003/InkML">
+  <inkml:definitions>
+    <inkml:context xml:id="ctx0">
+      <inkml:inkSource xml:id="inkSrc0">
+        <inkml:traceFormat>
+          <inkml:channel name="X" type="integer" min="-2.14748E9" max="2.14748E9" units="cm"/>
+          <inkml:channel name="Y" type="integer" min="-2.14748E9" max="2.14748E9" units="cm"/>
+          <inkml:channel name="F" type="integer" max="32767" units="dev"/>
+        </inkml:traceFormat>
+        <inkml:channelProperties>
+          <inkml:channelProperty channel="X" name="resolution" value="1000" units="1/cm"/>
+          <inkml:channelProperty channel="Y" name="resolution" value="1000" units="1/cm"/>
+          <inkml:channelProperty channel="F" name="resolution" value="0" units="1/dev"/>
+        </inkml:channelProperties>
+      </inkml:inkSource>
+      <inkml:timestamp xml:id="ts0" timeString="2026-10-02T16:08:22.834"/>
+    </inkml:context>
+    <inkml:brush xml:id="br0">
+      <inkml:brushProperty name="width" value="0.035" units="cm"/>
+      <inkml:brushProperty name="height" value="0.035" units="cm"/>
+      <inkml:brushProperty name="color" value="#FFC114"/>
+    </inkml:brush>
+  </inkml:definitions>
+  <inkml:trace contextRef="#ctx0" brushRef="#br0">0 0 24575,'5'0'0,"10"0"0,8 10 0,9 2 0,-1 9 0,4 1 0,5 1 0,0 6 0,-2-1 0,2 2 0,4 3 0,-2-1 0,2-6 0,3 2 0,2 2 0,-12-6 0,-11-5-8191</inkml:trace>
+</inkml:ink>
+</file>
+
+<file path=ppt/ink/ink60.xml><?xml version="1.0" encoding="utf-8"?>
 <inkml:ink xmlns:inkml="http://www.w3.org/2003/InkML">
   <inkml:definitions>
     <inkml:context xml:id="ctx0">
@@ -1981,35 +1843,7 @@
 </inkml:ink>
 </file>
 
-<file path=ppt/ink/ink6.xml><?xml version="1.0" encoding="utf-8"?>
-<inkml:ink xmlns:inkml="http://www.w3.org/2003/InkML">
-  <inkml:definitions>
-    <inkml:context xml:id="ctx0">
-      <inkml:inkSource xml:id="inkSrc0">
-        <inkml:traceFormat>
-          <inkml:channel name="X" type="integer" min="-2.14748E9" max="2.14748E9" units="cm"/>
-          <inkml:channel name="Y" type="integer" min="-2.14748E9" max="2.14748E9" units="cm"/>
-          <inkml:channel name="F" type="integer" max="32767" units="dev"/>
-        </inkml:traceFormat>
-        <inkml:channelProperties>
-          <inkml:channelProperty channel="X" name="resolution" value="1000" units="1/cm"/>
-          <inkml:channelProperty channel="Y" name="resolution" value="1000" units="1/cm"/>
-          <inkml:channelProperty channel="F" name="resolution" value="0" units="1/dev"/>
-        </inkml:channelProperties>
-      </inkml:inkSource>
-      <inkml:timestamp xml:id="ts0" timeString="2026-09-08T17:08:06.421"/>
-    </inkml:context>
-    <inkml:brush xml:id="br0">
-      <inkml:brushProperty name="width" value="0.035" units="cm"/>
-      <inkml:brushProperty name="height" value="0.035" units="cm"/>
-      <inkml:brushProperty name="color" value="#FFC114"/>
-    </inkml:brush>
-  </inkml:definitions>
-  <inkml:trace contextRef="#ctx0" brushRef="#br0">257 0 24575,'-9'0'0,"-4"5"0,-3 1 0,0 9 0,-1 12 0,-3 5 0,-7 2 0,1 5 0,5 5 0,-3-6 0,2 1 0,5 3 0,1-1 0,3-8-8191</inkml:trace>
-</inkml:ink>
-</file>
-
-<file path=ppt/ink/ink60.xml><?xml version="1.0" encoding="utf-8"?>
+<file path=ppt/ink/ink61.xml><?xml version="1.0" encoding="utf-8"?>
 <inkml:ink xmlns:inkml="http://www.w3.org/2003/InkML">
   <inkml:definitions>
     <inkml:context xml:id="ctx0">
@@ -2037,7 +1871,7 @@
 </inkml:ink>
 </file>
 
-<file path=ppt/ink/ink61.xml><?xml version="1.0" encoding="utf-8"?>
+<file path=ppt/ink/ink62.xml><?xml version="1.0" encoding="utf-8"?>
 <inkml:ink xmlns:inkml="http://www.w3.org/2003/InkML">
   <inkml:definitions>
     <inkml:context xml:id="ctx0">
@@ -2065,7 +1899,7 @@
 </inkml:ink>
 </file>
 
-<file path=ppt/ink/ink62.xml><?xml version="1.0" encoding="utf-8"?>
+<file path=ppt/ink/ink63.xml><?xml version="1.0" encoding="utf-8"?>
 <inkml:ink xmlns:inkml="http://www.w3.org/2003/InkML">
   <inkml:definitions>
     <inkml:context xml:id="ctx0">
@@ -2093,7 +1927,7 @@
 </inkml:ink>
 </file>
 
-<file path=ppt/ink/ink63.xml><?xml version="1.0" encoding="utf-8"?>
+<file path=ppt/ink/ink64.xml><?xml version="1.0" encoding="utf-8"?>
 <inkml:ink xmlns:inkml="http://www.w3.org/2003/InkML">
   <inkml:definitions>
     <inkml:context xml:id="ctx0">
@@ -2121,7 +1955,7 @@
 </inkml:ink>
 </file>
 
-<file path=ppt/ink/ink64.xml><?xml version="1.0" encoding="utf-8"?>
+<file path=ppt/ink/ink65.xml><?xml version="1.0" encoding="utf-8"?>
 <inkml:ink xmlns:inkml="http://www.w3.org/2003/InkML">
   <inkml:definitions>
     <inkml:context xml:id="ctx0">
@@ -2149,7 +1983,7 @@
 </inkml:ink>
 </file>
 
-<file path=ppt/ink/ink65.xml><?xml version="1.0" encoding="utf-8"?>
+<file path=ppt/ink/ink66.xml><?xml version="1.0" encoding="utf-8"?>
 <inkml:ink xmlns:inkml="http://www.w3.org/2003/InkML">
   <inkml:definitions>
     <inkml:context xml:id="ctx0">
@@ -2193,7 +2027,7 @@
           <inkml:channelProperty channel="F" name="resolution" value="0" units="1/dev"/>
         </inkml:channelProperties>
       </inkml:inkSource>
-      <inkml:timestamp xml:id="ts0" timeString="2026-09-08T17:08:12.056"/>
+      <inkml:timestamp xml:id="ts0" timeString="2026-10-02T16:08:22.835"/>
     </inkml:context>
     <inkml:brush xml:id="br0">
       <inkml:brushProperty name="width" value="0.035" units="cm"/>
@@ -2201,7 +2035,7 @@
       <inkml:brushProperty name="color" value="#FFC114"/>
     </inkml:brush>
   </inkml:definitions>
-  <inkml:trace contextRef="#ctx0" brushRef="#br0">0 0 24575,'5'0'0,"10"0"0,8 10 0,9 2 0,-1 9 0,4 1 0,5 1 0,0 6 0,-2-1 0,2 2 0,4 3 0,-2-1 0,2-6 0,3 2 0,2 2 0,-12-6 0,-11-5-8191</inkml:trace>
+  <inkml:trace contextRef="#ctx0" brushRef="#br0">257 0 24575,'-9'0'0,"-4"5"0,-3 1 0,0 9 0,-1 12 0,-3 5 0,-7 2 0,1 5 0,5 5 0,-3-6 0,2 1 0,5 3 0,1-1 0,3-8-8191</inkml:trace>
 </inkml:ink>
 </file>
 
@@ -2221,7 +2055,7 @@
           <inkml:channelProperty channel="F" name="resolution" value="0" units="1/dev"/>
         </inkml:channelProperties>
       </inkml:inkSource>
-      <inkml:timestamp xml:id="ts0" timeString="2026-09-08T17:08:12.057"/>
+      <inkml:timestamp xml:id="ts0" timeString="2026-10-02T16:08:22.836"/>
     </inkml:context>
     <inkml:brush xml:id="br0">
       <inkml:brushProperty name="width" value="0.035" units="cm"/>
@@ -2229,7 +2063,7 @@
       <inkml:brushProperty name="color" value="#FFC114"/>
     </inkml:brush>
   </inkml:definitions>
-  <inkml:trace contextRef="#ctx0" brushRef="#br0">257 0 24575,'-9'0'0,"-4"5"0,-3 1 0,0 9 0,-1 12 0,-3 5 0,-7 2 0,1 5 0,5 5 0,-3-6 0,2 1 0,5 3 0,1-1 0,3-8-8191</inkml:trace>
+  <inkml:trace contextRef="#ctx0" brushRef="#br0">0 0 24575,'5'0'0,"10"0"0,8 10 0,9 2 0,-1 9 0,4 1 0,5 1 0,0 6 0,-2-1 0,2 2 0,4 3 0,-2-1 0,2-6 0,3 2 0,2 2 0,-12-6 0,-11-5-8191</inkml:trace>
 </inkml:ink>
 </file>
 
@@ -2249,7 +2083,7 @@
           <inkml:channelProperty channel="F" name="resolution" value="0" units="1/dev"/>
         </inkml:channelProperties>
       </inkml:inkSource>
-      <inkml:timestamp xml:id="ts0" timeString="2026-09-08T17:08:19.414"/>
+      <inkml:timestamp xml:id="ts0" timeString="2026-10-02T16:08:22.837"/>
     </inkml:context>
     <inkml:brush xml:id="br0">
       <inkml:brushProperty name="width" value="0.035" units="cm"/>
@@ -2257,7 +2091,7 @@
       <inkml:brushProperty name="color" value="#FFC114"/>
     </inkml:brush>
   </inkml:definitions>
-  <inkml:trace contextRef="#ctx0" brushRef="#br0">0 0 24575,'5'0'0,"10"0"0,8 10 0,9 2 0,-1 9 0,4 1 0,5 1 0,0 6 0,-2-1 0,2 2 0,4 3 0,-2-1 0,2-6 0,3 2 0,2 2 0,-12-6 0,-11-5-8191</inkml:trace>
+  <inkml:trace contextRef="#ctx0" brushRef="#br0">257 0 24575,'-9'0'0,"-4"5"0,-3 1 0,0 9 0,-1 12 0,-3 5 0,-7 2 0,1 5 0,5 5 0,-3-6 0,2 1 0,5 3 0,1-1 0,3-8-8191</inkml:trace>
 </inkml:ink>
 </file>
 
@@ -2310,7 +2144,7 @@
             </a:lvl1pPr>
           </a:lstStyle>
           <a:p>
-            <a:endParaRPr lang="en-US"/>
+            <a:endParaRPr lang="en-IN"/>
           </a:p>
         </p:txBody>
       </p:sp>
@@ -2341,11 +2175,11 @@
             </a:lvl1pPr>
           </a:lstStyle>
           <a:p>
-            <a:fld id="{CB233BD1-3BA8-448D-9D08-7846095EA517}" type="datetimeFigureOut">
-              <a:rPr lang="en-US" smtClean="0"/>
-              <a:t>9/9/2026</a:t>
+            <a:fld id="{175B9DE0-307C-44AA-9A14-2F76096277F0}" type="datetimeFigureOut">
+              <a:rPr lang="en-IN" smtClean="0"/>
+              <a:t>02-10-2026</a:t>
             </a:fld>
-            <a:endParaRPr lang="en-US"/>
+            <a:endParaRPr lang="en-IN"/>
           </a:p>
         </p:txBody>
       </p:sp>
@@ -2378,7 +2212,7 @@
           <a:bodyPr vert="horz" lIns="91440" tIns="45720" rIns="91440" bIns="45720" rtlCol="0" anchor="ctr"/>
           <a:lstStyle/>
           <a:p>
-            <a:endParaRPr lang="en-US"/>
+            <a:endParaRPr lang="en-IN"/>
           </a:p>
         </p:txBody>
       </p:sp>
@@ -2438,6 +2272,7 @@
               <a:rPr lang="en-US"/>
               <a:t>Fifth level</a:t>
             </a:r>
+            <a:endParaRPr lang="en-IN"/>
           </a:p>
         </p:txBody>
       </p:sp>
@@ -2468,7 +2303,7 @@
             </a:lvl1pPr>
           </a:lstStyle>
           <a:p>
-            <a:endParaRPr lang="en-US"/>
+            <a:endParaRPr lang="en-IN"/>
           </a:p>
         </p:txBody>
       </p:sp>
@@ -2499,18 +2334,18 @@
             </a:lvl1pPr>
           </a:lstStyle>
           <a:p>
-            <a:fld id="{6C63499C-1FAC-4F66-96F8-6DA2CC28B748}" type="slidenum">
-              <a:rPr lang="en-US" smtClean="0"/>
+            <a:fld id="{78143FF3-6C40-4107-91BB-30F1D3636FBF}" type="slidenum">
+              <a:rPr lang="en-IN" smtClean="0"/>
               <a:t>‹#›</a:t>
             </a:fld>
-            <a:endParaRPr lang="en-US"/>
+            <a:endParaRPr lang="en-IN"/>
           </a:p>
         </p:txBody>
       </p:sp>
     </p:spTree>
     <p:extLst>
       <p:ext uri="{BB962C8B-B14F-4D97-AF65-F5344CB8AC3E}">
-        <p14:creationId xmlns:p14="http://schemas.microsoft.com/office/powerpoint/2010/main" val="817539779"/>
+        <p14:creationId xmlns:p14="http://schemas.microsoft.com/office/powerpoint/2010/main" val="2259534446"/>
       </p:ext>
     </p:extLst>
   </p:cSld>
@@ -2613,6 +2448,14 @@
 <file path=ppt/slideLayouts/slideLayout1.xml><?xml version="1.0" encoding="utf-8"?>
 <p:sldLayout xmlns:a="http://schemas.openxmlformats.org/drawingml/2006/main" xmlns:r="http://schemas.openxmlformats.org/officeDocument/2006/relationships" xmlns:p="http://schemas.openxmlformats.org/presentationml/2006/main" type="title" preserve="1">
   <p:cSld name="Title Slide">
+    <p:bg>
+      <p:bgPr>
+        <a:solidFill>
+          <a:schemeClr val="tx1"/>
+        </a:solidFill>
+        <a:effectLst/>
+      </p:bgPr>
+    </p:bg>
     <p:spTree>
       <p:nvGrpSpPr>
         <p:cNvPr id="1" name=""/>
@@ -2632,7 +2475,7 @@
           <p:cNvPr id="2" name="Title 1">
             <a:extLst>
               <a:ext uri="{FF2B5EF4-FFF2-40B4-BE49-F238E27FC236}">
-                <a16:creationId xmlns:a16="http://schemas.microsoft.com/office/drawing/2014/main" id="{65EB0F26-247A-F2E0-8FBA-6EA7974D69E5}"/>
+                <a16:creationId xmlns:a16="http://schemas.microsoft.com/office/drawing/2014/main" id="{2C8A318F-F6FC-6CB9-CEC6-8B2C0F5EE227}"/>
               </a:ext>
             </a:extLst>
           </p:cNvPr>
@@ -2661,6 +2504,7 @@
               <a:rPr lang="en-US"/>
               <a:t>Click to edit Master title style</a:t>
             </a:r>
+            <a:endParaRPr lang="en-IN"/>
           </a:p>
         </p:txBody>
       </p:sp>
@@ -2669,7 +2513,7 @@
           <p:cNvPr id="3" name="Subtitle 2">
             <a:extLst>
               <a:ext uri="{FF2B5EF4-FFF2-40B4-BE49-F238E27FC236}">
-                <a16:creationId xmlns:a16="http://schemas.microsoft.com/office/drawing/2014/main" id="{F394F308-CEE8-92BC-D91A-4212DEA015D6}"/>
+                <a16:creationId xmlns:a16="http://schemas.microsoft.com/office/drawing/2014/main" id="{E7F8D7EB-E762-144D-1496-74683313656C}"/>
               </a:ext>
             </a:extLst>
           </p:cNvPr>
@@ -2731,6 +2575,7 @@
               <a:rPr lang="en-US"/>
               <a:t>Click to edit Master subtitle style</a:t>
             </a:r>
+            <a:endParaRPr lang="en-IN"/>
           </a:p>
         </p:txBody>
       </p:sp>
@@ -2739,7 +2584,7 @@
           <p:cNvPr id="4" name="Date Placeholder 3">
             <a:extLst>
               <a:ext uri="{FF2B5EF4-FFF2-40B4-BE49-F238E27FC236}">
-                <a16:creationId xmlns:a16="http://schemas.microsoft.com/office/drawing/2014/main" id="{B32794D3-11DF-A675-8D28-EC65EF27521E}"/>
+                <a16:creationId xmlns:a16="http://schemas.microsoft.com/office/drawing/2014/main" id="{B7756C53-114C-E36A-EC7E-AEE4C2084ABF}"/>
               </a:ext>
             </a:extLst>
           </p:cNvPr>
@@ -2755,11 +2600,11 @@
           <a:bodyPr/>
           <a:lstStyle/>
           <a:p>
-            <a:fld id="{6383FAE1-13DE-4511-8C1B-C8AFB720664C}" type="datetimeFigureOut">
-              <a:rPr lang="en-US" smtClean="0"/>
-              <a:t>9/9/2026</a:t>
+            <a:fld id="{6EBA79C2-4FE3-4D0C-AFFB-D4FCE050D5EA}" type="datetimeFigureOut">
+              <a:rPr lang="en-IN" smtClean="0"/>
+              <a:t>02-10-2026</a:t>
             </a:fld>
-            <a:endParaRPr lang="en-US"/>
+            <a:endParaRPr lang="en-IN"/>
           </a:p>
         </p:txBody>
       </p:sp>
@@ -2768,7 +2613,7 @@
           <p:cNvPr id="5" name="Footer Placeholder 4">
             <a:extLst>
               <a:ext uri="{FF2B5EF4-FFF2-40B4-BE49-F238E27FC236}">
-                <a16:creationId xmlns:a16="http://schemas.microsoft.com/office/drawing/2014/main" id="{EC53FDAF-B83A-AE0A-B811-B7195D37FDD4}"/>
+                <a16:creationId xmlns:a16="http://schemas.microsoft.com/office/drawing/2014/main" id="{D76CC798-66E8-807B-3021-DC717C7ABB7D}"/>
               </a:ext>
             </a:extLst>
           </p:cNvPr>
@@ -2784,7 +2629,7 @@
           <a:bodyPr/>
           <a:lstStyle/>
           <a:p>
-            <a:endParaRPr lang="en-US"/>
+            <a:endParaRPr lang="en-IN"/>
           </a:p>
         </p:txBody>
       </p:sp>
@@ -2793,7 +2638,7 @@
           <p:cNvPr id="6" name="Slide Number Placeholder 5">
             <a:extLst>
               <a:ext uri="{FF2B5EF4-FFF2-40B4-BE49-F238E27FC236}">
-                <a16:creationId xmlns:a16="http://schemas.microsoft.com/office/drawing/2014/main" id="{149530BD-9515-D107-426C-B72742CBF0BF}"/>
+                <a16:creationId xmlns:a16="http://schemas.microsoft.com/office/drawing/2014/main" id="{8FAA2714-B223-D201-168E-C22AD16013D1}"/>
               </a:ext>
             </a:extLst>
           </p:cNvPr>
@@ -2809,18 +2654,55 @@
           <a:bodyPr/>
           <a:lstStyle/>
           <a:p>
-            <a:fld id="{81BC7A09-79EE-44A0-8F92-750D7C83D871}" type="slidenum">
-              <a:rPr lang="en-US" smtClean="0"/>
+            <a:fld id="{023A53CF-6AA3-4EF6-9F05-A0E3059C583D}" type="slidenum">
+              <a:rPr lang="en-IN" smtClean="0"/>
               <a:t>‹#›</a:t>
             </a:fld>
-            <a:endParaRPr lang="en-US"/>
+            <a:endParaRPr lang="en-IN"/>
           </a:p>
         </p:txBody>
       </p:sp>
+      <p:pic>
+        <p:nvPicPr>
+          <p:cNvPr id="8" name="Picture 7">
+            <a:extLst>
+              <a:ext uri="{FF2B5EF4-FFF2-40B4-BE49-F238E27FC236}">
+                <a16:creationId xmlns:a16="http://schemas.microsoft.com/office/drawing/2014/main" id="{B14F047B-8F92-089C-65A3-54359B3F76C4}"/>
+              </a:ext>
+            </a:extLst>
+          </p:cNvPr>
+          <p:cNvPicPr>
+            <a:picLocks noChangeAspect="1"/>
+          </p:cNvPicPr>
+          <p:nvPr userDrawn="1"/>
+        </p:nvPicPr>
+        <p:blipFill>
+          <a:blip r:embed="rId2">
+            <a:alphaModFix amt="68000"/>
+            <a:extLst>
+              <a:ext uri="{28A0092B-C50C-407E-A947-70E740481C1C}">
+                <a14:useLocalDpi xmlns:a14="http://schemas.microsoft.com/office/drawing/2010/main" val="0"/>
+              </a:ext>
+            </a:extLst>
+          </a:blip>
+          <a:stretch>
+            <a:fillRect/>
+          </a:stretch>
+        </p:blipFill>
+        <p:spPr>
+          <a:xfrm>
+            <a:off x="10857778" y="0"/>
+            <a:ext cx="1295581" cy="924054"/>
+          </a:xfrm>
+          <a:prstGeom prst="rect">
+            <a:avLst/>
+          </a:prstGeom>
+        </p:spPr>
+      </p:pic>
     </p:spTree>
     <p:extLst>
       <p:ext uri="{BB962C8B-B14F-4D97-AF65-F5344CB8AC3E}">
-        <p14:creationId xmlns:p14="http://schemas.microsoft.com/office/powerpoint/2010/main" val="1449282697"/>
+        <p14:creationId xmlns:p14="http://schemas.microsoft.com/office/powerpoint/2010/main" val="480681030"/>
       </p:ext>
     </p:extLst>
   </p:cSld>
@@ -2852,7 +2734,7 @@
           <p:cNvPr id="2" name="Title 1">
             <a:extLst>
               <a:ext uri="{FF2B5EF4-FFF2-40B4-BE49-F238E27FC236}">
-                <a16:creationId xmlns:a16="http://schemas.microsoft.com/office/drawing/2014/main" id="{A8B3002A-A21A-4F99-1BCE-F61C85D7B652}"/>
+                <a16:creationId xmlns:a16="http://schemas.microsoft.com/office/drawing/2014/main" id="{1C53211F-A80A-9BAC-AAEC-067CCDA5C0CB}"/>
               </a:ext>
             </a:extLst>
           </p:cNvPr>
@@ -2872,6 +2754,7 @@
               <a:rPr lang="en-US"/>
               <a:t>Click to edit Master title style</a:t>
             </a:r>
+            <a:endParaRPr lang="en-IN"/>
           </a:p>
         </p:txBody>
       </p:sp>
@@ -2880,7 +2763,7 @@
           <p:cNvPr id="3" name="Vertical Text Placeholder 2">
             <a:extLst>
               <a:ext uri="{FF2B5EF4-FFF2-40B4-BE49-F238E27FC236}">
-                <a16:creationId xmlns:a16="http://schemas.microsoft.com/office/drawing/2014/main" id="{50E85D03-9A7F-4A9E-379E-2DEA86D21FC4}"/>
+                <a16:creationId xmlns:a16="http://schemas.microsoft.com/office/drawing/2014/main" id="{538AD45D-5A88-1664-D692-069F5C5D1AC8}"/>
               </a:ext>
             </a:extLst>
           </p:cNvPr>
@@ -2929,6 +2812,7 @@
               <a:rPr lang="en-US"/>
               <a:t>Fifth level</a:t>
             </a:r>
+            <a:endParaRPr lang="en-IN"/>
           </a:p>
         </p:txBody>
       </p:sp>
@@ -2937,7 +2821,7 @@
           <p:cNvPr id="4" name="Date Placeholder 3">
             <a:extLst>
               <a:ext uri="{FF2B5EF4-FFF2-40B4-BE49-F238E27FC236}">
-                <a16:creationId xmlns:a16="http://schemas.microsoft.com/office/drawing/2014/main" id="{DFDEEFB4-95FB-FEDD-75E7-143E7ED29C8A}"/>
+                <a16:creationId xmlns:a16="http://schemas.microsoft.com/office/drawing/2014/main" id="{6B32EEB4-BA21-8613-2094-72EEFB7929B4}"/>
               </a:ext>
             </a:extLst>
           </p:cNvPr>
@@ -2953,11 +2837,11 @@
           <a:bodyPr/>
           <a:lstStyle/>
           <a:p>
-            <a:fld id="{6383FAE1-13DE-4511-8C1B-C8AFB720664C}" type="datetimeFigureOut">
-              <a:rPr lang="en-US" smtClean="0"/>
-              <a:t>9/9/2026</a:t>
+            <a:fld id="{6EBA79C2-4FE3-4D0C-AFFB-D4FCE050D5EA}" type="datetimeFigureOut">
+              <a:rPr lang="en-IN" smtClean="0"/>
+              <a:t>02-10-2026</a:t>
             </a:fld>
-            <a:endParaRPr lang="en-US"/>
+            <a:endParaRPr lang="en-IN"/>
           </a:p>
         </p:txBody>
       </p:sp>
@@ -2966,7 +2850,7 @@
           <p:cNvPr id="5" name="Footer Placeholder 4">
             <a:extLst>
               <a:ext uri="{FF2B5EF4-FFF2-40B4-BE49-F238E27FC236}">
-                <a16:creationId xmlns:a16="http://schemas.microsoft.com/office/drawing/2014/main" id="{F1BCE0D7-1712-FF0C-D965-BFD5AE1610F2}"/>
+                <a16:creationId xmlns:a16="http://schemas.microsoft.com/office/drawing/2014/main" id="{A9ECE1A2-6F93-B3CC-3837-CD60E48CFFC9}"/>
               </a:ext>
             </a:extLst>
           </p:cNvPr>
@@ -2982,7 +2866,7 @@
           <a:bodyPr/>
           <a:lstStyle/>
           <a:p>
-            <a:endParaRPr lang="en-US"/>
+            <a:endParaRPr lang="en-IN"/>
           </a:p>
         </p:txBody>
       </p:sp>
@@ -2991,7 +2875,7 @@
           <p:cNvPr id="6" name="Slide Number Placeholder 5">
             <a:extLst>
               <a:ext uri="{FF2B5EF4-FFF2-40B4-BE49-F238E27FC236}">
-                <a16:creationId xmlns:a16="http://schemas.microsoft.com/office/drawing/2014/main" id="{932632A1-4243-F65B-A2B0-3F2142C3415D}"/>
+                <a16:creationId xmlns:a16="http://schemas.microsoft.com/office/drawing/2014/main" id="{3BE5D015-61E2-E514-FC97-B282920D9867}"/>
               </a:ext>
             </a:extLst>
           </p:cNvPr>
@@ -3007,18 +2891,18 @@
           <a:bodyPr/>
           <a:lstStyle/>
           <a:p>
-            <a:fld id="{81BC7A09-79EE-44A0-8F92-750D7C83D871}" type="slidenum">
-              <a:rPr lang="en-US" smtClean="0"/>
+            <a:fld id="{023A53CF-6AA3-4EF6-9F05-A0E3059C583D}" type="slidenum">
+              <a:rPr lang="en-IN" smtClean="0"/>
               <a:t>‹#›</a:t>
             </a:fld>
-            <a:endParaRPr lang="en-US"/>
+            <a:endParaRPr lang="en-IN"/>
           </a:p>
         </p:txBody>
       </p:sp>
     </p:spTree>
     <p:extLst>
       <p:ext uri="{BB962C8B-B14F-4D97-AF65-F5344CB8AC3E}">
-        <p14:creationId xmlns:p14="http://schemas.microsoft.com/office/powerpoint/2010/main" val="4275079751"/>
+        <p14:creationId xmlns:p14="http://schemas.microsoft.com/office/powerpoint/2010/main" val="3282989655"/>
       </p:ext>
     </p:extLst>
   </p:cSld>
@@ -3050,7 +2934,7 @@
           <p:cNvPr id="2" name="Vertical Title 1">
             <a:extLst>
               <a:ext uri="{FF2B5EF4-FFF2-40B4-BE49-F238E27FC236}">
-                <a16:creationId xmlns:a16="http://schemas.microsoft.com/office/drawing/2014/main" id="{72293F13-2480-AB35-1A68-57A54CE6CD63}"/>
+                <a16:creationId xmlns:a16="http://schemas.microsoft.com/office/drawing/2014/main" id="{8B873E00-8852-9872-6FBC-537174553939}"/>
               </a:ext>
             </a:extLst>
           </p:cNvPr>
@@ -3075,6 +2959,7 @@
               <a:rPr lang="en-US"/>
               <a:t>Click to edit Master title style</a:t>
             </a:r>
+            <a:endParaRPr lang="en-IN"/>
           </a:p>
         </p:txBody>
       </p:sp>
@@ -3083,7 +2968,7 @@
           <p:cNvPr id="3" name="Vertical Text Placeholder 2">
             <a:extLst>
               <a:ext uri="{FF2B5EF4-FFF2-40B4-BE49-F238E27FC236}">
-                <a16:creationId xmlns:a16="http://schemas.microsoft.com/office/drawing/2014/main" id="{3BDA286C-2521-2961-CABA-5684DF43FB2A}"/>
+                <a16:creationId xmlns:a16="http://schemas.microsoft.com/office/drawing/2014/main" id="{FA02A146-0150-F26C-6A86-1CA1FD558AAE}"/>
               </a:ext>
             </a:extLst>
           </p:cNvPr>
@@ -3137,6 +3022,7 @@
               <a:rPr lang="en-US"/>
               <a:t>Fifth level</a:t>
             </a:r>
+            <a:endParaRPr lang="en-IN"/>
           </a:p>
         </p:txBody>
       </p:sp>
@@ -3145,7 +3031,7 @@
           <p:cNvPr id="4" name="Date Placeholder 3">
             <a:extLst>
               <a:ext uri="{FF2B5EF4-FFF2-40B4-BE49-F238E27FC236}">
-                <a16:creationId xmlns:a16="http://schemas.microsoft.com/office/drawing/2014/main" id="{74D5FF44-F63B-872A-DC8D-A873790A64A3}"/>
+                <a16:creationId xmlns:a16="http://schemas.microsoft.com/office/drawing/2014/main" id="{D8077DF1-F7DE-4956-6F82-6161FC02210A}"/>
               </a:ext>
             </a:extLst>
           </p:cNvPr>
@@ -3161,11 +3047,11 @@
           <a:bodyPr/>
           <a:lstStyle/>
           <a:p>
-            <a:fld id="{6383FAE1-13DE-4511-8C1B-C8AFB720664C}" type="datetimeFigureOut">
-              <a:rPr lang="en-US" smtClean="0"/>
-              <a:t>9/9/2026</a:t>
+            <a:fld id="{6EBA79C2-4FE3-4D0C-AFFB-D4FCE050D5EA}" type="datetimeFigureOut">
+              <a:rPr lang="en-IN" smtClean="0"/>
+              <a:t>02-10-2026</a:t>
             </a:fld>
-            <a:endParaRPr lang="en-US"/>
+            <a:endParaRPr lang="en-IN"/>
           </a:p>
         </p:txBody>
       </p:sp>
@@ -3174,7 +3060,7 @@
           <p:cNvPr id="5" name="Footer Placeholder 4">
             <a:extLst>
               <a:ext uri="{FF2B5EF4-FFF2-40B4-BE49-F238E27FC236}">
-                <a16:creationId xmlns:a16="http://schemas.microsoft.com/office/drawing/2014/main" id="{4E653A11-7793-38C6-0506-A6FBE9A02A10}"/>
+                <a16:creationId xmlns:a16="http://schemas.microsoft.com/office/drawing/2014/main" id="{3637416A-6960-5BA0-E825-F9D0B514C1AD}"/>
               </a:ext>
             </a:extLst>
           </p:cNvPr>
@@ -3190,7 +3076,7 @@
           <a:bodyPr/>
           <a:lstStyle/>
           <a:p>
-            <a:endParaRPr lang="en-US"/>
+            <a:endParaRPr lang="en-IN"/>
           </a:p>
         </p:txBody>
       </p:sp>
@@ -3199,7 +3085,7 @@
           <p:cNvPr id="6" name="Slide Number Placeholder 5">
             <a:extLst>
               <a:ext uri="{FF2B5EF4-FFF2-40B4-BE49-F238E27FC236}">
-                <a16:creationId xmlns:a16="http://schemas.microsoft.com/office/drawing/2014/main" id="{310962C0-F018-7629-445C-DDCA8AE1401B}"/>
+                <a16:creationId xmlns:a16="http://schemas.microsoft.com/office/drawing/2014/main" id="{E2C46A03-0511-8AD1-FB2D-69E35F8F158D}"/>
               </a:ext>
             </a:extLst>
           </p:cNvPr>
@@ -3215,18 +3101,18 @@
           <a:bodyPr/>
           <a:lstStyle/>
           <a:p>
-            <a:fld id="{81BC7A09-79EE-44A0-8F92-750D7C83D871}" type="slidenum">
-              <a:rPr lang="en-US" smtClean="0"/>
+            <a:fld id="{023A53CF-6AA3-4EF6-9F05-A0E3059C583D}" type="slidenum">
+              <a:rPr lang="en-IN" smtClean="0"/>
               <a:t>‹#›</a:t>
             </a:fld>
-            <a:endParaRPr lang="en-US"/>
+            <a:endParaRPr lang="en-IN"/>
           </a:p>
         </p:txBody>
       </p:sp>
     </p:spTree>
     <p:extLst>
       <p:ext uri="{BB962C8B-B14F-4D97-AF65-F5344CB8AC3E}">
-        <p14:creationId xmlns:p14="http://schemas.microsoft.com/office/powerpoint/2010/main" val="2612998807"/>
+        <p14:creationId xmlns:p14="http://schemas.microsoft.com/office/powerpoint/2010/main" val="3267707711"/>
       </p:ext>
     </p:extLst>
   </p:cSld>
@@ -3239,6 +3125,14 @@
 <file path=ppt/slideLayouts/slideLayout2.xml><?xml version="1.0" encoding="utf-8"?>
 <p:sldLayout xmlns:a="http://schemas.openxmlformats.org/drawingml/2006/main" xmlns:r="http://schemas.openxmlformats.org/officeDocument/2006/relationships" xmlns:p="http://schemas.openxmlformats.org/presentationml/2006/main" type="obj" preserve="1">
   <p:cSld name="Title and Content">
+    <p:bg>
+      <p:bgPr>
+        <a:solidFill>
+          <a:schemeClr val="bg1"/>
+        </a:solidFill>
+        <a:effectLst/>
+      </p:bgPr>
+    </p:bg>
     <p:spTree>
       <p:nvGrpSpPr>
         <p:cNvPr id="1" name=""/>
@@ -3258,7 +3152,7 @@
           <p:cNvPr id="2" name="Title 1">
             <a:extLst>
               <a:ext uri="{FF2B5EF4-FFF2-40B4-BE49-F238E27FC236}">
-                <a16:creationId xmlns:a16="http://schemas.microsoft.com/office/drawing/2014/main" id="{84CE7E77-8771-0BA4-B1D5-7F1DE0138C3D}"/>
+                <a16:creationId xmlns:a16="http://schemas.microsoft.com/office/drawing/2014/main" id="{D02ECE76-A752-DB86-6111-A724232D2637}"/>
               </a:ext>
             </a:extLst>
           </p:cNvPr>
@@ -3275,9 +3169,10 @@
           <a:lstStyle/>
           <a:p>
             <a:r>
-              <a:rPr lang="en-US" dirty="0"/>
+              <a:rPr lang="en-US"/>
               <a:t>Click to edit Master title style</a:t>
             </a:r>
+            <a:endParaRPr lang="en-IN"/>
           </a:p>
         </p:txBody>
       </p:sp>
@@ -3286,7 +3181,7 @@
           <p:cNvPr id="3" name="Content Placeholder 2">
             <a:extLst>
               <a:ext uri="{FF2B5EF4-FFF2-40B4-BE49-F238E27FC236}">
-                <a16:creationId xmlns:a16="http://schemas.microsoft.com/office/drawing/2014/main" id="{9543F30B-85C4-D934-2F30-179E3FCE9424}"/>
+                <a16:creationId xmlns:a16="http://schemas.microsoft.com/office/drawing/2014/main" id="{79D6FD18-B58E-8C68-26E2-D91631986249}"/>
               </a:ext>
             </a:extLst>
           </p:cNvPr>
@@ -3304,37 +3199,38 @@
           <a:p>
             <a:pPr lvl="0"/>
             <a:r>
-              <a:rPr lang="en-US" dirty="0"/>
+              <a:rPr lang="en-US"/>
               <a:t>Click to edit Master text styles</a:t>
             </a:r>
           </a:p>
           <a:p>
             <a:pPr lvl="1"/>
             <a:r>
-              <a:rPr lang="en-US" dirty="0"/>
+              <a:rPr lang="en-US"/>
               <a:t>Second level</a:t>
             </a:r>
           </a:p>
           <a:p>
             <a:pPr lvl="2"/>
             <a:r>
-              <a:rPr lang="en-US" dirty="0"/>
+              <a:rPr lang="en-US"/>
               <a:t>Third level</a:t>
             </a:r>
           </a:p>
           <a:p>
             <a:pPr lvl="3"/>
             <a:r>
-              <a:rPr lang="en-US" dirty="0"/>
+              <a:rPr lang="en-US"/>
               <a:t>Fourth level</a:t>
             </a:r>
           </a:p>
           <a:p>
             <a:pPr lvl="4"/>
             <a:r>
-              <a:rPr lang="en-US" dirty="0"/>
+              <a:rPr lang="en-US"/>
               <a:t>Fifth level</a:t>
             </a:r>
+            <a:endParaRPr lang="en-IN"/>
           </a:p>
         </p:txBody>
       </p:sp>
@@ -3343,7 +3239,7 @@
           <p:cNvPr id="4" name="Date Placeholder 3">
             <a:extLst>
               <a:ext uri="{FF2B5EF4-FFF2-40B4-BE49-F238E27FC236}">
-                <a16:creationId xmlns:a16="http://schemas.microsoft.com/office/drawing/2014/main" id="{7C8EF7AF-5CE7-4387-31F9-79D35620609B}"/>
+                <a16:creationId xmlns:a16="http://schemas.microsoft.com/office/drawing/2014/main" id="{A97B759C-A1DF-256A-A624-6AB43BC663E0}"/>
               </a:ext>
             </a:extLst>
           </p:cNvPr>
@@ -3359,11 +3255,11 @@
           <a:bodyPr/>
           <a:lstStyle/>
           <a:p>
-            <a:fld id="{6383FAE1-13DE-4511-8C1B-C8AFB720664C}" type="datetimeFigureOut">
-              <a:rPr lang="en-US" smtClean="0"/>
-              <a:t>9/9/2026</a:t>
+            <a:fld id="{6EBA79C2-4FE3-4D0C-AFFB-D4FCE050D5EA}" type="datetimeFigureOut">
+              <a:rPr lang="en-IN" smtClean="0"/>
+              <a:t>02-10-2026</a:t>
             </a:fld>
-            <a:endParaRPr lang="en-US"/>
+            <a:endParaRPr lang="en-IN"/>
           </a:p>
         </p:txBody>
       </p:sp>
@@ -3372,7 +3268,7 @@
           <p:cNvPr id="5" name="Footer Placeholder 4">
             <a:extLst>
               <a:ext uri="{FF2B5EF4-FFF2-40B4-BE49-F238E27FC236}">
-                <a16:creationId xmlns:a16="http://schemas.microsoft.com/office/drawing/2014/main" id="{B0FCCC03-E434-4684-B55E-3F2D39916923}"/>
+                <a16:creationId xmlns:a16="http://schemas.microsoft.com/office/drawing/2014/main" id="{EB71A0AA-5283-1539-E76D-C2704EDF6283}"/>
               </a:ext>
             </a:extLst>
           </p:cNvPr>
@@ -3388,7 +3284,7 @@
           <a:bodyPr/>
           <a:lstStyle/>
           <a:p>
-            <a:endParaRPr lang="en-US"/>
+            <a:endParaRPr lang="en-IN"/>
           </a:p>
         </p:txBody>
       </p:sp>
@@ -3397,7 +3293,7 @@
           <p:cNvPr id="6" name="Slide Number Placeholder 5">
             <a:extLst>
               <a:ext uri="{FF2B5EF4-FFF2-40B4-BE49-F238E27FC236}">
-                <a16:creationId xmlns:a16="http://schemas.microsoft.com/office/drawing/2014/main" id="{BA1F3B05-B983-07A3-4B58-9D2E18438894}"/>
+                <a16:creationId xmlns:a16="http://schemas.microsoft.com/office/drawing/2014/main" id="{6C212E95-A93E-CFE8-0044-F1F7486E0850}"/>
               </a:ext>
             </a:extLst>
           </p:cNvPr>
@@ -3413,23 +3309,60 @@
           <a:bodyPr/>
           <a:lstStyle/>
           <a:p>
-            <a:fld id="{81BC7A09-79EE-44A0-8F92-750D7C83D871}" type="slidenum">
-              <a:rPr lang="en-US" smtClean="0"/>
+            <a:fld id="{023A53CF-6AA3-4EF6-9F05-A0E3059C583D}" type="slidenum">
+              <a:rPr lang="en-IN" smtClean="0"/>
               <a:t>‹#›</a:t>
             </a:fld>
-            <a:endParaRPr lang="en-US"/>
+            <a:endParaRPr lang="en-IN"/>
           </a:p>
         </p:txBody>
       </p:sp>
+      <p:pic>
+        <p:nvPicPr>
+          <p:cNvPr id="12" name="Picture 11">
+            <a:extLst>
+              <a:ext uri="{FF2B5EF4-FFF2-40B4-BE49-F238E27FC236}">
+                <a16:creationId xmlns:a16="http://schemas.microsoft.com/office/drawing/2014/main" id="{366CBFAF-C1DF-ECA1-1863-AD86FBEE5E5B}"/>
+              </a:ext>
+            </a:extLst>
+          </p:cNvPr>
+          <p:cNvPicPr>
+            <a:picLocks noChangeAspect="1"/>
+          </p:cNvPicPr>
+          <p:nvPr userDrawn="1"/>
+        </p:nvPicPr>
+        <p:blipFill>
+          <a:blip r:embed="rId2">
+            <a:alphaModFix amt="66000"/>
+            <a:extLst>
+              <a:ext uri="{28A0092B-C50C-407E-A947-70E740481C1C}">
+                <a14:useLocalDpi xmlns:a14="http://schemas.microsoft.com/office/drawing/2010/main" val="0"/>
+              </a:ext>
+            </a:extLst>
+          </a:blip>
+          <a:stretch>
+            <a:fillRect/>
+          </a:stretch>
+        </p:blipFill>
+        <p:spPr>
+          <a:xfrm>
+            <a:off x="10870541" y="17252"/>
+            <a:ext cx="1295581" cy="924054"/>
+          </a:xfrm>
+          <a:prstGeom prst="rect">
+            <a:avLst/>
+          </a:prstGeom>
+        </p:spPr>
+      </p:pic>
     </p:spTree>
     <p:extLst>
       <p:ext uri="{BB962C8B-B14F-4D97-AF65-F5344CB8AC3E}">
-        <p14:creationId xmlns:p14="http://schemas.microsoft.com/office/powerpoint/2010/main" val="1596036442"/>
+        <p14:creationId xmlns:p14="http://schemas.microsoft.com/office/powerpoint/2010/main" val="2690746625"/>
       </p:ext>
     </p:extLst>
   </p:cSld>
   <p:clrMapOvr>
-    <a:masterClrMapping/>
+    <a:overrideClrMapping bg1="dk1" tx1="lt1" bg2="dk2" tx2="lt2" accent1="accent1" accent2="accent2" accent3="accent3" accent4="accent4" accent5="accent5" accent6="accent6" hlink="hlink" folHlink="folHlink"/>
   </p:clrMapOvr>
 </p:sldLayout>
 </file>
@@ -3456,7 +3389,7 @@
           <p:cNvPr id="2" name="Title 1">
             <a:extLst>
               <a:ext uri="{FF2B5EF4-FFF2-40B4-BE49-F238E27FC236}">
-                <a16:creationId xmlns:a16="http://schemas.microsoft.com/office/drawing/2014/main" id="{5F223C21-D6A5-2D17-9BFA-70B3353D6A08}"/>
+                <a16:creationId xmlns:a16="http://schemas.microsoft.com/office/drawing/2014/main" id="{6DA27E88-1D0E-B19B-1F3F-54DF859CE717}"/>
               </a:ext>
             </a:extLst>
           </p:cNvPr>
@@ -3485,6 +3418,7 @@
               <a:rPr lang="en-US"/>
               <a:t>Click to edit Master title style</a:t>
             </a:r>
+            <a:endParaRPr lang="en-IN"/>
           </a:p>
         </p:txBody>
       </p:sp>
@@ -3493,7 +3427,7 @@
           <p:cNvPr id="3" name="Text Placeholder 2">
             <a:extLst>
               <a:ext uri="{FF2B5EF4-FFF2-40B4-BE49-F238E27FC236}">
-                <a16:creationId xmlns:a16="http://schemas.microsoft.com/office/drawing/2014/main" id="{E92D89B8-191B-6AAD-5D5E-32B357265743}"/>
+                <a16:creationId xmlns:a16="http://schemas.microsoft.com/office/drawing/2014/main" id="{62CE41C0-D975-5322-05EF-B6920E580E10}"/>
               </a:ext>
             </a:extLst>
           </p:cNvPr>
@@ -3618,7 +3552,7 @@
           <p:cNvPr id="4" name="Date Placeholder 3">
             <a:extLst>
               <a:ext uri="{FF2B5EF4-FFF2-40B4-BE49-F238E27FC236}">
-                <a16:creationId xmlns:a16="http://schemas.microsoft.com/office/drawing/2014/main" id="{54CC528A-1563-9376-E089-4DA80AD11D0C}"/>
+                <a16:creationId xmlns:a16="http://schemas.microsoft.com/office/drawing/2014/main" id="{39D7B167-1E87-B93B-75F5-B33217202FE7}"/>
               </a:ext>
             </a:extLst>
           </p:cNvPr>
@@ -3634,11 +3568,11 @@
           <a:bodyPr/>
           <a:lstStyle/>
           <a:p>
-            <a:fld id="{6383FAE1-13DE-4511-8C1B-C8AFB720664C}" type="datetimeFigureOut">
-              <a:rPr lang="en-US" smtClean="0"/>
-              <a:t>9/9/2026</a:t>
+            <a:fld id="{6EBA79C2-4FE3-4D0C-AFFB-D4FCE050D5EA}" type="datetimeFigureOut">
+              <a:rPr lang="en-IN" smtClean="0"/>
+              <a:t>02-10-2026</a:t>
             </a:fld>
-            <a:endParaRPr lang="en-US"/>
+            <a:endParaRPr lang="en-IN"/>
           </a:p>
         </p:txBody>
       </p:sp>
@@ -3647,7 +3581,7 @@
           <p:cNvPr id="5" name="Footer Placeholder 4">
             <a:extLst>
               <a:ext uri="{FF2B5EF4-FFF2-40B4-BE49-F238E27FC236}">
-                <a16:creationId xmlns:a16="http://schemas.microsoft.com/office/drawing/2014/main" id="{0519A01D-6FDA-C269-FF95-3FDB205C8E37}"/>
+                <a16:creationId xmlns:a16="http://schemas.microsoft.com/office/drawing/2014/main" id="{6225C962-1ABF-F876-C7DD-10E729E42A8D}"/>
               </a:ext>
             </a:extLst>
           </p:cNvPr>
@@ -3663,7 +3597,7 @@
           <a:bodyPr/>
           <a:lstStyle/>
           <a:p>
-            <a:endParaRPr lang="en-US"/>
+            <a:endParaRPr lang="en-IN"/>
           </a:p>
         </p:txBody>
       </p:sp>
@@ -3672,7 +3606,7 @@
           <p:cNvPr id="6" name="Slide Number Placeholder 5">
             <a:extLst>
               <a:ext uri="{FF2B5EF4-FFF2-40B4-BE49-F238E27FC236}">
-                <a16:creationId xmlns:a16="http://schemas.microsoft.com/office/drawing/2014/main" id="{AA980A21-61AC-4B39-D886-3A327DB7346D}"/>
+                <a16:creationId xmlns:a16="http://schemas.microsoft.com/office/drawing/2014/main" id="{3A8F7B4D-DA1F-E875-52B5-31F353F49234}"/>
               </a:ext>
             </a:extLst>
           </p:cNvPr>
@@ -3688,18 +3622,18 @@
           <a:bodyPr/>
           <a:lstStyle/>
           <a:p>
-            <a:fld id="{81BC7A09-79EE-44A0-8F92-750D7C83D871}" type="slidenum">
-              <a:rPr lang="en-US" smtClean="0"/>
+            <a:fld id="{023A53CF-6AA3-4EF6-9F05-A0E3059C583D}" type="slidenum">
+              <a:rPr lang="en-IN" smtClean="0"/>
               <a:t>‹#›</a:t>
             </a:fld>
-            <a:endParaRPr lang="en-US"/>
+            <a:endParaRPr lang="en-IN"/>
           </a:p>
         </p:txBody>
       </p:sp>
     </p:spTree>
     <p:extLst>
       <p:ext uri="{BB962C8B-B14F-4D97-AF65-F5344CB8AC3E}">
-        <p14:creationId xmlns:p14="http://schemas.microsoft.com/office/powerpoint/2010/main" val="941114025"/>
+        <p14:creationId xmlns:p14="http://schemas.microsoft.com/office/powerpoint/2010/main" val="1281796100"/>
       </p:ext>
     </p:extLst>
   </p:cSld>
@@ -3731,7 +3665,7 @@
           <p:cNvPr id="2" name="Title 1">
             <a:extLst>
               <a:ext uri="{FF2B5EF4-FFF2-40B4-BE49-F238E27FC236}">
-                <a16:creationId xmlns:a16="http://schemas.microsoft.com/office/drawing/2014/main" id="{F2903C29-6DED-2A1F-5B4D-128B63652F74}"/>
+                <a16:creationId xmlns:a16="http://schemas.microsoft.com/office/drawing/2014/main" id="{04429F20-A52E-A2BE-2A7C-6344D890036E}"/>
               </a:ext>
             </a:extLst>
           </p:cNvPr>
@@ -3751,6 +3685,7 @@
               <a:rPr lang="en-US"/>
               <a:t>Click to edit Master title style</a:t>
             </a:r>
+            <a:endParaRPr lang="en-IN"/>
           </a:p>
         </p:txBody>
       </p:sp>
@@ -3759,7 +3694,7 @@
           <p:cNvPr id="3" name="Content Placeholder 2">
             <a:extLst>
               <a:ext uri="{FF2B5EF4-FFF2-40B4-BE49-F238E27FC236}">
-                <a16:creationId xmlns:a16="http://schemas.microsoft.com/office/drawing/2014/main" id="{16494ECB-0FCA-1AD0-F19A-27A4C16DC0F2}"/>
+                <a16:creationId xmlns:a16="http://schemas.microsoft.com/office/drawing/2014/main" id="{97E9F42D-CDDF-9B84-6F33-25E956F2DDE4}"/>
               </a:ext>
             </a:extLst>
           </p:cNvPr>
@@ -3813,6 +3748,7 @@
               <a:rPr lang="en-US"/>
               <a:t>Fifth level</a:t>
             </a:r>
+            <a:endParaRPr lang="en-IN"/>
           </a:p>
         </p:txBody>
       </p:sp>
@@ -3821,7 +3757,7 @@
           <p:cNvPr id="4" name="Content Placeholder 3">
             <a:extLst>
               <a:ext uri="{FF2B5EF4-FFF2-40B4-BE49-F238E27FC236}">
-                <a16:creationId xmlns:a16="http://schemas.microsoft.com/office/drawing/2014/main" id="{A07402C2-E657-5A54-9627-8C9CBCBBE0A7}"/>
+                <a16:creationId xmlns:a16="http://schemas.microsoft.com/office/drawing/2014/main" id="{761E0A4D-E831-6562-11B2-108204244C50}"/>
               </a:ext>
             </a:extLst>
           </p:cNvPr>
@@ -3875,6 +3811,7 @@
               <a:rPr lang="en-US"/>
               <a:t>Fifth level</a:t>
             </a:r>
+            <a:endParaRPr lang="en-IN"/>
           </a:p>
         </p:txBody>
       </p:sp>
@@ -3883,7 +3820,7 @@
           <p:cNvPr id="5" name="Date Placeholder 4">
             <a:extLst>
               <a:ext uri="{FF2B5EF4-FFF2-40B4-BE49-F238E27FC236}">
-                <a16:creationId xmlns:a16="http://schemas.microsoft.com/office/drawing/2014/main" id="{1501FADA-AE3E-B30F-6353-BF0478CF0E39}"/>
+                <a16:creationId xmlns:a16="http://schemas.microsoft.com/office/drawing/2014/main" id="{E85F4BEA-6EB0-7F6F-4BFA-B7DACF40DEA9}"/>
               </a:ext>
             </a:extLst>
           </p:cNvPr>
@@ -3899,11 +3836,11 @@
           <a:bodyPr/>
           <a:lstStyle/>
           <a:p>
-            <a:fld id="{6383FAE1-13DE-4511-8C1B-C8AFB720664C}" type="datetimeFigureOut">
-              <a:rPr lang="en-US" smtClean="0"/>
-              <a:t>9/9/2026</a:t>
+            <a:fld id="{6EBA79C2-4FE3-4D0C-AFFB-D4FCE050D5EA}" type="datetimeFigureOut">
+              <a:rPr lang="en-IN" smtClean="0"/>
+              <a:t>02-10-2026</a:t>
             </a:fld>
-            <a:endParaRPr lang="en-US"/>
+            <a:endParaRPr lang="en-IN"/>
           </a:p>
         </p:txBody>
       </p:sp>
@@ -3912,7 +3849,7 @@
           <p:cNvPr id="6" name="Footer Placeholder 5">
             <a:extLst>
               <a:ext uri="{FF2B5EF4-FFF2-40B4-BE49-F238E27FC236}">
-                <a16:creationId xmlns:a16="http://schemas.microsoft.com/office/drawing/2014/main" id="{7F16B517-96D7-6416-0C24-B14942ADD41C}"/>
+                <a16:creationId xmlns:a16="http://schemas.microsoft.com/office/drawing/2014/main" id="{9852B4B5-D542-513B-5FBA-7C8418FD6EE3}"/>
               </a:ext>
             </a:extLst>
           </p:cNvPr>
@@ -3928,7 +3865,7 @@
           <a:bodyPr/>
           <a:lstStyle/>
           <a:p>
-            <a:endParaRPr lang="en-US"/>
+            <a:endParaRPr lang="en-IN"/>
           </a:p>
         </p:txBody>
       </p:sp>
@@ -3937,7 +3874,7 @@
           <p:cNvPr id="7" name="Slide Number Placeholder 6">
             <a:extLst>
               <a:ext uri="{FF2B5EF4-FFF2-40B4-BE49-F238E27FC236}">
-                <a16:creationId xmlns:a16="http://schemas.microsoft.com/office/drawing/2014/main" id="{1546F179-BF2F-393A-1AA6-C893B7B9FA37}"/>
+                <a16:creationId xmlns:a16="http://schemas.microsoft.com/office/drawing/2014/main" id="{3A5B6383-F1CA-D4A5-9876-F4662B6051B7}"/>
               </a:ext>
             </a:extLst>
           </p:cNvPr>
@@ -3953,18 +3890,18 @@
           <a:bodyPr/>
           <a:lstStyle/>
           <a:p>
-            <a:fld id="{81BC7A09-79EE-44A0-8F92-750D7C83D871}" type="slidenum">
-              <a:rPr lang="en-US" smtClean="0"/>
+            <a:fld id="{023A53CF-6AA3-4EF6-9F05-A0E3059C583D}" type="slidenum">
+              <a:rPr lang="en-IN" smtClean="0"/>
               <a:t>‹#›</a:t>
             </a:fld>
-            <a:endParaRPr lang="en-US"/>
+            <a:endParaRPr lang="en-IN"/>
           </a:p>
         </p:txBody>
       </p:sp>
     </p:spTree>
     <p:extLst>
       <p:ext uri="{BB962C8B-B14F-4D97-AF65-F5344CB8AC3E}">
-        <p14:creationId xmlns:p14="http://schemas.microsoft.com/office/powerpoint/2010/main" val="3925852381"/>
+        <p14:creationId xmlns:p14="http://schemas.microsoft.com/office/powerpoint/2010/main" val="4027627197"/>
       </p:ext>
     </p:extLst>
   </p:cSld>
@@ -3996,7 +3933,7 @@
           <p:cNvPr id="2" name="Title 1">
             <a:extLst>
               <a:ext uri="{FF2B5EF4-FFF2-40B4-BE49-F238E27FC236}">
-                <a16:creationId xmlns:a16="http://schemas.microsoft.com/office/drawing/2014/main" id="{B6950483-A0C8-BF5B-61DE-39BC6FF9C123}"/>
+                <a16:creationId xmlns:a16="http://schemas.microsoft.com/office/drawing/2014/main" id="{9BCE9337-2FE3-561C-F11A-2CFAC3C88822}"/>
               </a:ext>
             </a:extLst>
           </p:cNvPr>
@@ -4021,6 +3958,7 @@
               <a:rPr lang="en-US"/>
               <a:t>Click to edit Master title style</a:t>
             </a:r>
+            <a:endParaRPr lang="en-IN"/>
           </a:p>
         </p:txBody>
       </p:sp>
@@ -4029,7 +3967,7 @@
           <p:cNvPr id="3" name="Text Placeholder 2">
             <a:extLst>
               <a:ext uri="{FF2B5EF4-FFF2-40B4-BE49-F238E27FC236}">
-                <a16:creationId xmlns:a16="http://schemas.microsoft.com/office/drawing/2014/main" id="{646DB55B-C040-F211-BC81-97628EA48448}"/>
+                <a16:creationId xmlns:a16="http://schemas.microsoft.com/office/drawing/2014/main" id="{80BCE1B6-2296-C3DE-5C27-E4057DFF68AE}"/>
               </a:ext>
             </a:extLst>
           </p:cNvPr>
@@ -4100,7 +4038,7 @@
           <p:cNvPr id="4" name="Content Placeholder 3">
             <a:extLst>
               <a:ext uri="{FF2B5EF4-FFF2-40B4-BE49-F238E27FC236}">
-                <a16:creationId xmlns:a16="http://schemas.microsoft.com/office/drawing/2014/main" id="{F593EEAE-1CB3-AAC8-5818-D61E389EF1E2}"/>
+                <a16:creationId xmlns:a16="http://schemas.microsoft.com/office/drawing/2014/main" id="{0EB2FC1E-2D6D-269A-6807-421A1A9C42DB}"/>
               </a:ext>
             </a:extLst>
           </p:cNvPr>
@@ -4154,6 +4092,7 @@
               <a:rPr lang="en-US"/>
               <a:t>Fifth level</a:t>
             </a:r>
+            <a:endParaRPr lang="en-IN"/>
           </a:p>
         </p:txBody>
       </p:sp>
@@ -4162,7 +4101,7 @@
           <p:cNvPr id="5" name="Text Placeholder 4">
             <a:extLst>
               <a:ext uri="{FF2B5EF4-FFF2-40B4-BE49-F238E27FC236}">
-                <a16:creationId xmlns:a16="http://schemas.microsoft.com/office/drawing/2014/main" id="{5ACE50F0-1141-D645-3892-2DA29633A371}"/>
+                <a16:creationId xmlns:a16="http://schemas.microsoft.com/office/drawing/2014/main" id="{281AD048-C515-130C-8F41-1BA8F4189292}"/>
               </a:ext>
             </a:extLst>
           </p:cNvPr>
@@ -4233,7 +4172,7 @@
           <p:cNvPr id="6" name="Content Placeholder 5">
             <a:extLst>
               <a:ext uri="{FF2B5EF4-FFF2-40B4-BE49-F238E27FC236}">
-                <a16:creationId xmlns:a16="http://schemas.microsoft.com/office/drawing/2014/main" id="{532E976C-52C7-C22D-28F7-B21E295185E1}"/>
+                <a16:creationId xmlns:a16="http://schemas.microsoft.com/office/drawing/2014/main" id="{3C6D4A7E-CE1F-A02A-B92A-059B1FBCF351}"/>
               </a:ext>
             </a:extLst>
           </p:cNvPr>
@@ -4287,6 +4226,7 @@
               <a:rPr lang="en-US"/>
               <a:t>Fifth level</a:t>
             </a:r>
+            <a:endParaRPr lang="en-IN"/>
           </a:p>
         </p:txBody>
       </p:sp>
@@ -4295,7 +4235,7 @@
           <p:cNvPr id="7" name="Date Placeholder 6">
             <a:extLst>
               <a:ext uri="{FF2B5EF4-FFF2-40B4-BE49-F238E27FC236}">
-                <a16:creationId xmlns:a16="http://schemas.microsoft.com/office/drawing/2014/main" id="{E797D00B-0B76-5C50-686B-A01396FCD6FA}"/>
+                <a16:creationId xmlns:a16="http://schemas.microsoft.com/office/drawing/2014/main" id="{66F77709-049A-79A2-F207-FBDA0CAA4E0A}"/>
               </a:ext>
             </a:extLst>
           </p:cNvPr>
@@ -4311,11 +4251,11 @@
           <a:bodyPr/>
           <a:lstStyle/>
           <a:p>
-            <a:fld id="{6383FAE1-13DE-4511-8C1B-C8AFB720664C}" type="datetimeFigureOut">
-              <a:rPr lang="en-US" smtClean="0"/>
-              <a:t>9/9/2026</a:t>
+            <a:fld id="{6EBA79C2-4FE3-4D0C-AFFB-D4FCE050D5EA}" type="datetimeFigureOut">
+              <a:rPr lang="en-IN" smtClean="0"/>
+              <a:t>02-10-2026</a:t>
             </a:fld>
-            <a:endParaRPr lang="en-US"/>
+            <a:endParaRPr lang="en-IN"/>
           </a:p>
         </p:txBody>
       </p:sp>
@@ -4324,7 +4264,7 @@
           <p:cNvPr id="8" name="Footer Placeholder 7">
             <a:extLst>
               <a:ext uri="{FF2B5EF4-FFF2-40B4-BE49-F238E27FC236}">
-                <a16:creationId xmlns:a16="http://schemas.microsoft.com/office/drawing/2014/main" id="{7B842B8D-3B74-4B67-9462-6D2C7ED9ADCB}"/>
+                <a16:creationId xmlns:a16="http://schemas.microsoft.com/office/drawing/2014/main" id="{59DE0EB3-83C0-67E2-5DB9-42DE8540F862}"/>
               </a:ext>
             </a:extLst>
           </p:cNvPr>
@@ -4340,7 +4280,7 @@
           <a:bodyPr/>
           <a:lstStyle/>
           <a:p>
-            <a:endParaRPr lang="en-US"/>
+            <a:endParaRPr lang="en-IN"/>
           </a:p>
         </p:txBody>
       </p:sp>
@@ -4349,7 +4289,7 @@
           <p:cNvPr id="9" name="Slide Number Placeholder 8">
             <a:extLst>
               <a:ext uri="{FF2B5EF4-FFF2-40B4-BE49-F238E27FC236}">
-                <a16:creationId xmlns:a16="http://schemas.microsoft.com/office/drawing/2014/main" id="{F992D4BE-CE8C-0250-FE7D-1F370E25FE27}"/>
+                <a16:creationId xmlns:a16="http://schemas.microsoft.com/office/drawing/2014/main" id="{20C97AB3-472A-1E13-8460-CE1D861DB6C2}"/>
               </a:ext>
             </a:extLst>
           </p:cNvPr>
@@ -4365,18 +4305,18 @@
           <a:bodyPr/>
           <a:lstStyle/>
           <a:p>
-            <a:fld id="{81BC7A09-79EE-44A0-8F92-750D7C83D871}" type="slidenum">
-              <a:rPr lang="en-US" smtClean="0"/>
+            <a:fld id="{023A53CF-6AA3-4EF6-9F05-A0E3059C583D}" type="slidenum">
+              <a:rPr lang="en-IN" smtClean="0"/>
               <a:t>‹#›</a:t>
             </a:fld>
-            <a:endParaRPr lang="en-US"/>
+            <a:endParaRPr lang="en-IN"/>
           </a:p>
         </p:txBody>
       </p:sp>
     </p:spTree>
     <p:extLst>
       <p:ext uri="{BB962C8B-B14F-4D97-AF65-F5344CB8AC3E}">
-        <p14:creationId xmlns:p14="http://schemas.microsoft.com/office/powerpoint/2010/main" val="3765750289"/>
+        <p14:creationId xmlns:p14="http://schemas.microsoft.com/office/powerpoint/2010/main" val="4043864109"/>
       </p:ext>
     </p:extLst>
   </p:cSld>
@@ -4408,7 +4348,7 @@
           <p:cNvPr id="2" name="Title 1">
             <a:extLst>
               <a:ext uri="{FF2B5EF4-FFF2-40B4-BE49-F238E27FC236}">
-                <a16:creationId xmlns:a16="http://schemas.microsoft.com/office/drawing/2014/main" id="{CBCDBE28-2732-66A2-163C-433854615E7C}"/>
+                <a16:creationId xmlns:a16="http://schemas.microsoft.com/office/drawing/2014/main" id="{251C5904-8D4D-4CA9-51B3-289632997B0B}"/>
               </a:ext>
             </a:extLst>
           </p:cNvPr>
@@ -4428,6 +4368,7 @@
               <a:rPr lang="en-US"/>
               <a:t>Click to edit Master title style</a:t>
             </a:r>
+            <a:endParaRPr lang="en-IN"/>
           </a:p>
         </p:txBody>
       </p:sp>
@@ -4436,7 +4377,7 @@
           <p:cNvPr id="3" name="Date Placeholder 2">
             <a:extLst>
               <a:ext uri="{FF2B5EF4-FFF2-40B4-BE49-F238E27FC236}">
-                <a16:creationId xmlns:a16="http://schemas.microsoft.com/office/drawing/2014/main" id="{E270F3D6-B4BC-015F-96FA-1720B040CC96}"/>
+                <a16:creationId xmlns:a16="http://schemas.microsoft.com/office/drawing/2014/main" id="{EE398302-AD6F-2CE6-7442-A4A9683D9718}"/>
               </a:ext>
             </a:extLst>
           </p:cNvPr>
@@ -4452,11 +4393,11 @@
           <a:bodyPr/>
           <a:lstStyle/>
           <a:p>
-            <a:fld id="{6383FAE1-13DE-4511-8C1B-C8AFB720664C}" type="datetimeFigureOut">
-              <a:rPr lang="en-US" smtClean="0"/>
-              <a:t>9/9/2026</a:t>
+            <a:fld id="{6EBA79C2-4FE3-4D0C-AFFB-D4FCE050D5EA}" type="datetimeFigureOut">
+              <a:rPr lang="en-IN" smtClean="0"/>
+              <a:t>02-10-2026</a:t>
             </a:fld>
-            <a:endParaRPr lang="en-US"/>
+            <a:endParaRPr lang="en-IN"/>
           </a:p>
         </p:txBody>
       </p:sp>
@@ -4465,7 +4406,7 @@
           <p:cNvPr id="4" name="Footer Placeholder 3">
             <a:extLst>
               <a:ext uri="{FF2B5EF4-FFF2-40B4-BE49-F238E27FC236}">
-                <a16:creationId xmlns:a16="http://schemas.microsoft.com/office/drawing/2014/main" id="{21168A87-13A5-0A5A-4D74-C75E27775575}"/>
+                <a16:creationId xmlns:a16="http://schemas.microsoft.com/office/drawing/2014/main" id="{15391825-01DE-3CBB-BB33-763481B92D74}"/>
               </a:ext>
             </a:extLst>
           </p:cNvPr>
@@ -4481,7 +4422,7 @@
           <a:bodyPr/>
           <a:lstStyle/>
           <a:p>
-            <a:endParaRPr lang="en-US"/>
+            <a:endParaRPr lang="en-IN"/>
           </a:p>
         </p:txBody>
       </p:sp>
@@ -4490,7 +4431,7 @@
           <p:cNvPr id="5" name="Slide Number Placeholder 4">
             <a:extLst>
               <a:ext uri="{FF2B5EF4-FFF2-40B4-BE49-F238E27FC236}">
-                <a16:creationId xmlns:a16="http://schemas.microsoft.com/office/drawing/2014/main" id="{ADD6D7CB-BD93-54BE-CB47-7FBA06B18442}"/>
+                <a16:creationId xmlns:a16="http://schemas.microsoft.com/office/drawing/2014/main" id="{07D5401A-71EA-0313-9EA1-4DC2DB3F758C}"/>
               </a:ext>
             </a:extLst>
           </p:cNvPr>
@@ -4506,18 +4447,18 @@
           <a:bodyPr/>
           <a:lstStyle/>
           <a:p>
-            <a:fld id="{81BC7A09-79EE-44A0-8F92-750D7C83D871}" type="slidenum">
-              <a:rPr lang="en-US" smtClean="0"/>
+            <a:fld id="{023A53CF-6AA3-4EF6-9F05-A0E3059C583D}" type="slidenum">
+              <a:rPr lang="en-IN" smtClean="0"/>
               <a:t>‹#›</a:t>
             </a:fld>
-            <a:endParaRPr lang="en-US"/>
+            <a:endParaRPr lang="en-IN"/>
           </a:p>
         </p:txBody>
       </p:sp>
     </p:spTree>
     <p:extLst>
       <p:ext uri="{BB962C8B-B14F-4D97-AF65-F5344CB8AC3E}">
-        <p14:creationId xmlns:p14="http://schemas.microsoft.com/office/powerpoint/2010/main" val="734650834"/>
+        <p14:creationId xmlns:p14="http://schemas.microsoft.com/office/powerpoint/2010/main" val="3389444527"/>
       </p:ext>
     </p:extLst>
   </p:cSld>
@@ -4549,7 +4490,7 @@
           <p:cNvPr id="2" name="Date Placeholder 1">
             <a:extLst>
               <a:ext uri="{FF2B5EF4-FFF2-40B4-BE49-F238E27FC236}">
-                <a16:creationId xmlns:a16="http://schemas.microsoft.com/office/drawing/2014/main" id="{49B4114B-4550-9F52-0EF5-D1E9CF2FD384}"/>
+                <a16:creationId xmlns:a16="http://schemas.microsoft.com/office/drawing/2014/main" id="{E2418529-294A-5688-70AC-D6FBB2669691}"/>
               </a:ext>
             </a:extLst>
           </p:cNvPr>
@@ -4565,11 +4506,11 @@
           <a:bodyPr/>
           <a:lstStyle/>
           <a:p>
-            <a:fld id="{6383FAE1-13DE-4511-8C1B-C8AFB720664C}" type="datetimeFigureOut">
-              <a:rPr lang="en-US" smtClean="0"/>
-              <a:t>9/9/2026</a:t>
+            <a:fld id="{6EBA79C2-4FE3-4D0C-AFFB-D4FCE050D5EA}" type="datetimeFigureOut">
+              <a:rPr lang="en-IN" smtClean="0"/>
+              <a:t>02-10-2026</a:t>
             </a:fld>
-            <a:endParaRPr lang="en-US"/>
+            <a:endParaRPr lang="en-IN"/>
           </a:p>
         </p:txBody>
       </p:sp>
@@ -4578,7 +4519,7 @@
           <p:cNvPr id="3" name="Footer Placeholder 2">
             <a:extLst>
               <a:ext uri="{FF2B5EF4-FFF2-40B4-BE49-F238E27FC236}">
-                <a16:creationId xmlns:a16="http://schemas.microsoft.com/office/drawing/2014/main" id="{0BF3136E-0C79-F4F5-F24E-D5FF71CDB55C}"/>
+                <a16:creationId xmlns:a16="http://schemas.microsoft.com/office/drawing/2014/main" id="{774AA024-38B7-5F32-1894-BCE21AADFC16}"/>
               </a:ext>
             </a:extLst>
           </p:cNvPr>
@@ -4594,7 +4535,7 @@
           <a:bodyPr/>
           <a:lstStyle/>
           <a:p>
-            <a:endParaRPr lang="en-US"/>
+            <a:endParaRPr lang="en-IN"/>
           </a:p>
         </p:txBody>
       </p:sp>
@@ -4603,7 +4544,7 @@
           <p:cNvPr id="4" name="Slide Number Placeholder 3">
             <a:extLst>
               <a:ext uri="{FF2B5EF4-FFF2-40B4-BE49-F238E27FC236}">
-                <a16:creationId xmlns:a16="http://schemas.microsoft.com/office/drawing/2014/main" id="{9F2E2157-F670-A339-0CB7-7399568D5A1C}"/>
+                <a16:creationId xmlns:a16="http://schemas.microsoft.com/office/drawing/2014/main" id="{436C172C-4B71-8ABE-DD86-85DD12827B5A}"/>
               </a:ext>
             </a:extLst>
           </p:cNvPr>
@@ -4619,18 +4560,18 @@
           <a:bodyPr/>
           <a:lstStyle/>
           <a:p>
-            <a:fld id="{81BC7A09-79EE-44A0-8F92-750D7C83D871}" type="slidenum">
-              <a:rPr lang="en-US" smtClean="0"/>
+            <a:fld id="{023A53CF-6AA3-4EF6-9F05-A0E3059C583D}" type="slidenum">
+              <a:rPr lang="en-IN" smtClean="0"/>
               <a:t>‹#›</a:t>
             </a:fld>
-            <a:endParaRPr lang="en-US"/>
+            <a:endParaRPr lang="en-IN"/>
           </a:p>
         </p:txBody>
       </p:sp>
     </p:spTree>
     <p:extLst>
       <p:ext uri="{BB962C8B-B14F-4D97-AF65-F5344CB8AC3E}">
-        <p14:creationId xmlns:p14="http://schemas.microsoft.com/office/powerpoint/2010/main" val="3796501475"/>
+        <p14:creationId xmlns:p14="http://schemas.microsoft.com/office/powerpoint/2010/main" val="2826162352"/>
       </p:ext>
     </p:extLst>
   </p:cSld>
@@ -4662,7 +4603,7 @@
           <p:cNvPr id="2" name="Title 1">
             <a:extLst>
               <a:ext uri="{FF2B5EF4-FFF2-40B4-BE49-F238E27FC236}">
-                <a16:creationId xmlns:a16="http://schemas.microsoft.com/office/drawing/2014/main" id="{A5802A98-8738-1E16-A16E-D8858EEA762D}"/>
+                <a16:creationId xmlns:a16="http://schemas.microsoft.com/office/drawing/2014/main" id="{97BEB6CF-2A94-DBDD-0D5B-BC12FF3220C5}"/>
               </a:ext>
             </a:extLst>
           </p:cNvPr>
@@ -4691,6 +4632,7 @@
               <a:rPr lang="en-US"/>
               <a:t>Click to edit Master title style</a:t>
             </a:r>
+            <a:endParaRPr lang="en-IN"/>
           </a:p>
         </p:txBody>
       </p:sp>
@@ -4699,7 +4641,7 @@
           <p:cNvPr id="3" name="Content Placeholder 2">
             <a:extLst>
               <a:ext uri="{FF2B5EF4-FFF2-40B4-BE49-F238E27FC236}">
-                <a16:creationId xmlns:a16="http://schemas.microsoft.com/office/drawing/2014/main" id="{64FC67E5-1169-257D-D9E7-C7B952C21372}"/>
+                <a16:creationId xmlns:a16="http://schemas.microsoft.com/office/drawing/2014/main" id="{EF4B7D8E-A4B1-A435-346C-19A718C71F13}"/>
               </a:ext>
             </a:extLst>
           </p:cNvPr>
@@ -4781,6 +4723,7 @@
               <a:rPr lang="en-US"/>
               <a:t>Fifth level</a:t>
             </a:r>
+            <a:endParaRPr lang="en-IN"/>
           </a:p>
         </p:txBody>
       </p:sp>
@@ -4789,7 +4732,7 @@
           <p:cNvPr id="4" name="Text Placeholder 3">
             <a:extLst>
               <a:ext uri="{FF2B5EF4-FFF2-40B4-BE49-F238E27FC236}">
-                <a16:creationId xmlns:a16="http://schemas.microsoft.com/office/drawing/2014/main" id="{90B2CF6C-0F85-566A-86BC-CBFEB17E755D}"/>
+                <a16:creationId xmlns:a16="http://schemas.microsoft.com/office/drawing/2014/main" id="{A57C91E7-453A-3F92-E638-C337924651AF}"/>
               </a:ext>
             </a:extLst>
           </p:cNvPr>
@@ -4860,7 +4803,7 @@
           <p:cNvPr id="5" name="Date Placeholder 4">
             <a:extLst>
               <a:ext uri="{FF2B5EF4-FFF2-40B4-BE49-F238E27FC236}">
-                <a16:creationId xmlns:a16="http://schemas.microsoft.com/office/drawing/2014/main" id="{1A64F0FC-ECB8-638F-A224-98FFA8270730}"/>
+                <a16:creationId xmlns:a16="http://schemas.microsoft.com/office/drawing/2014/main" id="{7C7C4555-70D3-F8F8-D355-E9BBC9EE67F8}"/>
               </a:ext>
             </a:extLst>
           </p:cNvPr>
@@ -4876,11 +4819,11 @@
           <a:bodyPr/>
           <a:lstStyle/>
           <a:p>
-            <a:fld id="{6383FAE1-13DE-4511-8C1B-C8AFB720664C}" type="datetimeFigureOut">
-              <a:rPr lang="en-US" smtClean="0"/>
-              <a:t>9/9/2026</a:t>
+            <a:fld id="{6EBA79C2-4FE3-4D0C-AFFB-D4FCE050D5EA}" type="datetimeFigureOut">
+              <a:rPr lang="en-IN" smtClean="0"/>
+              <a:t>02-10-2026</a:t>
             </a:fld>
-            <a:endParaRPr lang="en-US"/>
+            <a:endParaRPr lang="en-IN"/>
           </a:p>
         </p:txBody>
       </p:sp>
@@ -4889,7 +4832,7 @@
           <p:cNvPr id="6" name="Footer Placeholder 5">
             <a:extLst>
               <a:ext uri="{FF2B5EF4-FFF2-40B4-BE49-F238E27FC236}">
-                <a16:creationId xmlns:a16="http://schemas.microsoft.com/office/drawing/2014/main" id="{A8095B89-4DC8-435E-3545-6187AD3E00A8}"/>
+                <a16:creationId xmlns:a16="http://schemas.microsoft.com/office/drawing/2014/main" id="{55FE752C-45A1-07D0-4240-44893A0DB930}"/>
               </a:ext>
             </a:extLst>
           </p:cNvPr>
@@ -4905,7 +4848,7 @@
           <a:bodyPr/>
           <a:lstStyle/>
           <a:p>
-            <a:endParaRPr lang="en-US"/>
+            <a:endParaRPr lang="en-IN"/>
           </a:p>
         </p:txBody>
       </p:sp>
@@ -4914,7 +4857,7 @@
           <p:cNvPr id="7" name="Slide Number Placeholder 6">
             <a:extLst>
               <a:ext uri="{FF2B5EF4-FFF2-40B4-BE49-F238E27FC236}">
-                <a16:creationId xmlns:a16="http://schemas.microsoft.com/office/drawing/2014/main" id="{171B68CF-9592-FB7C-B517-0CC962C8B6DC}"/>
+                <a16:creationId xmlns:a16="http://schemas.microsoft.com/office/drawing/2014/main" id="{39DDD99C-C480-C729-0ECD-BEDE124E840E}"/>
               </a:ext>
             </a:extLst>
           </p:cNvPr>
@@ -4930,18 +4873,18 @@
           <a:bodyPr/>
           <a:lstStyle/>
           <a:p>
-            <a:fld id="{81BC7A09-79EE-44A0-8F92-750D7C83D871}" type="slidenum">
-              <a:rPr lang="en-US" smtClean="0"/>
+            <a:fld id="{023A53CF-6AA3-4EF6-9F05-A0E3059C583D}" type="slidenum">
+              <a:rPr lang="en-IN" smtClean="0"/>
               <a:t>‹#›</a:t>
             </a:fld>
-            <a:endParaRPr lang="en-US"/>
+            <a:endParaRPr lang="en-IN"/>
           </a:p>
         </p:txBody>
       </p:sp>
     </p:spTree>
     <p:extLst>
       <p:ext uri="{BB962C8B-B14F-4D97-AF65-F5344CB8AC3E}">
-        <p14:creationId xmlns:p14="http://schemas.microsoft.com/office/powerpoint/2010/main" val="2644300723"/>
+        <p14:creationId xmlns:p14="http://schemas.microsoft.com/office/powerpoint/2010/main" val="780093886"/>
       </p:ext>
     </p:extLst>
   </p:cSld>
@@ -4973,7 +4916,7 @@
           <p:cNvPr id="2" name="Title 1">
             <a:extLst>
               <a:ext uri="{FF2B5EF4-FFF2-40B4-BE49-F238E27FC236}">
-                <a16:creationId xmlns:a16="http://schemas.microsoft.com/office/drawing/2014/main" id="{853E2BC2-F728-2BA5-C848-31FA3458ADF0}"/>
+                <a16:creationId xmlns:a16="http://schemas.microsoft.com/office/drawing/2014/main" id="{7FD2D6FA-24BB-7D09-4CC6-34096CAB0EC2}"/>
               </a:ext>
             </a:extLst>
           </p:cNvPr>
@@ -5002,6 +4945,7 @@
               <a:rPr lang="en-US"/>
               <a:t>Click to edit Master title style</a:t>
             </a:r>
+            <a:endParaRPr lang="en-IN"/>
           </a:p>
         </p:txBody>
       </p:sp>
@@ -5010,12 +4954,12 @@
           <p:cNvPr id="3" name="Picture Placeholder 2">
             <a:extLst>
               <a:ext uri="{FF2B5EF4-FFF2-40B4-BE49-F238E27FC236}">
-                <a16:creationId xmlns:a16="http://schemas.microsoft.com/office/drawing/2014/main" id="{B957B909-12C3-703B-57E9-008076312F68}"/>
+                <a16:creationId xmlns:a16="http://schemas.microsoft.com/office/drawing/2014/main" id="{6C60CEAA-CE7A-1BBF-BDA9-B387E6B8B163}"/>
               </a:ext>
             </a:extLst>
           </p:cNvPr>
           <p:cNvSpPr>
-            <a:spLocks noGrp="1"/>
+            <a:spLocks noGrp="1" noChangeAspect="1"/>
           </p:cNvSpPr>
           <p:nvPr>
             <p:ph type="pic" idx="1"/>
@@ -5068,10 +5012,7 @@
             </a:lvl9pPr>
           </a:lstStyle>
           <a:p>
-            <a:r>
-              <a:rPr lang="en-US"/>
-              <a:t>Click icon to add picture</a:t>
-            </a:r>
+            <a:endParaRPr lang="en-IN"/>
           </a:p>
         </p:txBody>
       </p:sp>
@@ -5080,7 +5021,7 @@
           <p:cNvPr id="4" name="Text Placeholder 3">
             <a:extLst>
               <a:ext uri="{FF2B5EF4-FFF2-40B4-BE49-F238E27FC236}">
-                <a16:creationId xmlns:a16="http://schemas.microsoft.com/office/drawing/2014/main" id="{FDAE4D7A-BC41-33D0-D36D-08BB5C2C594A}"/>
+                <a16:creationId xmlns:a16="http://schemas.microsoft.com/office/drawing/2014/main" id="{1019DD54-A44F-A8AE-D4E9-3EB63270CC1C}"/>
               </a:ext>
             </a:extLst>
           </p:cNvPr>
@@ -5151,7 +5092,7 @@
           <p:cNvPr id="5" name="Date Placeholder 4">
             <a:extLst>
               <a:ext uri="{FF2B5EF4-FFF2-40B4-BE49-F238E27FC236}">
-                <a16:creationId xmlns:a16="http://schemas.microsoft.com/office/drawing/2014/main" id="{FB17FB83-437D-9293-0B99-2DC89A047DD5}"/>
+                <a16:creationId xmlns:a16="http://schemas.microsoft.com/office/drawing/2014/main" id="{6206B6FD-902D-C3AC-D0C4-9E348A977E8B}"/>
               </a:ext>
             </a:extLst>
           </p:cNvPr>
@@ -5167,11 +5108,11 @@
           <a:bodyPr/>
           <a:lstStyle/>
           <a:p>
-            <a:fld id="{6383FAE1-13DE-4511-8C1B-C8AFB720664C}" type="datetimeFigureOut">
-              <a:rPr lang="en-US" smtClean="0"/>
-              <a:t>9/9/2026</a:t>
+            <a:fld id="{6EBA79C2-4FE3-4D0C-AFFB-D4FCE050D5EA}" type="datetimeFigureOut">
+              <a:rPr lang="en-IN" smtClean="0"/>
+              <a:t>02-10-2026</a:t>
             </a:fld>
-            <a:endParaRPr lang="en-US"/>
+            <a:endParaRPr lang="en-IN"/>
           </a:p>
         </p:txBody>
       </p:sp>
@@ -5180,7 +5121,7 @@
           <p:cNvPr id="6" name="Footer Placeholder 5">
             <a:extLst>
               <a:ext uri="{FF2B5EF4-FFF2-40B4-BE49-F238E27FC236}">
-                <a16:creationId xmlns:a16="http://schemas.microsoft.com/office/drawing/2014/main" id="{1EDF5674-4DC1-3171-8FEB-C280686D413B}"/>
+                <a16:creationId xmlns:a16="http://schemas.microsoft.com/office/drawing/2014/main" id="{A0D6BDC1-316A-149B-EB15-04EF4D60E72C}"/>
               </a:ext>
             </a:extLst>
           </p:cNvPr>
@@ -5196,7 +5137,7 @@
           <a:bodyPr/>
           <a:lstStyle/>
           <a:p>
-            <a:endParaRPr lang="en-US"/>
+            <a:endParaRPr lang="en-IN"/>
           </a:p>
         </p:txBody>
       </p:sp>
@@ -5205,7 +5146,7 @@
           <p:cNvPr id="7" name="Slide Number Placeholder 6">
             <a:extLst>
               <a:ext uri="{FF2B5EF4-FFF2-40B4-BE49-F238E27FC236}">
-                <a16:creationId xmlns:a16="http://schemas.microsoft.com/office/drawing/2014/main" id="{FDD431F6-5490-78BA-7028-0BD08BF1A0FA}"/>
+                <a16:creationId xmlns:a16="http://schemas.microsoft.com/office/drawing/2014/main" id="{D7C24CD2-3C56-F4F2-57FB-AA714E5021A0}"/>
               </a:ext>
             </a:extLst>
           </p:cNvPr>
@@ -5221,18 +5162,18 @@
           <a:bodyPr/>
           <a:lstStyle/>
           <a:p>
-            <a:fld id="{81BC7A09-79EE-44A0-8F92-750D7C83D871}" type="slidenum">
-              <a:rPr lang="en-US" smtClean="0"/>
+            <a:fld id="{023A53CF-6AA3-4EF6-9F05-A0E3059C583D}" type="slidenum">
+              <a:rPr lang="en-IN" smtClean="0"/>
               <a:t>‹#›</a:t>
             </a:fld>
-            <a:endParaRPr lang="en-US"/>
+            <a:endParaRPr lang="en-IN"/>
           </a:p>
         </p:txBody>
       </p:sp>
     </p:spTree>
     <p:extLst>
       <p:ext uri="{BB962C8B-B14F-4D97-AF65-F5344CB8AC3E}">
-        <p14:creationId xmlns:p14="http://schemas.microsoft.com/office/powerpoint/2010/main" val="2380860319"/>
+        <p14:creationId xmlns:p14="http://schemas.microsoft.com/office/powerpoint/2010/main" val="50273816"/>
       </p:ext>
     </p:extLst>
   </p:cSld>
@@ -5272,7 +5213,7 @@
           <p:cNvPr id="2" name="Title Placeholder 1">
             <a:extLst>
               <a:ext uri="{FF2B5EF4-FFF2-40B4-BE49-F238E27FC236}">
-                <a16:creationId xmlns:a16="http://schemas.microsoft.com/office/drawing/2014/main" id="{73CEE1C2-DF65-6CAD-D1EF-224508404395}"/>
+                <a16:creationId xmlns:a16="http://schemas.microsoft.com/office/drawing/2014/main" id="{8C5CC290-6B0D-273C-46F1-4BC1249347F8}"/>
               </a:ext>
             </a:extLst>
           </p:cNvPr>
@@ -5299,9 +5240,10 @@
           <a:lstStyle/>
           <a:p>
             <a:r>
-              <a:rPr lang="en-US" dirty="0"/>
+              <a:rPr lang="en-US"/>
               <a:t>Click to edit Master title style</a:t>
             </a:r>
+            <a:endParaRPr lang="en-IN"/>
           </a:p>
         </p:txBody>
       </p:sp>
@@ -5310,7 +5252,7 @@
           <p:cNvPr id="3" name="Text Placeholder 2">
             <a:extLst>
               <a:ext uri="{FF2B5EF4-FFF2-40B4-BE49-F238E27FC236}">
-                <a16:creationId xmlns:a16="http://schemas.microsoft.com/office/drawing/2014/main" id="{46AFB6A6-8766-C849-1846-0F387502412C}"/>
+                <a16:creationId xmlns:a16="http://schemas.microsoft.com/office/drawing/2014/main" id="{14E82B2E-EDC9-AB14-8964-7BE30F8DB18F}"/>
               </a:ext>
             </a:extLst>
           </p:cNvPr>
@@ -5338,37 +5280,38 @@
           <a:p>
             <a:pPr lvl="0"/>
             <a:r>
-              <a:rPr lang="en-US" dirty="0"/>
+              <a:rPr lang="en-US"/>
               <a:t>Click to edit Master text styles</a:t>
             </a:r>
           </a:p>
           <a:p>
             <a:pPr lvl="1"/>
             <a:r>
-              <a:rPr lang="en-US" dirty="0"/>
+              <a:rPr lang="en-US"/>
               <a:t>Second level</a:t>
             </a:r>
           </a:p>
           <a:p>
             <a:pPr lvl="2"/>
             <a:r>
-              <a:rPr lang="en-US" dirty="0"/>
+              <a:rPr lang="en-US"/>
               <a:t>Third level</a:t>
             </a:r>
           </a:p>
           <a:p>
             <a:pPr lvl="3"/>
             <a:r>
-              <a:rPr lang="en-US" dirty="0"/>
+              <a:rPr lang="en-US"/>
               <a:t>Fourth level</a:t>
             </a:r>
           </a:p>
           <a:p>
             <a:pPr lvl="4"/>
             <a:r>
-              <a:rPr lang="en-US" dirty="0"/>
+              <a:rPr lang="en-US"/>
               <a:t>Fifth level</a:t>
             </a:r>
+            <a:endParaRPr lang="en-IN"/>
           </a:p>
         </p:txBody>
       </p:sp>
@@ -5377,7 +5320,7 @@
           <p:cNvPr id="4" name="Date Placeholder 3">
             <a:extLst>
               <a:ext uri="{FF2B5EF4-FFF2-40B4-BE49-F238E27FC236}">
-                <a16:creationId xmlns:a16="http://schemas.microsoft.com/office/drawing/2014/main" id="{CB55176B-E136-1615-D0B5-186783ACB8FF}"/>
+                <a16:creationId xmlns:a16="http://schemas.microsoft.com/office/drawing/2014/main" id="{42485163-E247-487C-9AA7-8A7054D4ACE1}"/>
               </a:ext>
             </a:extLst>
           </p:cNvPr>
@@ -5411,11 +5354,11 @@
             </a:lvl1pPr>
           </a:lstStyle>
           <a:p>
-            <a:fld id="{6383FAE1-13DE-4511-8C1B-C8AFB720664C}" type="datetimeFigureOut">
-              <a:rPr lang="en-US" smtClean="0"/>
-              <a:t>9/9/2026</a:t>
+            <a:fld id="{6EBA79C2-4FE3-4D0C-AFFB-D4FCE050D5EA}" type="datetimeFigureOut">
+              <a:rPr lang="en-IN" smtClean="0"/>
+              <a:t>02-10-2026</a:t>
             </a:fld>
-            <a:endParaRPr lang="en-US"/>
+            <a:endParaRPr lang="en-IN"/>
           </a:p>
         </p:txBody>
       </p:sp>
@@ -5424,7 +5367,7 @@
           <p:cNvPr id="5" name="Footer Placeholder 4">
             <a:extLst>
               <a:ext uri="{FF2B5EF4-FFF2-40B4-BE49-F238E27FC236}">
-                <a16:creationId xmlns:a16="http://schemas.microsoft.com/office/drawing/2014/main" id="{5E5AAAF6-4731-DB91-AB26-A07CEF1B9D24}"/>
+                <a16:creationId xmlns:a16="http://schemas.microsoft.com/office/drawing/2014/main" id="{85A01BDB-2D7B-79FC-D492-3CFF792A8A38}"/>
               </a:ext>
             </a:extLst>
           </p:cNvPr>
@@ -5458,7 +5401,7 @@
             </a:lvl1pPr>
           </a:lstStyle>
           <a:p>
-            <a:endParaRPr lang="en-US"/>
+            <a:endParaRPr lang="en-IN"/>
           </a:p>
         </p:txBody>
       </p:sp>
@@ -5467,7 +5410,7 @@
           <p:cNvPr id="6" name="Slide Number Placeholder 5">
             <a:extLst>
               <a:ext uri="{FF2B5EF4-FFF2-40B4-BE49-F238E27FC236}">
-                <a16:creationId xmlns:a16="http://schemas.microsoft.com/office/drawing/2014/main" id="{9814165E-BEE7-F086-BE90-50642610F091}"/>
+                <a16:creationId xmlns:a16="http://schemas.microsoft.com/office/drawing/2014/main" id="{BEC906FC-E273-8A6D-0868-0A52746784A4}"/>
               </a:ext>
             </a:extLst>
           </p:cNvPr>
@@ -5501,11 +5444,11 @@
             </a:lvl1pPr>
           </a:lstStyle>
           <a:p>
-            <a:fld id="{81BC7A09-79EE-44A0-8F92-750D7C83D871}" type="slidenum">
-              <a:rPr lang="en-US" smtClean="0"/>
+            <a:fld id="{023A53CF-6AA3-4EF6-9F05-A0E3059C583D}" type="slidenum">
+              <a:rPr lang="en-IN" smtClean="0"/>
               <a:t>‹#›</a:t>
             </a:fld>
-            <a:endParaRPr lang="en-US"/>
+            <a:endParaRPr lang="en-IN"/>
           </a:p>
         </p:txBody>
       </p:sp>
@@ -5514,7 +5457,7 @@
           <p:cNvPr id="8" name="Picture 7">
             <a:extLst>
               <a:ext uri="{FF2B5EF4-FFF2-40B4-BE49-F238E27FC236}">
-                <a16:creationId xmlns:a16="http://schemas.microsoft.com/office/drawing/2014/main" id="{9F3932AB-6107-98C9-CEDA-32A7DF597298}"/>
+                <a16:creationId xmlns:a16="http://schemas.microsoft.com/office/drawing/2014/main" id="{9ED41020-D2C1-2A7A-0E52-12FBDC02B9EA}"/>
               </a:ext>
             </a:extLst>
           </p:cNvPr>
@@ -5525,118 +5468,31 @@
         </p:nvPicPr>
         <p:blipFill>
           <a:blip r:embed="rId13">
-            <a:alphaModFix amt="50000"/>
+            <a:alphaModFix amt="68000"/>
             <a:extLst>
               <a:ext uri="{28A0092B-C50C-407E-A947-70E740481C1C}">
                 <a14:useLocalDpi xmlns:a14="http://schemas.microsoft.com/office/drawing/2010/main" val="0"/>
               </a:ext>
             </a:extLst>
           </a:blip>
-          <a:srcRect l="26008" t="39529" r="41606" b="46715"/>
           <a:stretch>
             <a:fillRect/>
           </a:stretch>
         </p:blipFill>
         <p:spPr>
           <a:xfrm>
-            <a:off x="212435" y="136524"/>
-            <a:ext cx="1330037" cy="1025209"/>
+            <a:off x="10857778" y="0"/>
+            <a:ext cx="1295581" cy="924054"/>
           </a:xfrm>
-          <a:prstGeom prst="ellipse">
+          <a:prstGeom prst="rect">
             <a:avLst/>
           </a:prstGeom>
-          <a:ln w="63500" cap="rnd">
-            <a:solidFill>
-              <a:srgbClr val="333333"/>
-            </a:solidFill>
-          </a:ln>
-          <a:effectLst>
-            <a:outerShdw blurRad="381000" dist="292100" dir="5400000" sx="-80000" sy="-18000" rotWithShape="0">
-              <a:srgbClr val="000000">
-                <a:alpha val="22000"/>
-              </a:srgbClr>
-            </a:outerShdw>
-          </a:effectLst>
-          <a:scene3d>
-            <a:camera prst="orthographicFront"/>
-            <a:lightRig rig="contrasting" dir="t">
-              <a:rot lat="0" lon="0" rev="3000000"/>
-            </a:lightRig>
-          </a:scene3d>
-          <a:sp3d contourW="7620">
-            <a:bevelT w="95250" h="31750"/>
-            <a:contourClr>
-              <a:srgbClr val="333333"/>
-            </a:contourClr>
-          </a:sp3d>
-        </p:spPr>
-      </p:pic>
-      <p:pic>
-        <p:nvPicPr>
-          <p:cNvPr id="7" name="Picture 6">
-            <a:extLst>
-              <a:ext uri="{FF2B5EF4-FFF2-40B4-BE49-F238E27FC236}">
-                <a16:creationId xmlns:a16="http://schemas.microsoft.com/office/drawing/2014/main" id="{2CA22C5A-FA6D-B699-950E-8D249A969331}"/>
-              </a:ext>
-            </a:extLst>
-          </p:cNvPr>
-          <p:cNvPicPr>
-            <a:picLocks noChangeAspect="1"/>
-          </p:cNvPicPr>
-          <p:nvPr userDrawn="1"/>
-        </p:nvPicPr>
-        <p:blipFill>
-          <a:blip r:embed="rId13">
-            <a:alphaModFix/>
-            <a:extLst>
-              <a:ext uri="{28A0092B-C50C-407E-A947-70E740481C1C}">
-                <a14:useLocalDpi xmlns:a14="http://schemas.microsoft.com/office/drawing/2010/main" val="0"/>
-              </a:ext>
-            </a:extLst>
-          </a:blip>
-          <a:srcRect l="26008" t="39529" r="41606" b="46715"/>
-          <a:stretch>
-            <a:fillRect/>
-          </a:stretch>
-        </p:blipFill>
-        <p:spPr>
-          <a:xfrm>
-            <a:off x="10855909" y="185738"/>
-            <a:ext cx="1123656" cy="866128"/>
-          </a:xfrm>
-          <a:prstGeom prst="ellipse">
-            <a:avLst/>
-          </a:prstGeom>
-          <a:ln w="63500" cap="rnd">
-            <a:solidFill>
-              <a:srgbClr val="333333"/>
-            </a:solidFill>
-          </a:ln>
-          <a:effectLst>
-            <a:outerShdw blurRad="381000" dist="292100" dir="5400000" sx="-80000" sy="-18000" rotWithShape="0">
-              <a:srgbClr val="000000">
-                <a:alpha val="22000"/>
-              </a:srgbClr>
-            </a:outerShdw>
-          </a:effectLst>
-          <a:scene3d>
-            <a:camera prst="orthographicFront"/>
-            <a:lightRig rig="contrasting" dir="t">
-              <a:rot lat="0" lon="0" rev="3000000"/>
-            </a:lightRig>
-          </a:scene3d>
-          <a:sp3d contourW="7620">
-            <a:bevelT w="95250" h="31750"/>
-            <a:contourClr>
-              <a:srgbClr val="333333"/>
-            </a:contourClr>
-          </a:sp3d>
         </p:spPr>
       </p:pic>
     </p:spTree>
     <p:extLst>
       <p:ext uri="{BB962C8B-B14F-4D97-AF65-F5344CB8AC3E}">
-        <p14:creationId xmlns:p14="http://schemas.microsoft.com/office/powerpoint/2010/main" val="1499973180"/>
+        <p14:creationId xmlns:p14="http://schemas.microsoft.com/office/powerpoint/2010/main" val="823822086"/>
       </p:ext>
     </p:extLst>
   </p:cSld>
@@ -5666,10 +5522,7 @@
         <a:buNone/>
         <a:defRPr sz="4400" kern="1200">
           <a:solidFill>
-            <a:schemeClr val="accent6">
-              <a:lumMod val="60000"/>
-              <a:lumOff val="40000"/>
-            </a:schemeClr>
+            <a:schemeClr val="tx1"/>
           </a:solidFill>
           <a:latin typeface="+mj-lt"/>
           <a:ea typeface="+mj-ea"/>
@@ -5689,10 +5542,7 @@
         <a:buChar char="•"/>
         <a:defRPr sz="2800" kern="1200">
           <a:solidFill>
-            <a:schemeClr val="accent6">
-              <a:lumMod val="60000"/>
-              <a:lumOff val="40000"/>
-            </a:schemeClr>
+            <a:schemeClr val="tx1"/>
           </a:solidFill>
           <a:latin typeface="+mn-lt"/>
           <a:ea typeface="+mn-ea"/>
@@ -5710,10 +5560,7 @@
         <a:buChar char="•"/>
         <a:defRPr sz="2400" kern="1200">
           <a:solidFill>
-            <a:schemeClr val="accent6">
-              <a:lumMod val="60000"/>
-              <a:lumOff val="40000"/>
-            </a:schemeClr>
+            <a:schemeClr val="tx1"/>
           </a:solidFill>
           <a:latin typeface="+mn-lt"/>
           <a:ea typeface="+mn-ea"/>
@@ -5731,10 +5578,7 @@
         <a:buChar char="•"/>
         <a:defRPr sz="2000" kern="1200">
           <a:solidFill>
-            <a:schemeClr val="accent6">
-              <a:lumMod val="60000"/>
-              <a:lumOff val="40000"/>
-            </a:schemeClr>
+            <a:schemeClr val="tx1"/>
           </a:solidFill>
           <a:latin typeface="+mn-lt"/>
           <a:ea typeface="+mn-ea"/>
@@ -5752,10 +5596,7 @@
         <a:buChar char="•"/>
         <a:defRPr sz="1800" kern="1200">
           <a:solidFill>
-            <a:schemeClr val="accent6">
-              <a:lumMod val="60000"/>
-              <a:lumOff val="40000"/>
-            </a:schemeClr>
+            <a:schemeClr val="tx1"/>
           </a:solidFill>
           <a:latin typeface="+mn-lt"/>
           <a:ea typeface="+mn-ea"/>
@@ -5773,10 +5614,7 @@
         <a:buChar char="•"/>
         <a:defRPr sz="1800" kern="1200">
           <a:solidFill>
-            <a:schemeClr val="accent6">
-              <a:lumMod val="60000"/>
-              <a:lumOff val="40000"/>
-            </a:schemeClr>
+            <a:schemeClr val="tx1"/>
           </a:solidFill>
           <a:latin typeface="+mn-lt"/>
           <a:ea typeface="+mn-ea"/>
@@ -6156,6 +5994,564 @@
         <p:cNvPr id="1" name="">
           <a:extLst>
             <a:ext uri="{FF2B5EF4-FFF2-40B4-BE49-F238E27FC236}">
+              <a16:creationId xmlns:a16="http://schemas.microsoft.com/office/drawing/2014/main" id="{D10DE8A6-A043-CC3C-2017-4B47E6CE425F}"/>
+            </a:ext>
+          </a:extLst>
+        </p:cNvPr>
+        <p:cNvGrpSpPr/>
+        <p:nvPr/>
+      </p:nvGrpSpPr>
+      <p:grpSpPr>
+        <a:xfrm>
+          <a:off x="0" y="0"/>
+          <a:ext cx="0" cy="0"/>
+          <a:chOff x="0" y="0"/>
+          <a:chExt cx="0" cy="0"/>
+        </a:xfrm>
+      </p:grpSpPr>
+      <p:sp>
+        <p:nvSpPr>
+          <p:cNvPr id="9" name="TextBox 8">
+            <a:extLst>
+              <a:ext uri="{FF2B5EF4-FFF2-40B4-BE49-F238E27FC236}">
+                <a16:creationId xmlns:a16="http://schemas.microsoft.com/office/drawing/2014/main" id="{B66C0D0E-5B14-CD7E-D32E-5FCA2A8D89FA}"/>
+              </a:ext>
+            </a:extLst>
+          </p:cNvPr>
+          <p:cNvSpPr txBox="1"/>
+          <p:nvPr/>
+        </p:nvSpPr>
+        <p:spPr>
+          <a:xfrm>
+            <a:off x="146232" y="272196"/>
+            <a:ext cx="5102352" cy="461665"/>
+          </a:xfrm>
+          <a:prstGeom prst="rect">
+            <a:avLst/>
+          </a:prstGeom>
+          <a:noFill/>
+        </p:spPr>
+        <p:txBody>
+          <a:bodyPr wrap="square">
+            <a:spAutoFit/>
+          </a:bodyPr>
+          <a:lstStyle/>
+          <a:p>
+            <a:pPr marL="342900" indent="-342900">
+              <a:buFont typeface="Arial" panose="020B0604020202020204" pitchFamily="34" charset="0"/>
+              <a:buChar char="•"/>
+            </a:pPr>
+            <a:r>
+              <a:rPr lang="en-US" sz="2400">
+                <a:solidFill>
+                  <a:schemeClr val="accent6">
+                    <a:lumMod val="60000"/>
+                    <a:lumOff val="40000"/>
+                  </a:schemeClr>
+                </a:solidFill>
+              </a:rPr>
+              <a:t>Google</a:t>
+            </a:r>
+            <a:endParaRPr lang="en-US" sz="2400" dirty="0">
+              <a:solidFill>
+                <a:schemeClr val="accent6">
+                  <a:lumMod val="60000"/>
+                  <a:lumOff val="40000"/>
+                </a:schemeClr>
+              </a:solidFill>
+            </a:endParaRPr>
+          </a:p>
+        </p:txBody>
+      </p:sp>
+      <p:pic>
+        <p:nvPicPr>
+          <p:cNvPr id="6" name="Picture 5">
+            <a:extLst>
+              <a:ext uri="{FF2B5EF4-FFF2-40B4-BE49-F238E27FC236}">
+                <a16:creationId xmlns:a16="http://schemas.microsoft.com/office/drawing/2014/main" id="{07BDDD79-1C5F-0E09-7F74-6543E4623E36}"/>
+              </a:ext>
+            </a:extLst>
+          </p:cNvPr>
+          <p:cNvPicPr>
+            <a:picLocks noChangeAspect="1"/>
+          </p:cNvPicPr>
+          <p:nvPr/>
+        </p:nvPicPr>
+        <p:blipFill>
+          <a:blip r:embed="rId2"/>
+          <a:stretch>
+            <a:fillRect/>
+          </a:stretch>
+        </p:blipFill>
+        <p:spPr>
+          <a:xfrm>
+            <a:off x="1401855" y="4392848"/>
+            <a:ext cx="2278097" cy="2227472"/>
+          </a:xfrm>
+          <a:prstGeom prst="rect">
+            <a:avLst/>
+          </a:prstGeom>
+        </p:spPr>
+      </p:pic>
+      <mc:AlternateContent xmlns:mc="http://schemas.openxmlformats.org/markup-compatibility/2006" xmlns:p14="http://schemas.microsoft.com/office/powerpoint/2010/main">
+        <mc:Choice Requires="p14">
+          <p:contentPart p14:bwMode="auto" r:id="rId3">
+            <p14:nvContentPartPr>
+              <p14:cNvPr id="5" name="Ink 4">
+                <a:extLst>
+                  <a:ext uri="{FF2B5EF4-FFF2-40B4-BE49-F238E27FC236}">
+                    <a16:creationId xmlns:a16="http://schemas.microsoft.com/office/drawing/2014/main" id="{CB8ED9C9-AC4F-9D07-15F0-91AF9C4E557A}"/>
+                  </a:ext>
+                </a:extLst>
+              </p14:cNvPr>
+              <p14:cNvContentPartPr/>
+              <p14:nvPr/>
+            </p14:nvContentPartPr>
+            <p14:xfrm>
+              <a:off x="11292624" y="602496"/>
+              <a:ext cx="581400" cy="37800"/>
+            </p14:xfrm>
+          </p:contentPart>
+        </mc:Choice>
+        <mc:Fallback xmlns="">
+          <p:pic>
+            <p:nvPicPr>
+              <p:cNvPr id="5" name="Ink 4">
+                <a:extLst>
+                  <a:ext uri="{FF2B5EF4-FFF2-40B4-BE49-F238E27FC236}">
+                    <a16:creationId xmlns:a16="http://schemas.microsoft.com/office/drawing/2014/main" id="{CB8ED9C9-AC4F-9D07-15F0-91AF9C4E557A}"/>
+                  </a:ext>
+                </a:extLst>
+              </p:cNvPr>
+              <p:cNvPicPr/>
+              <p:nvPr/>
+            </p:nvPicPr>
+            <p:blipFill>
+              <a:blip r:embed="rId4"/>
+              <a:stretch>
+                <a:fillRect/>
+              </a:stretch>
+            </p:blipFill>
+            <p:spPr>
+              <a:xfrm>
+                <a:off x="11274624" y="584323"/>
+                <a:ext cx="617040" cy="73783"/>
+              </a:xfrm>
+              <a:prstGeom prst="rect">
+                <a:avLst/>
+              </a:prstGeom>
+            </p:spPr>
+          </p:pic>
+        </mc:Fallback>
+      </mc:AlternateContent>
+      <p:pic>
+        <p:nvPicPr>
+          <p:cNvPr id="10" name="Picture 9">
+            <a:extLst>
+              <a:ext uri="{FF2B5EF4-FFF2-40B4-BE49-F238E27FC236}">
+                <a16:creationId xmlns:a16="http://schemas.microsoft.com/office/drawing/2014/main" id="{5E4A197D-9CF8-3E90-7224-3F44B2703DC5}"/>
+              </a:ext>
+            </a:extLst>
+          </p:cNvPr>
+          <p:cNvPicPr>
+            <a:picLocks noChangeAspect="1"/>
+          </p:cNvPicPr>
+          <p:nvPr/>
+        </p:nvPicPr>
+        <p:blipFill>
+          <a:blip r:embed="rId5"/>
+          <a:stretch>
+            <a:fillRect/>
+          </a:stretch>
+        </p:blipFill>
+        <p:spPr>
+          <a:xfrm>
+            <a:off x="4839529" y="20853"/>
+            <a:ext cx="7345041" cy="5485731"/>
+          </a:xfrm>
+          <a:prstGeom prst="rect">
+            <a:avLst/>
+          </a:prstGeom>
+        </p:spPr>
+      </p:pic>
+      <mc:AlternateContent xmlns:mc="http://schemas.openxmlformats.org/markup-compatibility/2006" xmlns:p14="http://schemas.microsoft.com/office/powerpoint/2010/main">
+        <mc:Choice Requires="p14">
+          <p:contentPart p14:bwMode="auto" r:id="rId6">
+            <p14:nvContentPartPr>
+              <p14:cNvPr id="11" name="Ink 10">
+                <a:extLst>
+                  <a:ext uri="{FF2B5EF4-FFF2-40B4-BE49-F238E27FC236}">
+                    <a16:creationId xmlns:a16="http://schemas.microsoft.com/office/drawing/2014/main" id="{E09AA7DA-B1F3-44E8-AB0D-BD31050F6D65}"/>
+                  </a:ext>
+                </a:extLst>
+              </p14:cNvPr>
+              <p14:cNvContentPartPr/>
+              <p14:nvPr/>
+            </p14:nvContentPartPr>
+            <p14:xfrm>
+              <a:off x="9427464" y="119736"/>
+              <a:ext cx="456120" cy="304920"/>
+            </p14:xfrm>
+          </p:contentPart>
+        </mc:Choice>
+        <mc:Fallback xmlns="">
+          <p:pic>
+            <p:nvPicPr>
+              <p:cNvPr id="11" name="Ink 10">
+                <a:extLst>
+                  <a:ext uri="{FF2B5EF4-FFF2-40B4-BE49-F238E27FC236}">
+                    <a16:creationId xmlns:a16="http://schemas.microsoft.com/office/drawing/2014/main" id="{E09AA7DA-B1F3-44E8-AB0D-BD31050F6D65}"/>
+                  </a:ext>
+                </a:extLst>
+              </p:cNvPr>
+              <p:cNvPicPr/>
+              <p:nvPr/>
+            </p:nvPicPr>
+            <p:blipFill>
+              <a:blip r:embed="rId7"/>
+              <a:stretch>
+                <a:fillRect/>
+              </a:stretch>
+            </p:blipFill>
+            <p:spPr>
+              <a:xfrm>
+                <a:off x="9409464" y="102096"/>
+                <a:ext cx="491760" cy="340560"/>
+              </a:xfrm>
+              <a:prstGeom prst="rect">
+                <a:avLst/>
+              </a:prstGeom>
+            </p:spPr>
+          </p:pic>
+        </mc:Fallback>
+      </mc:AlternateContent>
+      <mc:AlternateContent xmlns:mc="http://schemas.openxmlformats.org/markup-compatibility/2006" xmlns:p14="http://schemas.microsoft.com/office/powerpoint/2010/main">
+        <mc:Choice Requires="p14">
+          <p:contentPart p14:bwMode="auto" r:id="rId8">
+            <p14:nvContentPartPr>
+              <p14:cNvPr id="12" name="Ink 11">
+                <a:extLst>
+                  <a:ext uri="{FF2B5EF4-FFF2-40B4-BE49-F238E27FC236}">
+                    <a16:creationId xmlns:a16="http://schemas.microsoft.com/office/drawing/2014/main" id="{45F97C7C-7CD4-7C2E-2BCB-B981A0237EDB}"/>
+                  </a:ext>
+                </a:extLst>
+              </p14:cNvPr>
+              <p14:cNvContentPartPr/>
+              <p14:nvPr/>
+            </p14:nvContentPartPr>
+            <p14:xfrm>
+              <a:off x="5989104" y="1871856"/>
+              <a:ext cx="238320" cy="185760"/>
+            </p14:xfrm>
+          </p:contentPart>
+        </mc:Choice>
+        <mc:Fallback xmlns="">
+          <p:pic>
+            <p:nvPicPr>
+              <p:cNvPr id="12" name="Ink 11">
+                <a:extLst>
+                  <a:ext uri="{FF2B5EF4-FFF2-40B4-BE49-F238E27FC236}">
+                    <a16:creationId xmlns:a16="http://schemas.microsoft.com/office/drawing/2014/main" id="{45F97C7C-7CD4-7C2E-2BCB-B981A0237EDB}"/>
+                  </a:ext>
+                </a:extLst>
+              </p:cNvPr>
+              <p:cNvPicPr/>
+              <p:nvPr/>
+            </p:nvPicPr>
+            <p:blipFill>
+              <a:blip r:embed="rId9"/>
+              <a:stretch>
+                <a:fillRect/>
+              </a:stretch>
+            </p:blipFill>
+            <p:spPr>
+              <a:xfrm>
+                <a:off x="5971464" y="1853856"/>
+                <a:ext cx="273960" cy="221400"/>
+              </a:xfrm>
+              <a:prstGeom prst="rect">
+                <a:avLst/>
+              </a:prstGeom>
+            </p:spPr>
+          </p:pic>
+        </mc:Fallback>
+      </mc:AlternateContent>
+      <mc:AlternateContent xmlns:mc="http://schemas.openxmlformats.org/markup-compatibility/2006" xmlns:p14="http://schemas.microsoft.com/office/powerpoint/2010/main">
+        <mc:Choice Requires="p14">
+          <p:contentPart p14:bwMode="auto" r:id="rId10">
+            <p14:nvContentPartPr>
+              <p14:cNvPr id="13" name="Ink 12">
+                <a:extLst>
+                  <a:ext uri="{FF2B5EF4-FFF2-40B4-BE49-F238E27FC236}">
+                    <a16:creationId xmlns:a16="http://schemas.microsoft.com/office/drawing/2014/main" id="{2B433421-F787-1B4E-BEF3-C47B654036AA}"/>
+                  </a:ext>
+                </a:extLst>
+              </p14:cNvPr>
+              <p14:cNvContentPartPr/>
+              <p14:nvPr/>
+            </p14:nvContentPartPr>
+            <p14:xfrm>
+              <a:off x="9033984" y="403056"/>
+              <a:ext cx="326520" cy="24480"/>
+            </p14:xfrm>
+          </p:contentPart>
+        </mc:Choice>
+        <mc:Fallback xmlns="">
+          <p:pic>
+            <p:nvPicPr>
+              <p:cNvPr id="13" name="Ink 12">
+                <a:extLst>
+                  <a:ext uri="{FF2B5EF4-FFF2-40B4-BE49-F238E27FC236}">
+                    <a16:creationId xmlns:a16="http://schemas.microsoft.com/office/drawing/2014/main" id="{2B433421-F787-1B4E-BEF3-C47B654036AA}"/>
+                  </a:ext>
+                </a:extLst>
+              </p:cNvPr>
+              <p:cNvPicPr/>
+              <p:nvPr/>
+            </p:nvPicPr>
+            <p:blipFill>
+              <a:blip r:embed="rId11"/>
+              <a:stretch>
+                <a:fillRect/>
+              </a:stretch>
+            </p:blipFill>
+            <p:spPr>
+              <a:xfrm>
+                <a:off x="9016344" y="385416"/>
+                <a:ext cx="362160" cy="60120"/>
+              </a:xfrm>
+              <a:prstGeom prst="rect">
+                <a:avLst/>
+              </a:prstGeom>
+            </p:spPr>
+          </p:pic>
+        </mc:Fallback>
+      </mc:AlternateContent>
+      <mc:AlternateContent xmlns:mc="http://schemas.openxmlformats.org/markup-compatibility/2006" xmlns:p14="http://schemas.microsoft.com/office/powerpoint/2010/main">
+        <mc:Choice Requires="p14">
+          <p:contentPart p14:bwMode="auto" r:id="rId12">
+            <p14:nvContentPartPr>
+              <p14:cNvPr id="14" name="Ink 13">
+                <a:extLst>
+                  <a:ext uri="{FF2B5EF4-FFF2-40B4-BE49-F238E27FC236}">
+                    <a16:creationId xmlns:a16="http://schemas.microsoft.com/office/drawing/2014/main" id="{1505E7FE-BAC4-570D-6487-FC4FC01F3880}"/>
+                  </a:ext>
+                </a:extLst>
+              </p14:cNvPr>
+              <p14:cNvContentPartPr/>
+              <p14:nvPr/>
+            </p14:nvContentPartPr>
+            <p14:xfrm>
+              <a:off x="6994944" y="429696"/>
+              <a:ext cx="686160" cy="66240"/>
+            </p14:xfrm>
+          </p:contentPart>
+        </mc:Choice>
+        <mc:Fallback xmlns="">
+          <p:pic>
+            <p:nvPicPr>
+              <p:cNvPr id="14" name="Ink 13">
+                <a:extLst>
+                  <a:ext uri="{FF2B5EF4-FFF2-40B4-BE49-F238E27FC236}">
+                    <a16:creationId xmlns:a16="http://schemas.microsoft.com/office/drawing/2014/main" id="{1505E7FE-BAC4-570D-6487-FC4FC01F3880}"/>
+                  </a:ext>
+                </a:extLst>
+              </p:cNvPr>
+              <p:cNvPicPr/>
+              <p:nvPr/>
+            </p:nvPicPr>
+            <p:blipFill>
+              <a:blip r:embed="rId13"/>
+              <a:stretch>
+                <a:fillRect/>
+              </a:stretch>
+            </p:blipFill>
+            <p:spPr>
+              <a:xfrm>
+                <a:off x="6977304" y="411696"/>
+                <a:ext cx="721800" cy="101880"/>
+              </a:xfrm>
+              <a:prstGeom prst="rect">
+                <a:avLst/>
+              </a:prstGeom>
+            </p:spPr>
+          </p:pic>
+        </mc:Fallback>
+      </mc:AlternateContent>
+      <mc:AlternateContent xmlns:mc="http://schemas.openxmlformats.org/markup-compatibility/2006" xmlns:p14="http://schemas.microsoft.com/office/powerpoint/2010/main">
+        <mc:Choice Requires="p14">
+          <p:contentPart p14:bwMode="auto" r:id="rId14">
+            <p14:nvContentPartPr>
+              <p14:cNvPr id="15" name="Ink 14">
+                <a:extLst>
+                  <a:ext uri="{FF2B5EF4-FFF2-40B4-BE49-F238E27FC236}">
+                    <a16:creationId xmlns:a16="http://schemas.microsoft.com/office/drawing/2014/main" id="{E605CB15-7CD0-5202-7EA4-3A4CE5F2DA2D}"/>
+                  </a:ext>
+                </a:extLst>
+              </p14:cNvPr>
+              <p14:cNvContentPartPr/>
+              <p14:nvPr/>
+            </p14:nvContentPartPr>
+            <p14:xfrm>
+              <a:off x="5860944" y="2993976"/>
+              <a:ext cx="237240" cy="209520"/>
+            </p14:xfrm>
+          </p:contentPart>
+        </mc:Choice>
+        <mc:Fallback xmlns="">
+          <p:pic>
+            <p:nvPicPr>
+              <p:cNvPr id="15" name="Ink 14">
+                <a:extLst>
+                  <a:ext uri="{FF2B5EF4-FFF2-40B4-BE49-F238E27FC236}">
+                    <a16:creationId xmlns:a16="http://schemas.microsoft.com/office/drawing/2014/main" id="{E605CB15-7CD0-5202-7EA4-3A4CE5F2DA2D}"/>
+                  </a:ext>
+                </a:extLst>
+              </p:cNvPr>
+              <p:cNvPicPr/>
+              <p:nvPr/>
+            </p:nvPicPr>
+            <p:blipFill>
+              <a:blip r:embed="rId15"/>
+              <a:stretch>
+                <a:fillRect/>
+              </a:stretch>
+            </p:blipFill>
+            <p:spPr>
+              <a:xfrm>
+                <a:off x="5843304" y="2976336"/>
+                <a:ext cx="272880" cy="245160"/>
+              </a:xfrm>
+              <a:prstGeom prst="rect">
+                <a:avLst/>
+              </a:prstGeom>
+            </p:spPr>
+          </p:pic>
+        </mc:Fallback>
+      </mc:AlternateContent>
+      <mc:AlternateContent xmlns:mc="http://schemas.openxmlformats.org/markup-compatibility/2006" xmlns:p14="http://schemas.microsoft.com/office/powerpoint/2010/main">
+        <mc:Choice Requires="p14">
+          <p:contentPart p14:bwMode="auto" r:id="rId16">
+            <p14:nvContentPartPr>
+              <p14:cNvPr id="16" name="Ink 15">
+                <a:extLst>
+                  <a:ext uri="{FF2B5EF4-FFF2-40B4-BE49-F238E27FC236}">
+                    <a16:creationId xmlns:a16="http://schemas.microsoft.com/office/drawing/2014/main" id="{125596A2-0349-6916-927C-EA0987A6B346}"/>
+                  </a:ext>
+                </a:extLst>
+              </p14:cNvPr>
+              <p14:cNvContentPartPr/>
+              <p14:nvPr/>
+            </p14:nvContentPartPr>
+            <p14:xfrm>
+              <a:off x="5705784" y="3556656"/>
+              <a:ext cx="449280" cy="184680"/>
+            </p14:xfrm>
+          </p:contentPart>
+        </mc:Choice>
+        <mc:Fallback xmlns="">
+          <p:pic>
+            <p:nvPicPr>
+              <p:cNvPr id="16" name="Ink 15">
+                <a:extLst>
+                  <a:ext uri="{FF2B5EF4-FFF2-40B4-BE49-F238E27FC236}">
+                    <a16:creationId xmlns:a16="http://schemas.microsoft.com/office/drawing/2014/main" id="{125596A2-0349-6916-927C-EA0987A6B346}"/>
+                  </a:ext>
+                </a:extLst>
+              </p:cNvPr>
+              <p:cNvPicPr/>
+              <p:nvPr/>
+            </p:nvPicPr>
+            <p:blipFill>
+              <a:blip r:embed="rId17"/>
+              <a:stretch>
+                <a:fillRect/>
+              </a:stretch>
+            </p:blipFill>
+            <p:spPr>
+              <a:xfrm>
+                <a:off x="5687784" y="3539016"/>
+                <a:ext cx="484920" cy="220320"/>
+              </a:xfrm>
+              <a:prstGeom prst="rect">
+                <a:avLst/>
+              </a:prstGeom>
+            </p:spPr>
+          </p:pic>
+        </mc:Fallback>
+      </mc:AlternateContent>
+      <mc:AlternateContent xmlns:mc="http://schemas.openxmlformats.org/markup-compatibility/2006" xmlns:p14="http://schemas.microsoft.com/office/powerpoint/2010/main">
+        <mc:Choice Requires="p14">
+          <p:contentPart p14:bwMode="auto" r:id="rId18">
+            <p14:nvContentPartPr>
+              <p14:cNvPr id="17" name="Ink 16">
+                <a:extLst>
+                  <a:ext uri="{FF2B5EF4-FFF2-40B4-BE49-F238E27FC236}">
+                    <a16:creationId xmlns:a16="http://schemas.microsoft.com/office/drawing/2014/main" id="{2F6BB4FC-A0C0-3F73-EEAD-C2E298AF41BA}"/>
+                  </a:ext>
+                </a:extLst>
+              </p14:cNvPr>
+              <p14:cNvContentPartPr/>
+              <p14:nvPr/>
+            </p14:nvContentPartPr>
+            <p14:xfrm>
+              <a:off x="6162984" y="3956256"/>
+              <a:ext cx="272160" cy="116280"/>
+            </p14:xfrm>
+          </p:contentPart>
+        </mc:Choice>
+        <mc:Fallback xmlns="">
+          <p:pic>
+            <p:nvPicPr>
+              <p:cNvPr id="17" name="Ink 16">
+                <a:extLst>
+                  <a:ext uri="{FF2B5EF4-FFF2-40B4-BE49-F238E27FC236}">
+                    <a16:creationId xmlns:a16="http://schemas.microsoft.com/office/drawing/2014/main" id="{2F6BB4FC-A0C0-3F73-EEAD-C2E298AF41BA}"/>
+                  </a:ext>
+                </a:extLst>
+              </p:cNvPr>
+              <p:cNvPicPr/>
+              <p:nvPr/>
+            </p:nvPicPr>
+            <p:blipFill>
+              <a:blip r:embed="rId19"/>
+              <a:stretch>
+                <a:fillRect/>
+              </a:stretch>
+            </p:blipFill>
+            <p:spPr>
+              <a:xfrm>
+                <a:off x="6144984" y="3938616"/>
+                <a:ext cx="307800" cy="151920"/>
+              </a:xfrm>
+              <a:prstGeom prst="rect">
+                <a:avLst/>
+              </a:prstGeom>
+            </p:spPr>
+          </p:pic>
+        </mc:Fallback>
+      </mc:AlternateContent>
+    </p:spTree>
+    <p:extLst>
+      <p:ext uri="{BB962C8B-B14F-4D97-AF65-F5344CB8AC3E}">
+        <p14:creationId xmlns:p14="http://schemas.microsoft.com/office/powerpoint/2010/main" val="2718215824"/>
+      </p:ext>
+    </p:extLst>
+  </p:cSld>
+  <p:clrMapOvr>
+    <a:masterClrMapping/>
+  </p:clrMapOvr>
+</p:sld>
+</file>
+
+<file path=ppt/slides/slide11.xml><?xml version="1.0" encoding="utf-8"?>
+<p:sld xmlns:a="http://schemas.openxmlformats.org/drawingml/2006/main" xmlns:r="http://schemas.openxmlformats.org/officeDocument/2006/relationships" xmlns:p="http://schemas.openxmlformats.org/presentationml/2006/main">
+  <p:cSld>
+    <p:spTree>
+      <p:nvGrpSpPr>
+        <p:cNvPr id="1" name="">
+          <a:extLst>
+            <a:ext uri="{FF2B5EF4-FFF2-40B4-BE49-F238E27FC236}">
               <a16:creationId xmlns:a16="http://schemas.microsoft.com/office/drawing/2014/main" id="{0D18ACBA-A707-9C6E-493D-108DE24CB8E8}"/>
             </a:ext>
           </a:extLst>
@@ -6266,8 +6662,8 @@
         </p:nvSpPr>
         <p:spPr>
           <a:xfrm>
-            <a:off x="0" y="1093032"/>
-            <a:ext cx="10204704" cy="1938992"/>
+            <a:off x="219456" y="462096"/>
+            <a:ext cx="10204704" cy="1200329"/>
           </a:xfrm>
           <a:prstGeom prst="rect">
             <a:avLst/>
@@ -6280,8 +6676,12 @@
           </a:bodyPr>
           <a:lstStyle/>
           <a:p>
-            <a:r>
-              <a:rPr lang="en-US" sz="2400" b="1" dirty="0">
+            <a:pPr marL="342900" indent="-342900">
+              <a:buFont typeface="Arial" panose="020B0604020202020204" pitchFamily="34" charset="0"/>
+              <a:buChar char="•"/>
+            </a:pPr>
+            <a:r>
+              <a:rPr lang="en-US" sz="2400">
                 <a:solidFill>
                   <a:schemeClr val="accent6">
                     <a:lumMod val="60000"/>
@@ -6289,24 +6689,8 @@
                   </a:schemeClr>
                 </a:solidFill>
               </a:rPr>
-              <a:t>Some Use Cases of Vector DB:</a:t>
-            </a:r>
-          </a:p>
-          <a:p>
-            <a:endParaRPr lang="en-US" sz="2400" b="1" dirty="0">
-              <a:solidFill>
-                <a:schemeClr val="accent6">
-                  <a:lumMod val="60000"/>
-                  <a:lumOff val="40000"/>
-                </a:schemeClr>
-              </a:solidFill>
-            </a:endParaRPr>
-          </a:p>
-          <a:p>
-            <a:pPr marL="342900" indent="-342900">
-              <a:buFont typeface="Arial" panose="020B0604020202020204" pitchFamily="34" charset="0"/>
-              <a:buChar char="•"/>
-            </a:pPr>
+              <a:t>Document </a:t>
+            </a:r>
             <a:r>
               <a:rPr lang="en-US" sz="2400" dirty="0">
                 <a:solidFill>
@@ -6316,7 +6700,7 @@
                   </a:schemeClr>
                 </a:solidFill>
               </a:rPr>
-              <a:t>Document search  </a:t>
+              <a:t>search  </a:t>
             </a:r>
           </a:p>
           <a:p>
@@ -6412,7 +6796,7 @@
 </p:sld>
 </file>
 
-<file path=ppt/slides/slide11.xml><?xml version="1.0" encoding="utf-8"?>
+<file path=ppt/slides/slide12.xml><?xml version="1.0" encoding="utf-8"?>
 <p:sld xmlns:a="http://schemas.openxmlformats.org/drawingml/2006/main" xmlns:r="http://schemas.openxmlformats.org/officeDocument/2006/relationships" xmlns:p="http://schemas.openxmlformats.org/presentationml/2006/main">
   <p:cSld>
     <p:spTree>
@@ -7066,7 +7450,7 @@
 </p:sld>
 </file>
 
-<file path=ppt/slides/slide12.xml><?xml version="1.0" encoding="utf-8"?>
+<file path=ppt/slides/slide13.xml><?xml version="1.0" encoding="utf-8"?>
 <p:sld xmlns:a="http://schemas.openxmlformats.org/drawingml/2006/main" xmlns:r="http://schemas.openxmlformats.org/officeDocument/2006/relationships" xmlns:p="http://schemas.openxmlformats.org/presentationml/2006/main">
   <p:cSld>
     <p:spTree>
@@ -7274,7 +7658,7 @@
 </p:sld>
 </file>
 
-<file path=ppt/slides/slide13.xml><?xml version="1.0" encoding="utf-8"?>
+<file path=ppt/slides/slide14.xml><?xml version="1.0" encoding="utf-8"?>
 <p:sld xmlns:a="http://schemas.openxmlformats.org/drawingml/2006/main" xmlns:r="http://schemas.openxmlformats.org/officeDocument/2006/relationships" xmlns:p="http://schemas.openxmlformats.org/presentationml/2006/main">
   <p:cSld>
     <p:spTree>
@@ -7467,7 +7851,7 @@
 </p:sld>
 </file>
 
-<file path=ppt/slides/slide14.xml><?xml version="1.0" encoding="utf-8"?>
+<file path=ppt/slides/slide15.xml><?xml version="1.0" encoding="utf-8"?>
 <p:sld xmlns:a="http://schemas.openxmlformats.org/drawingml/2006/main" xmlns:r="http://schemas.openxmlformats.org/officeDocument/2006/relationships" xmlns:p="http://schemas.openxmlformats.org/presentationml/2006/main">
   <p:cSld>
     <p:spTree>
@@ -7532,13 +7916,7 @@
           <p:cNvGraphicFramePr>
             <a:graphicFrameLocks noGrp="1"/>
           </p:cNvGraphicFramePr>
-          <p:nvPr>
-            <p:extLst>
-              <p:ext uri="{D42A27DB-BD31-4B8C-83A1-F6EECF244321}">
-                <p14:modId xmlns:p14="http://schemas.microsoft.com/office/powerpoint/2010/main" val="269439588"/>
-              </p:ext>
-            </p:extLst>
-          </p:nvPr>
+          <p:nvPr/>
         </p:nvGraphicFramePr>
         <p:xfrm>
           <a:off x="580136" y="830358"/>
@@ -8102,7 +8480,7 @@
 </p:sld>
 </file>
 
-<file path=ppt/slides/slide15.xml><?xml version="1.0" encoding="utf-8"?>
+<file path=ppt/slides/slide16.xml><?xml version="1.0" encoding="utf-8"?>
 <p:sld xmlns:a="http://schemas.openxmlformats.org/drawingml/2006/main" xmlns:r="http://schemas.openxmlformats.org/officeDocument/2006/relationships" xmlns:p="http://schemas.openxmlformats.org/presentationml/2006/main">
   <p:cSld>
     <p:spTree>
@@ -8138,7 +8516,7 @@
 </p:sld>
 </file>
 
-<file path=ppt/slides/slide16.xml><?xml version="1.0" encoding="utf-8"?>
+<file path=ppt/slides/slide17.xml><?xml version="1.0" encoding="utf-8"?>
 <p:sld xmlns:a="http://schemas.openxmlformats.org/drawingml/2006/main" xmlns:r="http://schemas.openxmlformats.org/officeDocument/2006/relationships" xmlns:p="http://schemas.openxmlformats.org/presentationml/2006/main">
   <p:cSld>
     <p:spTree>
@@ -8161,168 +8539,6 @@
           <a:chExt cx="0" cy="0"/>
         </a:xfrm>
       </p:grpSpPr>
-      <p:sp>
-        <p:nvSpPr>
-          <p:cNvPr id="2" name="Title 1">
-            <a:extLst>
-              <a:ext uri="{FF2B5EF4-FFF2-40B4-BE49-F238E27FC236}">
-                <a16:creationId xmlns:a16="http://schemas.microsoft.com/office/drawing/2014/main" id="{795E1B75-886E-0812-B2FD-DD250C225521}"/>
-              </a:ext>
-            </a:extLst>
-          </p:cNvPr>
-          <p:cNvSpPr>
-            <a:spLocks noGrp="1"/>
-          </p:cNvSpPr>
-          <p:nvPr>
-            <p:ph type="title"/>
-          </p:nvPr>
-        </p:nvSpPr>
-        <p:spPr>
-          <a:xfrm>
-            <a:off x="274320" y="136525"/>
-            <a:ext cx="11466576" cy="832739"/>
-          </a:xfrm>
-        </p:spPr>
-        <p:txBody>
-          <a:bodyPr>
-            <a:normAutofit/>
-          </a:bodyPr>
-          <a:lstStyle/>
-          <a:p>
-            <a:r>
-              <a:rPr lang="en-US" sz="3600" dirty="0"/>
-              <a:t>EXTRA</a:t>
-            </a:r>
-          </a:p>
-        </p:txBody>
-      </p:sp>
-      <p:sp>
-        <p:nvSpPr>
-          <p:cNvPr id="4" name="TextBox 3">
-            <a:extLst>
-              <a:ext uri="{FF2B5EF4-FFF2-40B4-BE49-F238E27FC236}">
-                <a16:creationId xmlns:a16="http://schemas.microsoft.com/office/drawing/2014/main" id="{902F8BE4-9CEA-0DAD-0357-E0A8215F169D}"/>
-              </a:ext>
-            </a:extLst>
-          </p:cNvPr>
-          <p:cNvSpPr txBox="1"/>
-          <p:nvPr/>
-        </p:nvSpPr>
-        <p:spPr>
-          <a:xfrm>
-            <a:off x="274320" y="933117"/>
-            <a:ext cx="11658600" cy="1477328"/>
-          </a:xfrm>
-          <a:prstGeom prst="rect">
-            <a:avLst/>
-          </a:prstGeom>
-          <a:noFill/>
-        </p:spPr>
-        <p:txBody>
-          <a:bodyPr wrap="square">
-            <a:spAutoFit/>
-          </a:bodyPr>
-          <a:lstStyle/>
-          <a:p>
-            <a:pPr marL="0" indent="0">
-              <a:buNone/>
-            </a:pPr>
-            <a:r>
-              <a:rPr lang="en-US" dirty="0" err="1">
-                <a:solidFill>
-                  <a:schemeClr val="accent6">
-                    <a:lumMod val="60000"/>
-                    <a:lumOff val="40000"/>
-                  </a:schemeClr>
-                </a:solidFill>
-              </a:rPr>
-              <a:t>Ffnbksdfd</a:t>
-            </a:r>
-            <a:endParaRPr lang="en-US" dirty="0">
-              <a:solidFill>
-                <a:schemeClr val="accent6">
-                  <a:lumMod val="60000"/>
-                  <a:lumOff val="40000"/>
-                </a:schemeClr>
-              </a:solidFill>
-            </a:endParaRPr>
-          </a:p>
-          <a:p>
-            <a:pPr marL="0" indent="0">
-              <a:buNone/>
-            </a:pPr>
-            <a:r>
-              <a:rPr lang="en-US" dirty="0" err="1">
-                <a:solidFill>
-                  <a:schemeClr val="accent6">
-                    <a:lumMod val="60000"/>
-                    <a:lumOff val="40000"/>
-                  </a:schemeClr>
-                </a:solidFill>
-              </a:rPr>
-              <a:t>Fdslj;f</a:t>
-            </a:r>
-            <a:endParaRPr lang="en-US" dirty="0">
-              <a:solidFill>
-                <a:schemeClr val="accent6">
-                  <a:lumMod val="60000"/>
-                  <a:lumOff val="40000"/>
-                </a:schemeClr>
-              </a:solidFill>
-            </a:endParaRPr>
-          </a:p>
-          <a:p>
-            <a:pPr marL="0" indent="0">
-              <a:buNone/>
-            </a:pPr>
-            <a:endParaRPr lang="en-US" dirty="0">
-              <a:solidFill>
-                <a:schemeClr val="accent6">
-                  <a:lumMod val="60000"/>
-                  <a:lumOff val="40000"/>
-                </a:schemeClr>
-              </a:solidFill>
-            </a:endParaRPr>
-          </a:p>
-          <a:p>
-            <a:pPr marL="0" indent="0">
-              <a:buNone/>
-            </a:pPr>
-            <a:r>
-              <a:rPr lang="en-US" dirty="0" err="1">
-                <a:solidFill>
-                  <a:schemeClr val="accent6">
-                    <a:lumMod val="60000"/>
-                    <a:lumOff val="40000"/>
-                  </a:schemeClr>
-                </a:solidFill>
-              </a:rPr>
-              <a:t>Fl;ds</a:t>
-            </a:r>
-            <a:endParaRPr lang="en-US" dirty="0">
-              <a:solidFill>
-                <a:schemeClr val="accent6">
-                  <a:lumMod val="60000"/>
-                  <a:lumOff val="40000"/>
-                </a:schemeClr>
-              </a:solidFill>
-            </a:endParaRPr>
-          </a:p>
-          <a:p>
-            <a:pPr marL="0" indent="0">
-              <a:buNone/>
-            </a:pPr>
-            <a:endParaRPr lang="en-US" dirty="0">
-              <a:solidFill>
-                <a:schemeClr val="accent6">
-                  <a:lumMod val="60000"/>
-                  <a:lumOff val="40000"/>
-                </a:schemeClr>
-              </a:solidFill>
-            </a:endParaRPr>
-          </a:p>
-        </p:txBody>
-      </p:sp>
     </p:spTree>
     <p:extLst>
       <p:ext uri="{BB962C8B-B14F-4D97-AF65-F5344CB8AC3E}">
@@ -8373,7 +8589,7 @@
         </p:nvSpPr>
         <p:spPr>
           <a:xfrm>
-            <a:off x="532384" y="1058640"/>
+            <a:off x="203200" y="244824"/>
             <a:ext cx="11345672" cy="2677656"/>
           </a:xfrm>
           <a:prstGeom prst="rect">
@@ -8388,6 +8604,17 @@
           <a:lstStyle/>
           <a:p>
             <a:r>
+              <a:rPr lang="en-US" sz="2400" b="1">
+                <a:solidFill>
+                  <a:schemeClr val="accent6">
+                    <a:lumMod val="60000"/>
+                    <a:lumOff val="40000"/>
+                  </a:schemeClr>
+                </a:solidFill>
+              </a:rPr>
+              <a:t>What is a Vector </a:t>
+            </a:r>
+            <a:r>
               <a:rPr lang="en-US" sz="2400" b="1" dirty="0">
                 <a:solidFill>
                   <a:schemeClr val="accent6">
@@ -8396,7 +8623,7 @@
                   </a:schemeClr>
                 </a:solidFill>
               </a:rPr>
-              <a:t>What is a Vector (AKA Embeddings)?</a:t>
+              <a:t>(AKA Embeddings)?</a:t>
             </a:r>
           </a:p>
           <a:p>
@@ -8506,6 +8733,490 @@
 </file>
 
 <file path=ppt/slides/slide3.xml><?xml version="1.0" encoding="utf-8"?>
+<p:sld xmlns:a="http://schemas.openxmlformats.org/drawingml/2006/main" xmlns:r="http://schemas.openxmlformats.org/officeDocument/2006/relationships" xmlns:p="http://schemas.openxmlformats.org/presentationml/2006/main">
+  <p:cSld>
+    <p:spTree>
+      <p:nvGrpSpPr>
+        <p:cNvPr id="1" name="">
+          <a:extLst>
+            <a:ext uri="{FF2B5EF4-FFF2-40B4-BE49-F238E27FC236}">
+              <a16:creationId xmlns:a16="http://schemas.microsoft.com/office/drawing/2014/main" id="{52A47BCA-58F1-636C-D14B-47CB87E834E8}"/>
+            </a:ext>
+          </a:extLst>
+        </p:cNvPr>
+        <p:cNvGrpSpPr/>
+        <p:nvPr/>
+      </p:nvGrpSpPr>
+      <p:grpSpPr>
+        <a:xfrm>
+          <a:off x="0" y="0"/>
+          <a:ext cx="0" cy="0"/>
+          <a:chOff x="0" y="0"/>
+          <a:chExt cx="0" cy="0"/>
+        </a:xfrm>
+      </p:grpSpPr>
+      <p:sp>
+        <p:nvSpPr>
+          <p:cNvPr id="9" name="TextBox 8">
+            <a:extLst>
+              <a:ext uri="{FF2B5EF4-FFF2-40B4-BE49-F238E27FC236}">
+                <a16:creationId xmlns:a16="http://schemas.microsoft.com/office/drawing/2014/main" id="{942FFEA7-AFEE-24F4-14D2-05014E97D8FF}"/>
+              </a:ext>
+            </a:extLst>
+          </p:cNvPr>
+          <p:cNvSpPr txBox="1"/>
+          <p:nvPr/>
+        </p:nvSpPr>
+        <p:spPr>
+          <a:xfrm>
+            <a:off x="349504" y="253968"/>
+            <a:ext cx="11345672" cy="461665"/>
+          </a:xfrm>
+          <a:prstGeom prst="rect">
+            <a:avLst/>
+          </a:prstGeom>
+          <a:noFill/>
+        </p:spPr>
+        <p:txBody>
+          <a:bodyPr wrap="square">
+            <a:spAutoFit/>
+          </a:bodyPr>
+          <a:lstStyle/>
+          <a:p>
+            <a:r>
+              <a:rPr lang="en-US" sz="2400" b="1">
+                <a:solidFill>
+                  <a:schemeClr val="accent6">
+                    <a:lumMod val="60000"/>
+                    <a:lumOff val="40000"/>
+                  </a:schemeClr>
+                </a:solidFill>
+              </a:rPr>
+              <a:t>Contents of Vector DB ?</a:t>
+            </a:r>
+            <a:endParaRPr lang="en-US" sz="2400" b="1" dirty="0">
+              <a:solidFill>
+                <a:schemeClr val="accent6">
+                  <a:lumMod val="60000"/>
+                  <a:lumOff val="40000"/>
+                </a:schemeClr>
+              </a:solidFill>
+            </a:endParaRPr>
+          </a:p>
+        </p:txBody>
+      </p:sp>
+      <p:sp>
+        <p:nvSpPr>
+          <p:cNvPr id="3" name="TextBox 2">
+            <a:extLst>
+              <a:ext uri="{FF2B5EF4-FFF2-40B4-BE49-F238E27FC236}">
+                <a16:creationId xmlns:a16="http://schemas.microsoft.com/office/drawing/2014/main" id="{15655FED-F2F0-6C80-2481-72F039EE712A}"/>
+              </a:ext>
+            </a:extLst>
+          </p:cNvPr>
+          <p:cNvSpPr txBox="1"/>
+          <p:nvPr/>
+        </p:nvSpPr>
+        <p:spPr>
+          <a:xfrm>
+            <a:off x="697230" y="1556680"/>
+            <a:ext cx="8245602" cy="369332"/>
+          </a:xfrm>
+          <a:prstGeom prst="rect">
+            <a:avLst/>
+          </a:prstGeom>
+          <a:noFill/>
+        </p:spPr>
+        <p:txBody>
+          <a:bodyPr wrap="square">
+            <a:spAutoFit/>
+          </a:bodyPr>
+          <a:lstStyle/>
+          <a:p>
+            <a:r>
+              <a:rPr lang="en-IN">
+                <a:solidFill>
+                  <a:schemeClr val="accent6">
+                    <a:lumMod val="60000"/>
+                    <a:lumOff val="40000"/>
+                  </a:schemeClr>
+                </a:solidFill>
+              </a:rPr>
+              <a:t>METADATA : source text chunks, file paths, IDs, timestamps, or categories</a:t>
+            </a:r>
+          </a:p>
+        </p:txBody>
+      </p:sp>
+      <p:graphicFrame>
+        <p:nvGraphicFramePr>
+          <p:cNvPr id="5" name="Table 4">
+            <a:extLst>
+              <a:ext uri="{FF2B5EF4-FFF2-40B4-BE49-F238E27FC236}">
+                <a16:creationId xmlns:a16="http://schemas.microsoft.com/office/drawing/2014/main" id="{6DF29622-2C9B-9E14-6FF8-7F630E127ADE}"/>
+              </a:ext>
+            </a:extLst>
+          </p:cNvPr>
+          <p:cNvGraphicFramePr>
+            <a:graphicFrameLocks noGrp="1"/>
+          </p:cNvGraphicFramePr>
+          <p:nvPr>
+            <p:extLst>
+              <p:ext uri="{D42A27DB-BD31-4B8C-83A1-F6EECF244321}">
+                <p14:modId xmlns:p14="http://schemas.microsoft.com/office/powerpoint/2010/main" val="4001303352"/>
+              </p:ext>
+            </p:extLst>
+          </p:nvPr>
+        </p:nvGraphicFramePr>
+        <p:xfrm>
+          <a:off x="225552" y="3136392"/>
+          <a:ext cx="11740896" cy="1107440"/>
+        </p:xfrm>
+        <a:graphic>
+          <a:graphicData uri="http://schemas.openxmlformats.org/drawingml/2006/table">
+            <a:tbl>
+              <a:tblPr firstRow="1" bandRow="1">
+                <a:tableStyleId>{5C22544A-7EE6-4342-B048-85BDC9FD1C3A}</a:tableStyleId>
+              </a:tblPr>
+              <a:tblGrid>
+                <a:gridCol w="3063240">
+                  <a:extLst>
+                    <a:ext uri="{9D8B030D-6E8A-4147-A177-3AD203B41FA5}">
+                      <a16:colId xmlns:a16="http://schemas.microsoft.com/office/drawing/2014/main" val="1179402549"/>
+                    </a:ext>
+                  </a:extLst>
+                </a:gridCol>
+                <a:gridCol w="2377440">
+                  <a:extLst>
+                    <a:ext uri="{9D8B030D-6E8A-4147-A177-3AD203B41FA5}">
+                      <a16:colId xmlns:a16="http://schemas.microsoft.com/office/drawing/2014/main" val="2178047776"/>
+                    </a:ext>
+                  </a:extLst>
+                </a:gridCol>
+                <a:gridCol w="2359152">
+                  <a:extLst>
+                    <a:ext uri="{9D8B030D-6E8A-4147-A177-3AD203B41FA5}">
+                      <a16:colId xmlns:a16="http://schemas.microsoft.com/office/drawing/2014/main" val="1504329732"/>
+                    </a:ext>
+                  </a:extLst>
+                </a:gridCol>
+                <a:gridCol w="3941064">
+                  <a:extLst>
+                    <a:ext uri="{9D8B030D-6E8A-4147-A177-3AD203B41FA5}">
+                      <a16:colId xmlns:a16="http://schemas.microsoft.com/office/drawing/2014/main" val="1315033718"/>
+                    </a:ext>
+                  </a:extLst>
+                </a:gridCol>
+              </a:tblGrid>
+              <a:tr h="313266">
+                <a:tc>
+                  <a:txBody>
+                    <a:bodyPr/>
+                    <a:lstStyle/>
+                    <a:p>
+                      <a:r>
+                        <a:rPr lang="en-US"/>
+                        <a:t>source_text_chunks</a:t>
+                      </a:r>
+                      <a:endParaRPr lang="en-IN" dirty="0"/>
+                    </a:p>
+                  </a:txBody>
+                  <a:tcPr/>
+                </a:tc>
+                <a:tc>
+                  <a:txBody>
+                    <a:bodyPr/>
+                    <a:lstStyle/>
+                    <a:p>
+                      <a:r>
+                        <a:rPr lang="en-US"/>
+                        <a:t>file_path</a:t>
+                      </a:r>
+                      <a:endParaRPr lang="en-IN" dirty="0"/>
+                    </a:p>
+                  </a:txBody>
+                  <a:tcPr/>
+                </a:tc>
+                <a:tc>
+                  <a:txBody>
+                    <a:bodyPr/>
+                    <a:lstStyle/>
+                    <a:p>
+                      <a:r>
+                        <a:rPr lang="en-US"/>
+                        <a:t>time_stamp</a:t>
+                      </a:r>
+                      <a:endParaRPr lang="en-IN" dirty="0"/>
+                    </a:p>
+                  </a:txBody>
+                  <a:tcPr/>
+                </a:tc>
+                <a:tc>
+                  <a:txBody>
+                    <a:bodyPr/>
+                    <a:lstStyle/>
+                    <a:p>
+                      <a:r>
+                        <a:rPr lang="en-US">
+                          <a:solidFill>
+                            <a:schemeClr val="tx1"/>
+                          </a:solidFill>
+                        </a:rPr>
+                        <a:t>vector</a:t>
+                      </a:r>
+                      <a:endParaRPr lang="en-IN" dirty="0">
+                        <a:solidFill>
+                          <a:schemeClr val="tx1"/>
+                        </a:solidFill>
+                      </a:endParaRPr>
+                    </a:p>
+                  </a:txBody>
+                  <a:tcPr/>
+                </a:tc>
+                <a:extLst>
+                  <a:ext uri="{0D108BD9-81ED-4DB2-BD59-A6C34878D82A}">
+                    <a16:rowId xmlns:a16="http://schemas.microsoft.com/office/drawing/2014/main" val="416379968"/>
+                  </a:ext>
+                </a:extLst>
+              </a:tr>
+              <a:tr h="370840">
+                <a:tc>
+                  <a:txBody>
+                    <a:bodyPr/>
+                    <a:lstStyle/>
+                    <a:p>
+                      <a:r>
+                        <a:rPr lang="en-US"/>
+                        <a:t>Machine Learning is powerful</a:t>
+                      </a:r>
+                      <a:endParaRPr lang="en-IN" dirty="0"/>
+                    </a:p>
+                  </a:txBody>
+                  <a:tcPr/>
+                </a:tc>
+                <a:tc>
+                  <a:txBody>
+                    <a:bodyPr/>
+                    <a:lstStyle/>
+                    <a:p>
+                      <a:r>
+                        <a:rPr lang="en-US"/>
+                        <a:t>C:/Desktop/AI.pdf</a:t>
+                      </a:r>
+                      <a:endParaRPr lang="en-IN" dirty="0"/>
+                    </a:p>
+                  </a:txBody>
+                  <a:tcPr/>
+                </a:tc>
+                <a:tc>
+                  <a:txBody>
+                    <a:bodyPr/>
+                    <a:lstStyle/>
+                    <a:p>
+                      <a:r>
+                        <a:rPr lang="en-US"/>
+                        <a:t>2026-02-23 05:23:11</a:t>
+                      </a:r>
+                      <a:endParaRPr lang="en-IN" dirty="0"/>
+                    </a:p>
+                  </a:txBody>
+                  <a:tcPr/>
+                </a:tc>
+                <a:tc>
+                  <a:txBody>
+                    <a:bodyPr/>
+                    <a:lstStyle/>
+                    <a:p>
+                      <a:r>
+                        <a:rPr lang="en-US">
+                          <a:solidFill>
+                            <a:schemeClr val="bg1"/>
+                          </a:solidFill>
+                        </a:rPr>
+                        <a:t>[</a:t>
+                      </a:r>
+                      <a:r>
+                        <a:rPr lang="en-US" sz="1800">
+                          <a:solidFill>
+                            <a:schemeClr val="bg1"/>
+                          </a:solidFill>
+                        </a:rPr>
+                        <a:t>0.21, -0.45, 0.78, 0.11, ..., -0.45]</a:t>
+                      </a:r>
+                      <a:endParaRPr lang="en-IN" dirty="0">
+                        <a:solidFill>
+                          <a:schemeClr val="bg1"/>
+                        </a:solidFill>
+                      </a:endParaRPr>
+                    </a:p>
+                  </a:txBody>
+                  <a:tcPr/>
+                </a:tc>
+                <a:extLst>
+                  <a:ext uri="{0D108BD9-81ED-4DB2-BD59-A6C34878D82A}">
+                    <a16:rowId xmlns:a16="http://schemas.microsoft.com/office/drawing/2014/main" val="3418404669"/>
+                  </a:ext>
+                </a:extLst>
+              </a:tr>
+              <a:tr h="370840">
+                <a:tc>
+                  <a:txBody>
+                    <a:bodyPr/>
+                    <a:lstStyle/>
+                    <a:p>
+                      <a:r>
+                        <a:rPr lang="en-US" sz="1800">
+                          <a:solidFill>
+                            <a:schemeClr val="bg1"/>
+                          </a:solidFill>
+                        </a:rPr>
+                        <a:t>The quick brown fox jumps</a:t>
+                      </a:r>
+                      <a:endParaRPr lang="en-IN" dirty="0">
+                        <a:solidFill>
+                          <a:schemeClr val="bg1"/>
+                        </a:solidFill>
+                      </a:endParaRPr>
+                    </a:p>
+                  </a:txBody>
+                  <a:tcPr/>
+                </a:tc>
+                <a:tc>
+                  <a:txBody>
+                    <a:bodyPr/>
+                    <a:lstStyle/>
+                    <a:p>
+                      <a:pPr marL="0" marR="0" lvl="0" indent="0" algn="l" defTabSz="914400" rtl="0" eaLnBrk="1" fontAlgn="auto" latinLnBrk="0" hangingPunct="1">
+                        <a:lnSpc>
+                          <a:spcPct val="100000"/>
+                        </a:lnSpc>
+                        <a:spcBef>
+                          <a:spcPts val="0"/>
+                        </a:spcBef>
+                        <a:spcAft>
+                          <a:spcPts val="0"/>
+                        </a:spcAft>
+                        <a:buClrTx/>
+                        <a:buSzTx/>
+                        <a:buFontTx/>
+                        <a:buNone/>
+                        <a:tabLst/>
+                        <a:defRPr/>
+                      </a:pPr>
+                      <a:r>
+                        <a:rPr lang="en-US"/>
+                        <a:t>C:/Desktop/story.pdf</a:t>
+                      </a:r>
+                      <a:endParaRPr lang="en-IN"/>
+                    </a:p>
+                  </a:txBody>
+                  <a:tcPr/>
+                </a:tc>
+                <a:tc>
+                  <a:txBody>
+                    <a:bodyPr/>
+                    <a:lstStyle/>
+                    <a:p>
+                      <a:r>
+                        <a:rPr lang="en-US"/>
+                        <a:t>2026-02-23 05:23:11</a:t>
+                      </a:r>
+                      <a:endParaRPr lang="en-IN" dirty="0"/>
+                    </a:p>
+                  </a:txBody>
+                  <a:tcPr/>
+                </a:tc>
+                <a:tc>
+                  <a:txBody>
+                    <a:bodyPr/>
+                    <a:lstStyle/>
+                    <a:p>
+                      <a:r>
+                        <a:rPr lang="en-US" sz="1800">
+                          <a:solidFill>
+                            <a:schemeClr val="bg1"/>
+                          </a:solidFill>
+                        </a:rPr>
+                        <a:t>[0.02, -0.05, 0.12, -0.01, ..., 0.08, -0.32]</a:t>
+                      </a:r>
+                    </a:p>
+                  </a:txBody>
+                  <a:tcPr/>
+                </a:tc>
+                <a:extLst>
+                  <a:ext uri="{0D108BD9-81ED-4DB2-BD59-A6C34878D82A}">
+                    <a16:rowId xmlns:a16="http://schemas.microsoft.com/office/drawing/2014/main" val="2663108341"/>
+                  </a:ext>
+                </a:extLst>
+              </a:tr>
+            </a:tbl>
+          </a:graphicData>
+        </a:graphic>
+      </p:graphicFrame>
+      <mc:AlternateContent xmlns:mc="http://schemas.openxmlformats.org/markup-compatibility/2006">
+        <mc:Choice xmlns:p14="http://schemas.microsoft.com/office/powerpoint/2010/main" Requires="p14">
+          <p:contentPart p14:bwMode="auto" r:id="rId2">
+            <p14:nvContentPartPr>
+              <p14:cNvPr id="6" name="Ink 5">
+                <a:extLst>
+                  <a:ext uri="{FF2B5EF4-FFF2-40B4-BE49-F238E27FC236}">
+                    <a16:creationId xmlns:a16="http://schemas.microsoft.com/office/drawing/2014/main" id="{C94C87DF-539F-9A6A-9140-BB3391707252}"/>
+                  </a:ext>
+                </a:extLst>
+              </p14:cNvPr>
+              <p14:cNvContentPartPr/>
+              <p14:nvPr/>
+            </p14:nvContentPartPr>
+            <p14:xfrm>
+              <a:off x="237744" y="2398176"/>
+              <a:ext cx="7569360" cy="606960"/>
+            </p14:xfrm>
+          </p:contentPart>
+        </mc:Choice>
+        <mc:Fallback>
+          <p:pic>
+            <p:nvPicPr>
+              <p:cNvPr id="6" name="Ink 5">
+                <a:extLst>
+                  <a:ext uri="{FF2B5EF4-FFF2-40B4-BE49-F238E27FC236}">
+                    <a16:creationId xmlns:a16="http://schemas.microsoft.com/office/drawing/2014/main" id="{C94C87DF-539F-9A6A-9140-BB3391707252}"/>
+                  </a:ext>
+                </a:extLst>
+              </p:cNvPr>
+              <p:cNvPicPr/>
+              <p:nvPr/>
+            </p:nvPicPr>
+            <p:blipFill>
+              <a:blip r:embed="rId3"/>
+              <a:stretch>
+                <a:fillRect/>
+              </a:stretch>
+            </p:blipFill>
+            <p:spPr>
+              <a:xfrm>
+                <a:off x="219744" y="2380536"/>
+                <a:ext cx="7605000" cy="642600"/>
+              </a:xfrm>
+              <a:prstGeom prst="rect">
+                <a:avLst/>
+              </a:prstGeom>
+            </p:spPr>
+          </p:pic>
+        </mc:Fallback>
+      </mc:AlternateContent>
+    </p:spTree>
+    <p:extLst>
+      <p:ext uri="{BB962C8B-B14F-4D97-AF65-F5344CB8AC3E}">
+        <p14:creationId xmlns:p14="http://schemas.microsoft.com/office/powerpoint/2010/main" val="645318874"/>
+      </p:ext>
+    </p:extLst>
+  </p:cSld>
+  <p:clrMapOvr>
+    <a:masterClrMapping/>
+  </p:clrMapOvr>
+</p:sld>
+</file>
+
+<file path=ppt/slides/slide4.xml><?xml version="1.0" encoding="utf-8"?>
 <p:sld xmlns:a="http://schemas.openxmlformats.org/drawingml/2006/main" xmlns:r="http://schemas.openxmlformats.org/officeDocument/2006/relationships" xmlns:p="http://schemas.openxmlformats.org/presentationml/2006/main">
   <p:cSld>
     <p:spTree>
@@ -8543,7 +9254,7 @@
         <p:spPr>
           <a:xfrm>
             <a:off x="94488" y="89376"/>
-            <a:ext cx="7236968" cy="5632311"/>
+            <a:ext cx="8290560" cy="5262979"/>
           </a:xfrm>
           <a:prstGeom prst="rect">
             <a:avLst/>
@@ -8626,7 +9337,7 @@
               <a:t>If you perform </a:t>
             </a:r>
             <a:r>
-              <a:rPr lang="en-US" sz="2400" b="1" dirty="0">
+              <a:rPr lang="en-US" sz="2400" b="1">
                 <a:solidFill>
                   <a:schemeClr val="accent6">
                     <a:lumMod val="60000"/>
@@ -8637,6 +9348,17 @@
               <a:t>normal</a:t>
             </a:r>
             <a:r>
+              <a:rPr lang="en-US" sz="2400">
+                <a:solidFill>
+                  <a:schemeClr val="accent6">
+                    <a:lumMod val="60000"/>
+                    <a:lumOff val="40000"/>
+                  </a:schemeClr>
+                </a:solidFill>
+              </a:rPr>
+              <a:t> SQL search </a:t>
+            </a:r>
+            <a:r>
               <a:rPr lang="en-US" sz="2400" dirty="0">
                 <a:solidFill>
                   <a:schemeClr val="accent6">
@@ -8645,7 +9367,7 @@
                   </a:schemeClr>
                 </a:solidFill>
               </a:rPr>
-              <a:t> search on "car“,</a:t>
+              <a:t>on "car“,</a:t>
             </a:r>
           </a:p>
           <a:p>
@@ -8817,16 +9539,10 @@
           <p:cNvGraphicFramePr>
             <a:graphicFrameLocks noGrp="1"/>
           </p:cNvGraphicFramePr>
-          <p:nvPr>
-            <p:extLst>
-              <p:ext uri="{D42A27DB-BD31-4B8C-83A1-F6EECF244321}">
-                <p14:modId xmlns:p14="http://schemas.microsoft.com/office/powerpoint/2010/main" val="4289130477"/>
-              </p:ext>
-            </p:extLst>
-          </p:nvPr>
+          <p:nvPr/>
         </p:nvGraphicFramePr>
         <p:xfrm>
-          <a:off x="6744208" y="1344168"/>
+          <a:off x="6239862" y="3429000"/>
           <a:ext cx="5353304" cy="2961640"/>
         </p:xfrm>
         <a:graphic>
@@ -9431,7 +10147,7 @@
         </p:nvSpPr>
         <p:spPr>
           <a:xfrm>
-            <a:off x="6839966" y="4960435"/>
+            <a:off x="7103364" y="1706022"/>
             <a:ext cx="5161788" cy="1200329"/>
           </a:xfrm>
           <a:prstGeom prst="rect">
@@ -9448,7 +10164,7 @@
             <a:r>
               <a:rPr lang="en-IN" sz="2400" i="1" dirty="0">
                 <a:solidFill>
-                  <a:schemeClr val="accent6">
+                  <a:schemeClr val="accent4">
                     <a:lumMod val="60000"/>
                     <a:lumOff val="40000"/>
                   </a:schemeClr>
@@ -9461,7 +10177,7 @@
             <a:r>
               <a:rPr lang="en-IN" sz="2400" i="1" dirty="0">
                 <a:solidFill>
-                  <a:schemeClr val="accent6">
+                  <a:schemeClr val="accent4">
                     <a:lumMod val="60000"/>
                     <a:lumOff val="40000"/>
                   </a:schemeClr>
@@ -9472,7 +10188,7 @@
             <a:r>
               <a:rPr lang="en-IN" sz="2400" i="1" dirty="0" err="1">
                 <a:solidFill>
-                  <a:schemeClr val="accent6">
+                  <a:schemeClr val="accent4">
                     <a:lumMod val="60000"/>
                     <a:lumOff val="40000"/>
                   </a:schemeClr>
@@ -9483,7 +10199,7 @@
             <a:r>
               <a:rPr lang="en-IN" sz="2400" i="1" dirty="0">
                 <a:solidFill>
-                  <a:schemeClr val="accent6">
+                  <a:schemeClr val="accent4">
                     <a:lumMod val="60000"/>
                     <a:lumOff val="40000"/>
                   </a:schemeClr>
@@ -9496,7 +10212,7 @@
             <a:r>
               <a:rPr lang="en-IN" sz="2400" i="1" dirty="0">
                 <a:solidFill>
-                  <a:schemeClr val="accent6">
+                  <a:schemeClr val="accent4">
                     <a:lumMod val="60000"/>
                     <a:lumOff val="40000"/>
                   </a:schemeClr>
@@ -9504,6 +10220,52 @@
               </a:rPr>
               <a:t>WHERE LOWER(Category) LIKE '%car%';</a:t>
             </a:r>
+          </a:p>
+        </p:txBody>
+      </p:sp>
+      <p:sp>
+        <p:nvSpPr>
+          <p:cNvPr id="3" name="Arrow: Right 2">
+            <a:extLst>
+              <a:ext uri="{FF2B5EF4-FFF2-40B4-BE49-F238E27FC236}">
+                <a16:creationId xmlns:a16="http://schemas.microsoft.com/office/drawing/2014/main" id="{3D6BDC57-2B83-CC54-2FD0-6413ED37C58B}"/>
+              </a:ext>
+            </a:extLst>
+          </p:cNvPr>
+          <p:cNvSpPr/>
+          <p:nvPr/>
+        </p:nvSpPr>
+        <p:spPr>
+          <a:xfrm>
+            <a:off x="5349240" y="1915227"/>
+            <a:ext cx="1197864" cy="475488"/>
+          </a:xfrm>
+          <a:prstGeom prst="rightArrow">
+            <a:avLst/>
+          </a:prstGeom>
+        </p:spPr>
+        <p:style>
+          <a:lnRef idx="2">
+            <a:schemeClr val="accent1">
+              <a:shade val="15000"/>
+            </a:schemeClr>
+          </a:lnRef>
+          <a:fillRef idx="1">
+            <a:schemeClr val="accent1"/>
+          </a:fillRef>
+          <a:effectRef idx="0">
+            <a:schemeClr val="accent1"/>
+          </a:effectRef>
+          <a:fontRef idx="minor">
+            <a:schemeClr val="lt1"/>
+          </a:fontRef>
+        </p:style>
+        <p:txBody>
+          <a:bodyPr rtlCol="0" anchor="ctr"/>
+          <a:lstStyle/>
+          <a:p>
+            <a:pPr algn="ctr"/>
+            <a:endParaRPr lang="en-IN"/>
           </a:p>
         </p:txBody>
       </p:sp>
@@ -9520,7 +10282,7 @@
 </p:sld>
 </file>
 
-<file path=ppt/slides/slide4.xml><?xml version="1.0" encoding="utf-8"?>
+<file path=ppt/slides/slide5.xml><?xml version="1.0" encoding="utf-8"?>
 <p:sld xmlns:a="http://schemas.openxmlformats.org/drawingml/2006/main" xmlns:r="http://schemas.openxmlformats.org/officeDocument/2006/relationships" xmlns:p="http://schemas.openxmlformats.org/presentationml/2006/main">
   <p:cSld>
     <p:spTree>
@@ -9557,8 +10319,8 @@
         </p:nvSpPr>
         <p:spPr>
           <a:xfrm>
-            <a:off x="206248" y="1003774"/>
-            <a:ext cx="7337552" cy="4524315"/>
+            <a:off x="142003" y="294948"/>
+            <a:ext cx="7337552" cy="5262979"/>
           </a:xfrm>
           <a:prstGeom prst="rect">
             <a:avLst/>
@@ -9670,7 +10432,29 @@
                   </a:schemeClr>
                 </a:solidFill>
               </a:rPr>
-              <a:t>Search: "car"</a:t>
+              <a:t>Search: "</a:t>
+            </a:r>
+            <a:r>
+              <a:rPr lang="en-US" sz="2400" b="1" i="1" dirty="0">
+                <a:solidFill>
+                  <a:schemeClr val="accent6">
+                    <a:lumMod val="60000"/>
+                    <a:lumOff val="40000"/>
+                  </a:schemeClr>
+                </a:solidFill>
+              </a:rPr>
+              <a:t>car</a:t>
+            </a:r>
+            <a:r>
+              <a:rPr lang="en-US" sz="2400" dirty="0">
+                <a:solidFill>
+                  <a:schemeClr val="accent6">
+                    <a:lumMod val="60000"/>
+                    <a:lumOff val="40000"/>
+                  </a:schemeClr>
+                </a:solidFill>
+              </a:rPr>
+              <a:t>"</a:t>
             </a:r>
           </a:p>
           <a:p>
@@ -9782,7 +10566,7 @@
               <a:buChar char="•"/>
             </a:pPr>
             <a:r>
-              <a:rPr lang="en-US" sz="2400" dirty="0">
+              <a:rPr lang="en-US" sz="2400">
                 <a:solidFill>
                   <a:schemeClr val="accent6">
                     <a:lumMod val="60000"/>
@@ -9793,104 +10577,23 @@
               <a:t>Transport ✅</a:t>
             </a:r>
           </a:p>
-        </p:txBody>
-      </p:sp>
-      <p:pic>
-        <p:nvPicPr>
-          <p:cNvPr id="2" name="Picture 1">
-            <a:extLst>
-              <a:ext uri="{FF2B5EF4-FFF2-40B4-BE49-F238E27FC236}">
-                <a16:creationId xmlns:a16="http://schemas.microsoft.com/office/drawing/2014/main" id="{A30A36A6-8E33-B130-7614-A572D50AF078}"/>
-              </a:ext>
-            </a:extLst>
-          </p:cNvPr>
-          <p:cNvPicPr>
-            <a:picLocks noChangeAspect="1"/>
-          </p:cNvPicPr>
-          <p:nvPr/>
-        </p:nvPicPr>
-        <p:blipFill>
-          <a:blip r:embed="rId2"/>
-          <a:stretch>
-            <a:fillRect/>
-          </a:stretch>
-        </p:blipFill>
-        <p:spPr>
-          <a:xfrm>
-            <a:off x="7883144" y="1186760"/>
-            <a:ext cx="3336376" cy="3262233"/>
-          </a:xfrm>
-          <a:prstGeom prst="rect">
-            <a:avLst/>
-          </a:prstGeom>
-        </p:spPr>
-      </p:pic>
-    </p:spTree>
-    <p:extLst>
-      <p:ext uri="{BB962C8B-B14F-4D97-AF65-F5344CB8AC3E}">
-        <p14:creationId xmlns:p14="http://schemas.microsoft.com/office/powerpoint/2010/main" val="3555340216"/>
-      </p:ext>
-    </p:extLst>
-  </p:cSld>
-  <p:clrMapOvr>
-    <a:masterClrMapping/>
-  </p:clrMapOvr>
-</p:sld>
-</file>
-
-<file path=ppt/slides/slide5.xml><?xml version="1.0" encoding="utf-8"?>
-<p:sld xmlns:a="http://schemas.openxmlformats.org/drawingml/2006/main" xmlns:r="http://schemas.openxmlformats.org/officeDocument/2006/relationships" xmlns:p="http://schemas.openxmlformats.org/presentationml/2006/main">
-  <p:cSld>
-    <p:spTree>
-      <p:nvGrpSpPr>
-        <p:cNvPr id="1" name="">
-          <a:extLst>
-            <a:ext uri="{FF2B5EF4-FFF2-40B4-BE49-F238E27FC236}">
-              <a16:creationId xmlns:a16="http://schemas.microsoft.com/office/drawing/2014/main" id="{4AF35BCE-DC37-C842-9ABC-6EAB86CB8EC7}"/>
-            </a:ext>
-          </a:extLst>
-        </p:cNvPr>
-        <p:cNvGrpSpPr/>
-        <p:nvPr/>
-      </p:nvGrpSpPr>
-      <p:grpSpPr>
-        <a:xfrm>
-          <a:off x="0" y="0"/>
-          <a:ext cx="0" cy="0"/>
-          <a:chOff x="0" y="0"/>
-          <a:chExt cx="0" cy="0"/>
-        </a:xfrm>
-      </p:grpSpPr>
-      <p:sp>
-        <p:nvSpPr>
-          <p:cNvPr id="9" name="TextBox 8">
-            <a:extLst>
-              <a:ext uri="{FF2B5EF4-FFF2-40B4-BE49-F238E27FC236}">
-                <a16:creationId xmlns:a16="http://schemas.microsoft.com/office/drawing/2014/main" id="{FDBD0E7A-0D3F-5544-EBBB-111CC42CB55E}"/>
-              </a:ext>
-            </a:extLst>
-          </p:cNvPr>
-          <p:cNvSpPr txBox="1"/>
-          <p:nvPr/>
-        </p:nvSpPr>
-        <p:spPr>
-          <a:xfrm>
-            <a:off x="206248" y="1003774"/>
-            <a:ext cx="7337552" cy="1569660"/>
-          </a:xfrm>
-          <a:prstGeom prst="rect">
-            <a:avLst/>
-          </a:prstGeom>
-          <a:noFill/>
-        </p:spPr>
-        <p:txBody>
-          <a:bodyPr wrap="square">
-            <a:spAutoFit/>
-          </a:bodyPr>
-          <a:lstStyle/>
-          <a:p>
-            <a:r>
-              <a:rPr lang="en-US" sz="2400" dirty="0">
+          <a:p>
+            <a:pPr marL="342900" indent="-342900">
+              <a:buFont typeface="Arial" panose="020B0604020202020204" pitchFamily="34" charset="0"/>
+              <a:buChar char="•"/>
+            </a:pPr>
+            <a:endParaRPr lang="en-US" sz="2400">
+              <a:solidFill>
+                <a:schemeClr val="accent6">
+                  <a:lumMod val="60000"/>
+                  <a:lumOff val="40000"/>
+                </a:schemeClr>
+              </a:solidFill>
+            </a:endParaRPr>
+          </a:p>
+          <a:p>
+            <a:r>
+              <a:rPr lang="en-US" sz="2400">
                 <a:solidFill>
                   <a:schemeClr val="accent6">
                     <a:lumMod val="60000"/>
@@ -9898,11 +10601,20 @@
                   </a:schemeClr>
                 </a:solidFill>
               </a:rPr>
-              <a:t>Core Idea of  Vector DB:</a:t>
-            </a:r>
-          </a:p>
-          <a:p>
-            <a:endParaRPr lang="en-US" sz="2400" dirty="0">
+              <a:t>Because these vector would be close to </a:t>
+            </a:r>
+            <a:r>
+              <a:rPr lang="en-US" sz="2400" b="1" i="1">
+                <a:solidFill>
+                  <a:schemeClr val="accent6">
+                    <a:lumMod val="60000"/>
+                    <a:lumOff val="40000"/>
+                  </a:schemeClr>
+                </a:solidFill>
+              </a:rPr>
+              <a:t>car</a:t>
+            </a:r>
+            <a:endParaRPr lang="en-US" sz="2400" b="1" i="1" dirty="0">
               <a:solidFill>
                 <a:schemeClr val="accent6">
                   <a:lumMod val="60000"/>
@@ -9911,27 +10623,14 @@
               </a:solidFill>
             </a:endParaRPr>
           </a:p>
-          <a:p>
-            <a:r>
-              <a:rPr lang="en-US" sz="2400" dirty="0">
-                <a:solidFill>
-                  <a:schemeClr val="accent6">
-                    <a:lumMod val="60000"/>
-                    <a:lumOff val="40000"/>
-                  </a:schemeClr>
-                </a:solidFill>
-              </a:rPr>
-              <a:t>The vectors that are similar in meaning would be near each other</a:t>
-            </a:r>
-          </a:p>
         </p:txBody>
       </p:sp>
       <p:sp>
         <p:nvSpPr>
-          <p:cNvPr id="3" name="Rectangle 2">
+          <p:cNvPr id="5" name="Rectangle 4">
             <a:extLst>
               <a:ext uri="{FF2B5EF4-FFF2-40B4-BE49-F238E27FC236}">
-                <a16:creationId xmlns:a16="http://schemas.microsoft.com/office/drawing/2014/main" id="{E92D6FFE-A777-EA6C-CE99-DCD9FD18A2FF}"/>
+                <a16:creationId xmlns:a16="http://schemas.microsoft.com/office/drawing/2014/main" id="{425F66EB-7051-8BB6-FEC5-6EDCA2D10695}"/>
               </a:ext>
             </a:extLst>
           </p:cNvPr>
@@ -9981,10 +10680,10 @@
       </p:sp>
       <p:sp>
         <p:nvSpPr>
-          <p:cNvPr id="5" name="TextBox 4">
+          <p:cNvPr id="6" name="TextBox 5">
             <a:extLst>
               <a:ext uri="{FF2B5EF4-FFF2-40B4-BE49-F238E27FC236}">
-                <a16:creationId xmlns:a16="http://schemas.microsoft.com/office/drawing/2014/main" id="{F65214CA-8A0B-DAE8-7F1E-D08B8CCE9F74}"/>
+                <a16:creationId xmlns:a16="http://schemas.microsoft.com/office/drawing/2014/main" id="{E640348A-BB4D-8CDF-027B-1B0C98A89508}"/>
               </a:ext>
             </a:extLst>
           </p:cNvPr>
@@ -9994,7 +10693,7 @@
         <p:spPr>
           <a:xfrm>
             <a:off x="8647680" y="3244334"/>
-            <a:ext cx="519694" cy="369332"/>
+            <a:ext cx="842859" cy="369332"/>
           </a:xfrm>
           <a:prstGeom prst="rect">
             <a:avLst/>
@@ -10008,7 +10707,7 @@
           <a:lstStyle/>
           <a:p>
             <a:r>
-              <a:rPr lang="en-IN" dirty="0">
+              <a:rPr lang="en-US">
                 <a:solidFill>
                   <a:schemeClr val="accent6">
                     <a:lumMod val="60000"/>
@@ -10016,8 +10715,27 @@
                   </a:schemeClr>
                 </a:solidFill>
               </a:rPr>
-              <a:t>fish</a:t>
-            </a:r>
+              <a:t>v</a:t>
+            </a:r>
+            <a:r>
+              <a:rPr lang="en-IN">
+                <a:solidFill>
+                  <a:schemeClr val="accent6">
+                    <a:lumMod val="60000"/>
+                    <a:lumOff val="40000"/>
+                  </a:schemeClr>
+                </a:solidFill>
+              </a:rPr>
+              <a:t>ehicle</a:t>
+            </a:r>
+            <a:endParaRPr lang="en-IN" dirty="0">
+              <a:solidFill>
+                <a:schemeClr val="accent6">
+                  <a:lumMod val="60000"/>
+                  <a:lumOff val="40000"/>
+                </a:schemeClr>
+              </a:solidFill>
+            </a:endParaRPr>
           </a:p>
         </p:txBody>
       </p:sp>
@@ -10026,7 +10744,7 @@
           <p:cNvPr id="7" name="TextBox 6">
             <a:extLst>
               <a:ext uri="{FF2B5EF4-FFF2-40B4-BE49-F238E27FC236}">
-                <a16:creationId xmlns:a16="http://schemas.microsoft.com/office/drawing/2014/main" id="{AEEE8C6B-D935-2A5C-6796-734375142E6C}"/>
+                <a16:creationId xmlns:a16="http://schemas.microsoft.com/office/drawing/2014/main" id="{F74B1E41-E83F-0C2C-2AF7-040ABEE980C2}"/>
               </a:ext>
             </a:extLst>
           </p:cNvPr>
@@ -10036,7 +10754,7 @@
         <p:spPr>
           <a:xfrm>
             <a:off x="8041372" y="2670391"/>
-            <a:ext cx="725711" cy="369332"/>
+            <a:ext cx="1262846" cy="369332"/>
           </a:xfrm>
           <a:prstGeom prst="rect">
             <a:avLst/>
@@ -10050,7 +10768,7 @@
           <a:lstStyle/>
           <a:p>
             <a:r>
-              <a:rPr lang="en-IN" dirty="0">
+              <a:rPr lang="en-US">
                 <a:solidFill>
                   <a:schemeClr val="accent6">
                     <a:lumMod val="60000"/>
@@ -10058,17 +10776,36 @@
                   </a:schemeClr>
                 </a:solidFill>
               </a:rPr>
-              <a:t>water</a:t>
-            </a:r>
+              <a:t>a</a:t>
+            </a:r>
+            <a:r>
+              <a:rPr lang="en-IN">
+                <a:solidFill>
+                  <a:schemeClr val="accent6">
+                    <a:lumMod val="60000"/>
+                    <a:lumOff val="40000"/>
+                  </a:schemeClr>
+                </a:solidFill>
+              </a:rPr>
+              <a:t>utomobile</a:t>
+            </a:r>
+            <a:endParaRPr lang="en-IN" dirty="0">
+              <a:solidFill>
+                <a:schemeClr val="accent6">
+                  <a:lumMod val="60000"/>
+                  <a:lumOff val="40000"/>
+                </a:schemeClr>
+              </a:solidFill>
+            </a:endParaRPr>
           </a:p>
         </p:txBody>
       </p:sp>
       <p:sp>
         <p:nvSpPr>
-          <p:cNvPr id="10" name="TextBox 9">
+          <p:cNvPr id="8" name="TextBox 7">
             <a:extLst>
               <a:ext uri="{FF2B5EF4-FFF2-40B4-BE49-F238E27FC236}">
-                <a16:creationId xmlns:a16="http://schemas.microsoft.com/office/drawing/2014/main" id="{3E5C20DD-A8EE-C81C-A34F-BAF960C84A83}"/>
+                <a16:creationId xmlns:a16="http://schemas.microsoft.com/office/drawing/2014/main" id="{D386AE03-CE94-A977-5124-89034F3A6BF9}"/>
               </a:ext>
             </a:extLst>
           </p:cNvPr>
@@ -10078,7 +10815,7 @@
         <p:spPr>
           <a:xfrm>
             <a:off x="7926295" y="3539152"/>
-            <a:ext cx="570990" cy="369332"/>
+            <a:ext cx="554960" cy="369332"/>
           </a:xfrm>
           <a:prstGeom prst="rect">
             <a:avLst/>
@@ -10092,7 +10829,7 @@
           <a:lstStyle/>
           <a:p>
             <a:r>
-              <a:rPr lang="en-IN" dirty="0">
+              <a:rPr lang="en-US">
                 <a:solidFill>
                   <a:schemeClr val="accent6">
                     <a:lumMod val="60000"/>
@@ -10100,17 +10837,36 @@
                   </a:schemeClr>
                 </a:solidFill>
               </a:rPr>
-              <a:t>ship</a:t>
-            </a:r>
+              <a:t>r</a:t>
+            </a:r>
+            <a:r>
+              <a:rPr lang="en-IN">
+                <a:solidFill>
+                  <a:schemeClr val="accent6">
+                    <a:lumMod val="60000"/>
+                    <a:lumOff val="40000"/>
+                  </a:schemeClr>
+                </a:solidFill>
+              </a:rPr>
+              <a:t>ide</a:t>
+            </a:r>
+            <a:endParaRPr lang="en-IN" dirty="0">
+              <a:solidFill>
+                <a:schemeClr val="accent6">
+                  <a:lumMod val="60000"/>
+                  <a:lumOff val="40000"/>
+                </a:schemeClr>
+              </a:solidFill>
+            </a:endParaRPr>
           </a:p>
         </p:txBody>
       </p:sp>
       <p:sp>
         <p:nvSpPr>
-          <p:cNvPr id="12" name="TextBox 11">
+          <p:cNvPr id="10" name="TextBox 9">
             <a:extLst>
               <a:ext uri="{FF2B5EF4-FFF2-40B4-BE49-F238E27FC236}">
-                <a16:creationId xmlns:a16="http://schemas.microsoft.com/office/drawing/2014/main" id="{DDAB4BB3-8C78-03A7-1543-D0E5A919FC7D}"/>
+                <a16:creationId xmlns:a16="http://schemas.microsoft.com/office/drawing/2014/main" id="{2BBD7304-ED4B-A616-1B1C-6185C84A4FA7}"/>
               </a:ext>
             </a:extLst>
           </p:cNvPr>
@@ -10149,10 +10905,10 @@
       </p:sp>
       <p:sp>
         <p:nvSpPr>
-          <p:cNvPr id="14" name="TextBox 13">
+          <p:cNvPr id="11" name="TextBox 10">
             <a:extLst>
               <a:ext uri="{FF2B5EF4-FFF2-40B4-BE49-F238E27FC236}">
-                <a16:creationId xmlns:a16="http://schemas.microsoft.com/office/drawing/2014/main" id="{CD7D8776-D6A2-D349-4D0D-5525D55438BE}"/>
+                <a16:creationId xmlns:a16="http://schemas.microsoft.com/office/drawing/2014/main" id="{6FF98700-AF00-C186-44EC-31DB3B4C22C9}"/>
               </a:ext>
             </a:extLst>
           </p:cNvPr>
@@ -10162,7 +10918,7 @@
         <p:spPr>
           <a:xfrm>
             <a:off x="7550231" y="2301059"/>
-            <a:ext cx="752129" cy="369332"/>
+            <a:ext cx="481029" cy="369332"/>
           </a:xfrm>
           <a:prstGeom prst="rect">
             <a:avLst/>
@@ -10176,7 +10932,7 @@
           <a:lstStyle/>
           <a:p>
             <a:r>
-              <a:rPr lang="en-IN" dirty="0">
+              <a:rPr lang="en-US" b="1" i="1" u="sng">
                 <a:solidFill>
                   <a:schemeClr val="accent6">
                     <a:lumMod val="60000"/>
@@ -10184,17 +10940,36 @@
                   </a:schemeClr>
                 </a:solidFill>
               </a:rPr>
-              <a:t>ocean</a:t>
-            </a:r>
+              <a:t>c</a:t>
+            </a:r>
+            <a:r>
+              <a:rPr lang="en-IN" b="1" i="1" u="sng">
+                <a:solidFill>
+                  <a:schemeClr val="accent6">
+                    <a:lumMod val="60000"/>
+                    <a:lumOff val="40000"/>
+                  </a:schemeClr>
+                </a:solidFill>
+              </a:rPr>
+              <a:t>ar</a:t>
+            </a:r>
+            <a:endParaRPr lang="en-IN" b="1" i="1" u="sng" dirty="0">
+              <a:solidFill>
+                <a:schemeClr val="accent6">
+                  <a:lumMod val="60000"/>
+                  <a:lumOff val="40000"/>
+                </a:schemeClr>
+              </a:solidFill>
+            </a:endParaRPr>
           </a:p>
         </p:txBody>
       </p:sp>
       <p:sp>
         <p:nvSpPr>
-          <p:cNvPr id="16" name="TextBox 15">
+          <p:cNvPr id="12" name="TextBox 11">
             <a:extLst>
               <a:ext uri="{FF2B5EF4-FFF2-40B4-BE49-F238E27FC236}">
-                <a16:creationId xmlns:a16="http://schemas.microsoft.com/office/drawing/2014/main" id="{2EDB928D-9CDC-62C5-3E26-C7A0E5CA5A50}"/>
+                <a16:creationId xmlns:a16="http://schemas.microsoft.com/office/drawing/2014/main" id="{A8342D60-533F-8F22-D01D-2487E8BAAEA6}"/>
               </a:ext>
             </a:extLst>
           </p:cNvPr>
@@ -10233,10 +11008,10 @@
       </p:sp>
       <p:sp>
         <p:nvSpPr>
-          <p:cNvPr id="18" name="TextBox 17">
+          <p:cNvPr id="13" name="TextBox 12">
             <a:extLst>
               <a:ext uri="{FF2B5EF4-FFF2-40B4-BE49-F238E27FC236}">
-                <a16:creationId xmlns:a16="http://schemas.microsoft.com/office/drawing/2014/main" id="{D3739D28-4A2F-99AF-C455-DBFECD73FDC4}"/>
+                <a16:creationId xmlns:a16="http://schemas.microsoft.com/office/drawing/2014/main" id="{9F987EED-9913-7157-973F-9B342B065D8D}"/>
               </a:ext>
             </a:extLst>
           </p:cNvPr>
@@ -10275,10 +11050,10 @@
       </p:sp>
       <p:sp>
         <p:nvSpPr>
-          <p:cNvPr id="20" name="TextBox 19">
+          <p:cNvPr id="14" name="TextBox 13">
             <a:extLst>
               <a:ext uri="{FF2B5EF4-FFF2-40B4-BE49-F238E27FC236}">
-                <a16:creationId xmlns:a16="http://schemas.microsoft.com/office/drawing/2014/main" id="{8A0084BE-479A-48C3-665C-798737E975ED}"/>
+                <a16:creationId xmlns:a16="http://schemas.microsoft.com/office/drawing/2014/main" id="{1D3D00BB-FB09-A675-2F70-96FA639CED5C}"/>
               </a:ext>
             </a:extLst>
           </p:cNvPr>
@@ -10317,10 +11092,10 @@
       </p:sp>
       <p:sp>
         <p:nvSpPr>
-          <p:cNvPr id="22" name="TextBox 21">
+          <p:cNvPr id="15" name="TextBox 14">
             <a:extLst>
               <a:ext uri="{FF2B5EF4-FFF2-40B4-BE49-F238E27FC236}">
-                <a16:creationId xmlns:a16="http://schemas.microsoft.com/office/drawing/2014/main" id="{C1DFCEE6-6F4A-BBA3-7B2C-D8216E807797}"/>
+                <a16:creationId xmlns:a16="http://schemas.microsoft.com/office/drawing/2014/main" id="{DDD07C60-6961-D10D-4764-545528222712}"/>
               </a:ext>
             </a:extLst>
           </p:cNvPr>
@@ -10359,10 +11134,10 @@
       </p:sp>
       <p:sp>
         <p:nvSpPr>
-          <p:cNvPr id="24" name="TextBox 23">
+          <p:cNvPr id="16" name="TextBox 15">
             <a:extLst>
               <a:ext uri="{FF2B5EF4-FFF2-40B4-BE49-F238E27FC236}">
-                <a16:creationId xmlns:a16="http://schemas.microsoft.com/office/drawing/2014/main" id="{8443B669-B5FF-4637-4E74-B7A75B17897A}"/>
+                <a16:creationId xmlns:a16="http://schemas.microsoft.com/office/drawing/2014/main" id="{0916F5BE-9E07-9514-5A03-CFCF19137216}"/>
               </a:ext>
             </a:extLst>
           </p:cNvPr>
@@ -10401,10 +11176,10 @@
       </p:sp>
       <p:sp>
         <p:nvSpPr>
-          <p:cNvPr id="26" name="TextBox 25">
+          <p:cNvPr id="17" name="TextBox 16">
             <a:extLst>
               <a:ext uri="{FF2B5EF4-FFF2-40B4-BE49-F238E27FC236}">
-                <a16:creationId xmlns:a16="http://schemas.microsoft.com/office/drawing/2014/main" id="{A748E78D-E4DE-679F-AB5D-491FCE83D6FE}"/>
+                <a16:creationId xmlns:a16="http://schemas.microsoft.com/office/drawing/2014/main" id="{5FC7D826-68A4-6FFD-C2FF-86A864BBBD3A}"/>
               </a:ext>
             </a:extLst>
           </p:cNvPr>
@@ -10443,10 +11218,10 @@
       </p:sp>
       <p:grpSp>
         <p:nvGrpSpPr>
-          <p:cNvPr id="29" name="Group 28">
+          <p:cNvPr id="18" name="Group 17">
             <a:extLst>
               <a:ext uri="{FF2B5EF4-FFF2-40B4-BE49-F238E27FC236}">
-                <a16:creationId xmlns:a16="http://schemas.microsoft.com/office/drawing/2014/main" id="{850C7CF4-31C5-00F2-70BC-D3E4278B29E9}"/>
+                <a16:creationId xmlns:a16="http://schemas.microsoft.com/office/drawing/2014/main" id="{4B1C975A-F82A-A4D4-BABF-2A34823CAC2A}"/>
               </a:ext>
             </a:extLst>
           </p:cNvPr>
@@ -10465,10 +11240,10 @@
           <mc:Choice Requires="p14">
             <p:contentPart p14:bwMode="auto" r:id="rId2">
               <p14:nvContentPartPr>
-                <p14:cNvPr id="27" name="Ink 26">
+                <p14:cNvPr id="19" name="Ink 18">
                   <a:extLst>
                     <a:ext uri="{FF2B5EF4-FFF2-40B4-BE49-F238E27FC236}">
-                      <a16:creationId xmlns:a16="http://schemas.microsoft.com/office/drawing/2014/main" id="{5551B56F-614E-E261-9636-4C25E97C92D2}"/>
+                      <a16:creationId xmlns:a16="http://schemas.microsoft.com/office/drawing/2014/main" id="{A1E2595F-3B87-A067-118F-B90DB09A240C}"/>
                     </a:ext>
                   </a:extLst>
                 </p14:cNvPr>
@@ -10516,10 +11291,10 @@
           <mc:Choice Requires="p14">
             <p:contentPart p14:bwMode="auto" r:id="rId4">
               <p14:nvContentPartPr>
-                <p14:cNvPr id="28" name="Ink 27">
+                <p14:cNvPr id="20" name="Ink 19">
                   <a:extLst>
                     <a:ext uri="{FF2B5EF4-FFF2-40B4-BE49-F238E27FC236}">
-                      <a16:creationId xmlns:a16="http://schemas.microsoft.com/office/drawing/2014/main" id="{360474A4-8B7D-1B66-4E53-1022D3DC6E85}"/>
+                      <a16:creationId xmlns:a16="http://schemas.microsoft.com/office/drawing/2014/main" id="{4A0C57A1-8C1A-240C-BE29-780340228155}"/>
                     </a:ext>
                   </a:extLst>
                 </p14:cNvPr>
@@ -10566,10 +11341,10 @@
       </p:grpSp>
       <p:grpSp>
         <p:nvGrpSpPr>
-          <p:cNvPr id="30" name="Group 29">
+          <p:cNvPr id="21" name="Group 20">
             <a:extLst>
               <a:ext uri="{FF2B5EF4-FFF2-40B4-BE49-F238E27FC236}">
-                <a16:creationId xmlns:a16="http://schemas.microsoft.com/office/drawing/2014/main" id="{C23170AC-A3EA-5789-9E9B-F1AC306E0625}"/>
+                <a16:creationId xmlns:a16="http://schemas.microsoft.com/office/drawing/2014/main" id="{4BD353B9-5857-7D1E-0423-0AD7EA68F8BF}"/>
               </a:ext>
             </a:extLst>
           </p:cNvPr>
@@ -10578,7 +11353,7 @@
         </p:nvGrpSpPr>
         <p:grpSpPr>
           <a:xfrm>
-            <a:off x="8340164" y="2443547"/>
+            <a:off x="7991735" y="2409359"/>
             <a:ext cx="212040" cy="142200"/>
             <a:chOff x="2271217" y="3155988"/>
             <a:chExt cx="212040" cy="142200"/>
@@ -10588,10 +11363,10 @@
           <mc:Choice Requires="p14">
             <p:contentPart p14:bwMode="auto" r:id="rId6">
               <p14:nvContentPartPr>
-                <p14:cNvPr id="31" name="Ink 30">
+                <p14:cNvPr id="22" name="Ink 21">
                   <a:extLst>
                     <a:ext uri="{FF2B5EF4-FFF2-40B4-BE49-F238E27FC236}">
-                      <a16:creationId xmlns:a16="http://schemas.microsoft.com/office/drawing/2014/main" id="{C3DDC56D-5A16-794D-1562-7ABE75CE2ADD}"/>
+                      <a16:creationId xmlns:a16="http://schemas.microsoft.com/office/drawing/2014/main" id="{89C9DD5E-471C-A1A8-1197-C4B50CE5E166}"/>
                     </a:ext>
                   </a:extLst>
                 </p14:cNvPr>
@@ -10639,10 +11414,10 @@
           <mc:Choice Requires="p14">
             <p:contentPart p14:bwMode="auto" r:id="rId8">
               <p14:nvContentPartPr>
-                <p14:cNvPr id="32" name="Ink 31">
+                <p14:cNvPr id="23" name="Ink 22">
                   <a:extLst>
                     <a:ext uri="{FF2B5EF4-FFF2-40B4-BE49-F238E27FC236}">
-                      <a16:creationId xmlns:a16="http://schemas.microsoft.com/office/drawing/2014/main" id="{5D94AD2F-0431-80E3-6891-B2DFDDF231BD}"/>
+                      <a16:creationId xmlns:a16="http://schemas.microsoft.com/office/drawing/2014/main" id="{C0E3D346-189A-0062-59BE-0AF07D588863}"/>
                     </a:ext>
                   </a:extLst>
                 </p14:cNvPr>
@@ -10689,10 +11464,10 @@
       </p:grpSp>
       <p:grpSp>
         <p:nvGrpSpPr>
-          <p:cNvPr id="33" name="Group 32">
+          <p:cNvPr id="24" name="Group 23">
             <a:extLst>
               <a:ext uri="{FF2B5EF4-FFF2-40B4-BE49-F238E27FC236}">
-                <a16:creationId xmlns:a16="http://schemas.microsoft.com/office/drawing/2014/main" id="{EB0DE463-6059-582D-096A-E8777CC640F5}"/>
+                <a16:creationId xmlns:a16="http://schemas.microsoft.com/office/drawing/2014/main" id="{CBCEBAE6-C37C-4968-93EF-2C09F5220E84}"/>
               </a:ext>
             </a:extLst>
           </p:cNvPr>
@@ -10711,10 +11486,10 @@
           <mc:Choice Requires="p14">
             <p:contentPart p14:bwMode="auto" r:id="rId10">
               <p14:nvContentPartPr>
-                <p14:cNvPr id="34" name="Ink 33">
+                <p14:cNvPr id="25" name="Ink 24">
                   <a:extLst>
                     <a:ext uri="{FF2B5EF4-FFF2-40B4-BE49-F238E27FC236}">
-                      <a16:creationId xmlns:a16="http://schemas.microsoft.com/office/drawing/2014/main" id="{0B6472F2-DA48-13AA-AC3D-05B42C1C2E3D}"/>
+                      <a16:creationId xmlns:a16="http://schemas.microsoft.com/office/drawing/2014/main" id="{294A1EC3-1CAA-7DA0-931D-F642D9ACFE26}"/>
                     </a:ext>
                   </a:extLst>
                 </p14:cNvPr>
@@ -10762,10 +11537,10 @@
           <mc:Choice Requires="p14">
             <p:contentPart p14:bwMode="auto" r:id="rId11">
               <p14:nvContentPartPr>
-                <p14:cNvPr id="35" name="Ink 34">
+                <p14:cNvPr id="26" name="Ink 25">
                   <a:extLst>
                     <a:ext uri="{FF2B5EF4-FFF2-40B4-BE49-F238E27FC236}">
-                      <a16:creationId xmlns:a16="http://schemas.microsoft.com/office/drawing/2014/main" id="{6711981A-CCC8-07E9-48B5-2BD714A807D2}"/>
+                      <a16:creationId xmlns:a16="http://schemas.microsoft.com/office/drawing/2014/main" id="{CC95A080-280B-C123-C7DA-4B2963DA1F38}"/>
                     </a:ext>
                   </a:extLst>
                 </p14:cNvPr>
@@ -10812,10 +11587,10 @@
       </p:grpSp>
       <p:grpSp>
         <p:nvGrpSpPr>
-          <p:cNvPr id="36" name="Group 35">
+          <p:cNvPr id="27" name="Group 26">
             <a:extLst>
               <a:ext uri="{FF2B5EF4-FFF2-40B4-BE49-F238E27FC236}">
-                <a16:creationId xmlns:a16="http://schemas.microsoft.com/office/drawing/2014/main" id="{176ABF86-98E9-2F75-E5E3-871BE4FB1577}"/>
+                <a16:creationId xmlns:a16="http://schemas.microsoft.com/office/drawing/2014/main" id="{9C1D5D42-934E-0AA4-5CFB-401ED7B54226}"/>
               </a:ext>
             </a:extLst>
           </p:cNvPr>
@@ -10834,10 +11609,10 @@
           <mc:Choice Requires="p14">
             <p:contentPart p14:bwMode="auto" r:id="rId12">
               <p14:nvContentPartPr>
-                <p14:cNvPr id="37" name="Ink 36">
+                <p14:cNvPr id="28" name="Ink 27">
                   <a:extLst>
                     <a:ext uri="{FF2B5EF4-FFF2-40B4-BE49-F238E27FC236}">
-                      <a16:creationId xmlns:a16="http://schemas.microsoft.com/office/drawing/2014/main" id="{7ABFCA3D-014D-0CFE-F33A-2491B6073986}"/>
+                      <a16:creationId xmlns:a16="http://schemas.microsoft.com/office/drawing/2014/main" id="{4CF1652B-9354-5546-42ED-6E777E8B42E1}"/>
                     </a:ext>
                   </a:extLst>
                 </p14:cNvPr>
@@ -10885,10 +11660,10 @@
           <mc:Choice Requires="p14">
             <p:contentPart p14:bwMode="auto" r:id="rId13">
               <p14:nvContentPartPr>
-                <p14:cNvPr id="38" name="Ink 37">
+                <p14:cNvPr id="29" name="Ink 28">
                   <a:extLst>
                     <a:ext uri="{FF2B5EF4-FFF2-40B4-BE49-F238E27FC236}">
-                      <a16:creationId xmlns:a16="http://schemas.microsoft.com/office/drawing/2014/main" id="{17FC5ABE-B14F-8293-94F0-F71D9D23746D}"/>
+                      <a16:creationId xmlns:a16="http://schemas.microsoft.com/office/drawing/2014/main" id="{263D367C-AB3B-0291-0235-656A68B6CA13}"/>
                     </a:ext>
                   </a:extLst>
                 </p14:cNvPr>
@@ -10935,10 +11710,10 @@
       </p:grpSp>
       <p:grpSp>
         <p:nvGrpSpPr>
-          <p:cNvPr id="39" name="Group 38">
+          <p:cNvPr id="30" name="Group 29">
             <a:extLst>
               <a:ext uri="{FF2B5EF4-FFF2-40B4-BE49-F238E27FC236}">
-                <a16:creationId xmlns:a16="http://schemas.microsoft.com/office/drawing/2014/main" id="{8391CEEB-916C-573A-F16B-2269A786BF8F}"/>
+                <a16:creationId xmlns:a16="http://schemas.microsoft.com/office/drawing/2014/main" id="{62E80541-86D5-61E9-9D1E-AEB3E2C46DA2}"/>
               </a:ext>
             </a:extLst>
           </p:cNvPr>
@@ -10957,10 +11732,10 @@
           <mc:Choice Requires="p14">
             <p:contentPart p14:bwMode="auto" r:id="rId14">
               <p14:nvContentPartPr>
-                <p14:cNvPr id="40" name="Ink 39">
+                <p14:cNvPr id="31" name="Ink 30">
                   <a:extLst>
                     <a:ext uri="{FF2B5EF4-FFF2-40B4-BE49-F238E27FC236}">
-                      <a16:creationId xmlns:a16="http://schemas.microsoft.com/office/drawing/2014/main" id="{A27653D3-790D-C5C7-A24E-048244031EC9}"/>
+                      <a16:creationId xmlns:a16="http://schemas.microsoft.com/office/drawing/2014/main" id="{C85BD00C-BE19-BDB0-9A7D-9E49117A4005}"/>
                     </a:ext>
                   </a:extLst>
                 </p14:cNvPr>
@@ -11008,10 +11783,10 @@
           <mc:Choice Requires="p14">
             <p:contentPart p14:bwMode="auto" r:id="rId15">
               <p14:nvContentPartPr>
-                <p14:cNvPr id="41" name="Ink 40">
+                <p14:cNvPr id="32" name="Ink 31">
                   <a:extLst>
                     <a:ext uri="{FF2B5EF4-FFF2-40B4-BE49-F238E27FC236}">
-                      <a16:creationId xmlns:a16="http://schemas.microsoft.com/office/drawing/2014/main" id="{932FE137-2EDD-E222-698A-93A37EE1A8F7}"/>
+                      <a16:creationId xmlns:a16="http://schemas.microsoft.com/office/drawing/2014/main" id="{9FE0D28D-14E7-67D8-7A01-1847EA79B529}"/>
                     </a:ext>
                   </a:extLst>
                 </p14:cNvPr>
@@ -11058,10 +11833,10 @@
       </p:grpSp>
       <p:grpSp>
         <p:nvGrpSpPr>
-          <p:cNvPr id="42" name="Group 41">
+          <p:cNvPr id="33" name="Group 32">
             <a:extLst>
               <a:ext uri="{FF2B5EF4-FFF2-40B4-BE49-F238E27FC236}">
-                <a16:creationId xmlns:a16="http://schemas.microsoft.com/office/drawing/2014/main" id="{26986ED4-AA63-004B-A32F-991D5EC2C0C6}"/>
+                <a16:creationId xmlns:a16="http://schemas.microsoft.com/office/drawing/2014/main" id="{456995F9-07AB-EEBF-EE2A-F1AE3EA5678E}"/>
               </a:ext>
             </a:extLst>
           </p:cNvPr>
@@ -11080,10 +11855,10 @@
           <mc:Choice Requires="p14">
             <p:contentPart p14:bwMode="auto" r:id="rId16">
               <p14:nvContentPartPr>
-                <p14:cNvPr id="43" name="Ink 42">
+                <p14:cNvPr id="34" name="Ink 33">
                   <a:extLst>
                     <a:ext uri="{FF2B5EF4-FFF2-40B4-BE49-F238E27FC236}">
-                      <a16:creationId xmlns:a16="http://schemas.microsoft.com/office/drawing/2014/main" id="{DF3EA40E-24B5-85C5-D189-AB2EC79674C6}"/>
+                      <a16:creationId xmlns:a16="http://schemas.microsoft.com/office/drawing/2014/main" id="{E4EE7FE6-7008-378F-A021-7F5A723A8A3D}"/>
                     </a:ext>
                   </a:extLst>
                 </p14:cNvPr>
@@ -11131,10 +11906,10 @@
           <mc:Choice Requires="p14">
             <p:contentPart p14:bwMode="auto" r:id="rId17">
               <p14:nvContentPartPr>
-                <p14:cNvPr id="44" name="Ink 43">
+                <p14:cNvPr id="35" name="Ink 34">
                   <a:extLst>
                     <a:ext uri="{FF2B5EF4-FFF2-40B4-BE49-F238E27FC236}">
-                      <a16:creationId xmlns:a16="http://schemas.microsoft.com/office/drawing/2014/main" id="{8ACEC57B-3B87-A6B4-A2B9-B8A8B4298F02}"/>
+                      <a16:creationId xmlns:a16="http://schemas.microsoft.com/office/drawing/2014/main" id="{74AC787B-D24C-6F66-FC71-F1BC7CAC795D}"/>
                     </a:ext>
                   </a:extLst>
                 </p14:cNvPr>
@@ -11181,10 +11956,10 @@
       </p:grpSp>
       <p:grpSp>
         <p:nvGrpSpPr>
-          <p:cNvPr id="45" name="Group 44">
+          <p:cNvPr id="36" name="Group 35">
             <a:extLst>
               <a:ext uri="{FF2B5EF4-FFF2-40B4-BE49-F238E27FC236}">
-                <a16:creationId xmlns:a16="http://schemas.microsoft.com/office/drawing/2014/main" id="{FD86C2B0-B41B-C36F-E6C2-A095E03F810B}"/>
+                <a16:creationId xmlns:a16="http://schemas.microsoft.com/office/drawing/2014/main" id="{FCFB9FF6-4B64-955D-2D0B-28CFB88B1A15}"/>
               </a:ext>
             </a:extLst>
           </p:cNvPr>
@@ -11203,10 +11978,10 @@
           <mc:Choice Requires="p14">
             <p:contentPart p14:bwMode="auto" r:id="rId18">
               <p14:nvContentPartPr>
-                <p14:cNvPr id="46" name="Ink 45">
+                <p14:cNvPr id="37" name="Ink 36">
                   <a:extLst>
                     <a:ext uri="{FF2B5EF4-FFF2-40B4-BE49-F238E27FC236}">
-                      <a16:creationId xmlns:a16="http://schemas.microsoft.com/office/drawing/2014/main" id="{E0DDB26F-8D3F-47A0-2746-73DB9031D78B}"/>
+                      <a16:creationId xmlns:a16="http://schemas.microsoft.com/office/drawing/2014/main" id="{0A5F6C15-0101-9FBD-4CD9-809AD3B06F90}"/>
                     </a:ext>
                   </a:extLst>
                 </p14:cNvPr>
@@ -11254,10 +12029,10 @@
           <mc:Choice Requires="p14">
             <p:contentPart p14:bwMode="auto" r:id="rId19">
               <p14:nvContentPartPr>
-                <p14:cNvPr id="47" name="Ink 46">
+                <p14:cNvPr id="38" name="Ink 37">
                   <a:extLst>
                     <a:ext uri="{FF2B5EF4-FFF2-40B4-BE49-F238E27FC236}">
-                      <a16:creationId xmlns:a16="http://schemas.microsoft.com/office/drawing/2014/main" id="{6450F7A1-F47D-DBAF-B1FF-0077AD02915C}"/>
+                      <a16:creationId xmlns:a16="http://schemas.microsoft.com/office/drawing/2014/main" id="{7D3BA2CA-6C11-A370-58D3-701B80B5E44E}"/>
                     </a:ext>
                   </a:extLst>
                 </p14:cNvPr>
@@ -11304,10 +12079,10 @@
       </p:grpSp>
       <p:grpSp>
         <p:nvGrpSpPr>
-          <p:cNvPr id="48" name="Group 47">
+          <p:cNvPr id="39" name="Group 38">
             <a:extLst>
               <a:ext uri="{FF2B5EF4-FFF2-40B4-BE49-F238E27FC236}">
-                <a16:creationId xmlns:a16="http://schemas.microsoft.com/office/drawing/2014/main" id="{620AC6E3-7E1D-B527-BAEF-6962903388CF}"/>
+                <a16:creationId xmlns:a16="http://schemas.microsoft.com/office/drawing/2014/main" id="{496F713F-46FD-B4F1-2178-90AF55AD0065}"/>
               </a:ext>
             </a:extLst>
           </p:cNvPr>
@@ -11326,10 +12101,10 @@
           <mc:Choice Requires="p14">
             <p:contentPart p14:bwMode="auto" r:id="rId20">
               <p14:nvContentPartPr>
-                <p14:cNvPr id="49" name="Ink 48">
+                <p14:cNvPr id="40" name="Ink 39">
                   <a:extLst>
                     <a:ext uri="{FF2B5EF4-FFF2-40B4-BE49-F238E27FC236}">
-                      <a16:creationId xmlns:a16="http://schemas.microsoft.com/office/drawing/2014/main" id="{4670658A-99C1-270D-083A-19D688AEB855}"/>
+                      <a16:creationId xmlns:a16="http://schemas.microsoft.com/office/drawing/2014/main" id="{9A964B35-F415-FCD7-A0AA-6460303A5790}"/>
                     </a:ext>
                   </a:extLst>
                 </p14:cNvPr>
@@ -11377,10 +12152,10 @@
           <mc:Choice Requires="p14">
             <p:contentPart p14:bwMode="auto" r:id="rId22">
               <p14:nvContentPartPr>
-                <p14:cNvPr id="50" name="Ink 49">
+                <p14:cNvPr id="41" name="Ink 40">
                   <a:extLst>
                     <a:ext uri="{FF2B5EF4-FFF2-40B4-BE49-F238E27FC236}">
-                      <a16:creationId xmlns:a16="http://schemas.microsoft.com/office/drawing/2014/main" id="{9123E8FE-A63B-57B3-C471-C58F3D8A200F}"/>
+                      <a16:creationId xmlns:a16="http://schemas.microsoft.com/office/drawing/2014/main" id="{C21B2CBD-46E6-86F2-F3E5-61940E1BA18E}"/>
                     </a:ext>
                   </a:extLst>
                 </p14:cNvPr>
@@ -11427,10 +12202,10 @@
       </p:grpSp>
       <p:grpSp>
         <p:nvGrpSpPr>
-          <p:cNvPr id="51" name="Group 50">
+          <p:cNvPr id="42" name="Group 41">
             <a:extLst>
               <a:ext uri="{FF2B5EF4-FFF2-40B4-BE49-F238E27FC236}">
-                <a16:creationId xmlns:a16="http://schemas.microsoft.com/office/drawing/2014/main" id="{37EF02C7-1145-6929-5088-A4ACDAC276A7}"/>
+                <a16:creationId xmlns:a16="http://schemas.microsoft.com/office/drawing/2014/main" id="{E0AA362B-90B3-052E-A011-4C6EE67EEF34}"/>
               </a:ext>
             </a:extLst>
           </p:cNvPr>
@@ -11449,10 +12224,10 @@
           <mc:Choice Requires="p14">
             <p:contentPart p14:bwMode="auto" r:id="rId24">
               <p14:nvContentPartPr>
-                <p14:cNvPr id="52" name="Ink 51">
+                <p14:cNvPr id="43" name="Ink 42">
                   <a:extLst>
                     <a:ext uri="{FF2B5EF4-FFF2-40B4-BE49-F238E27FC236}">
-                      <a16:creationId xmlns:a16="http://schemas.microsoft.com/office/drawing/2014/main" id="{FE733208-E177-0DF5-A15A-EB71783BDE94}"/>
+                      <a16:creationId xmlns:a16="http://schemas.microsoft.com/office/drawing/2014/main" id="{002ABC96-D09C-0831-8DEE-5EA966A7F2AB}"/>
                     </a:ext>
                   </a:extLst>
                 </p14:cNvPr>
@@ -11500,10 +12275,10 @@
           <mc:Choice Requires="p14">
             <p:contentPart p14:bwMode="auto" r:id="rId26">
               <p14:nvContentPartPr>
-                <p14:cNvPr id="53" name="Ink 52">
+                <p14:cNvPr id="44" name="Ink 43">
                   <a:extLst>
                     <a:ext uri="{FF2B5EF4-FFF2-40B4-BE49-F238E27FC236}">
-                      <a16:creationId xmlns:a16="http://schemas.microsoft.com/office/drawing/2014/main" id="{6AE695FA-A3F9-D36A-01BD-FA40E74D4D7F}"/>
+                      <a16:creationId xmlns:a16="http://schemas.microsoft.com/office/drawing/2014/main" id="{BFEC49A3-5BB0-3CF7-B096-CA09ED15F279}"/>
                     </a:ext>
                   </a:extLst>
                 </p14:cNvPr>
@@ -11550,10 +12325,10 @@
       </p:grpSp>
       <p:grpSp>
         <p:nvGrpSpPr>
-          <p:cNvPr id="54" name="Group 53">
+          <p:cNvPr id="45" name="Group 44">
             <a:extLst>
               <a:ext uri="{FF2B5EF4-FFF2-40B4-BE49-F238E27FC236}">
-                <a16:creationId xmlns:a16="http://schemas.microsoft.com/office/drawing/2014/main" id="{B8E5588D-5240-618F-7DA3-10D4783F188F}"/>
+                <a16:creationId xmlns:a16="http://schemas.microsoft.com/office/drawing/2014/main" id="{6D6DFED0-7516-3DC1-435F-55FF7F860A36}"/>
               </a:ext>
             </a:extLst>
           </p:cNvPr>
@@ -11572,10 +12347,10 @@
           <mc:Choice Requires="p14">
             <p:contentPart p14:bwMode="auto" r:id="rId28">
               <p14:nvContentPartPr>
-                <p14:cNvPr id="55" name="Ink 54">
+                <p14:cNvPr id="46" name="Ink 45">
                   <a:extLst>
                     <a:ext uri="{FF2B5EF4-FFF2-40B4-BE49-F238E27FC236}">
-                      <a16:creationId xmlns:a16="http://schemas.microsoft.com/office/drawing/2014/main" id="{B0424CEC-2277-2871-AB3D-1AF231607AA6}"/>
+                      <a16:creationId xmlns:a16="http://schemas.microsoft.com/office/drawing/2014/main" id="{EF470DC9-953B-D24B-8AB0-96D5EFDB29B6}"/>
                     </a:ext>
                   </a:extLst>
                 </p14:cNvPr>
@@ -11623,10 +12398,10 @@
           <mc:Choice Requires="p14">
             <p:contentPart p14:bwMode="auto" r:id="rId29">
               <p14:nvContentPartPr>
-                <p14:cNvPr id="56" name="Ink 55">
+                <p14:cNvPr id="47" name="Ink 46">
                   <a:extLst>
                     <a:ext uri="{FF2B5EF4-FFF2-40B4-BE49-F238E27FC236}">
-                      <a16:creationId xmlns:a16="http://schemas.microsoft.com/office/drawing/2014/main" id="{D03EB506-1948-2A44-967B-2484F1F53FEF}"/>
+                      <a16:creationId xmlns:a16="http://schemas.microsoft.com/office/drawing/2014/main" id="{66285CD4-D4C4-7AAF-9CB7-578C82CFCE86}"/>
                     </a:ext>
                   </a:extLst>
                 </p14:cNvPr>
@@ -11673,10 +12448,10 @@
       </p:grpSp>
       <p:grpSp>
         <p:nvGrpSpPr>
-          <p:cNvPr id="57" name="Group 56">
+          <p:cNvPr id="48" name="Group 47">
             <a:extLst>
               <a:ext uri="{FF2B5EF4-FFF2-40B4-BE49-F238E27FC236}">
-                <a16:creationId xmlns:a16="http://schemas.microsoft.com/office/drawing/2014/main" id="{C0F2E804-CECC-E713-AEA3-8530EB65E576}"/>
+                <a16:creationId xmlns:a16="http://schemas.microsoft.com/office/drawing/2014/main" id="{AA6C537A-86C2-EC4C-7902-898F74D0698A}"/>
               </a:ext>
             </a:extLst>
           </p:cNvPr>
@@ -11695,10 +12470,10 @@
           <mc:Choice Requires="p14">
             <p:contentPart p14:bwMode="auto" r:id="rId30">
               <p14:nvContentPartPr>
-                <p14:cNvPr id="58" name="Ink 57">
+                <p14:cNvPr id="49" name="Ink 48">
                   <a:extLst>
                     <a:ext uri="{FF2B5EF4-FFF2-40B4-BE49-F238E27FC236}">
-                      <a16:creationId xmlns:a16="http://schemas.microsoft.com/office/drawing/2014/main" id="{E184F274-067C-4C2E-AF30-4C5B48FE32C2}"/>
+                      <a16:creationId xmlns:a16="http://schemas.microsoft.com/office/drawing/2014/main" id="{96276CA2-AFF3-EC4A-4B1B-2AB70A61AF76}"/>
                     </a:ext>
                   </a:extLst>
                 </p14:cNvPr>
@@ -11746,10 +12521,10 @@
           <mc:Choice Requires="p14">
             <p:contentPart p14:bwMode="auto" r:id="rId31">
               <p14:nvContentPartPr>
-                <p14:cNvPr id="59" name="Ink 58">
+                <p14:cNvPr id="50" name="Ink 49">
                   <a:extLst>
                     <a:ext uri="{FF2B5EF4-FFF2-40B4-BE49-F238E27FC236}">
-                      <a16:creationId xmlns:a16="http://schemas.microsoft.com/office/drawing/2014/main" id="{47908C50-437D-4EEC-EDBD-F6416A0CD29C}"/>
+                      <a16:creationId xmlns:a16="http://schemas.microsoft.com/office/drawing/2014/main" id="{91CE004A-EAC9-A196-FD0E-2935E6881A3E}"/>
                     </a:ext>
                   </a:extLst>
                 </p14:cNvPr>
@@ -11797,7 +12572,7 @@
     </p:spTree>
     <p:extLst>
       <p:ext uri="{BB962C8B-B14F-4D97-AF65-F5344CB8AC3E}">
-        <p14:creationId xmlns:p14="http://schemas.microsoft.com/office/powerpoint/2010/main" val="2300712595"/>
+        <p14:creationId xmlns:p14="http://schemas.microsoft.com/office/powerpoint/2010/main" val="3555340216"/>
       </p:ext>
     </p:extLst>
   </p:cSld>
@@ -13715,7 +14490,7 @@
         </p:nvSpPr>
         <p:spPr>
           <a:xfrm>
-            <a:off x="87816" y="304056"/>
+            <a:off x="1898328" y="2891808"/>
             <a:ext cx="7946136" cy="830997"/>
           </a:xfrm>
           <a:prstGeom prst="rect">
@@ -13729,8 +14504,9 @@
           </a:bodyPr>
           <a:lstStyle/>
           <a:p>
-            <a:r>
-              <a:rPr lang="en-US" sz="2400" b="1" dirty="0">
+            <a:pPr algn="ctr"/>
+            <a:r>
+              <a:rPr lang="en-US" sz="4800" b="1">
                 <a:solidFill>
                   <a:schemeClr val="accent6">
                     <a:lumMod val="60000"/>
@@ -13738,14 +14514,98 @@
                   </a:schemeClr>
                 </a:solidFill>
               </a:rPr>
-              <a:t>Some Use Cases of Vector DB:</a:t>
-            </a:r>
-          </a:p>
+              <a:t>Applications of Vector DB</a:t>
+            </a:r>
+            <a:endParaRPr lang="en-US" sz="4800" dirty="0">
+              <a:solidFill>
+                <a:schemeClr val="accent6">
+                  <a:lumMod val="60000"/>
+                  <a:lumOff val="40000"/>
+                </a:schemeClr>
+              </a:solidFill>
+            </a:endParaRPr>
+          </a:p>
+        </p:txBody>
+      </p:sp>
+    </p:spTree>
+    <p:extLst>
+      <p:ext uri="{BB962C8B-B14F-4D97-AF65-F5344CB8AC3E}">
+        <p14:creationId xmlns:p14="http://schemas.microsoft.com/office/powerpoint/2010/main" val="2672875228"/>
+      </p:ext>
+    </p:extLst>
+  </p:cSld>
+  <p:clrMapOvr>
+    <a:masterClrMapping/>
+  </p:clrMapOvr>
+</p:sld>
+</file>
+
+<file path=ppt/slides/slide8.xml><?xml version="1.0" encoding="utf-8"?>
+<p:sld xmlns:a="http://schemas.openxmlformats.org/drawingml/2006/main" xmlns:r="http://schemas.openxmlformats.org/officeDocument/2006/relationships" xmlns:p="http://schemas.openxmlformats.org/presentationml/2006/main">
+  <p:cSld>
+    <p:spTree>
+      <p:nvGrpSpPr>
+        <p:cNvPr id="1" name="">
+          <a:extLst>
+            <a:ext uri="{FF2B5EF4-FFF2-40B4-BE49-F238E27FC236}">
+              <a16:creationId xmlns:a16="http://schemas.microsoft.com/office/drawing/2014/main" id="{B1E7E25E-1726-7E53-0A3A-D3EE3A226242}"/>
+            </a:ext>
+          </a:extLst>
+        </p:cNvPr>
+        <p:cNvGrpSpPr/>
+        <p:nvPr/>
+      </p:nvGrpSpPr>
+      <p:grpSpPr>
+        <a:xfrm>
+          <a:off x="0" y="0"/>
+          <a:ext cx="0" cy="0"/>
+          <a:chOff x="0" y="0"/>
+          <a:chExt cx="0" cy="0"/>
+        </a:xfrm>
+      </p:grpSpPr>
+      <p:sp>
+        <p:nvSpPr>
+          <p:cNvPr id="9" name="TextBox 8">
+            <a:extLst>
+              <a:ext uri="{FF2B5EF4-FFF2-40B4-BE49-F238E27FC236}">
+                <a16:creationId xmlns:a16="http://schemas.microsoft.com/office/drawing/2014/main" id="{FE6DF98C-7329-840E-FAAF-7452CB25E332}"/>
+              </a:ext>
+            </a:extLst>
+          </p:cNvPr>
+          <p:cNvSpPr txBox="1"/>
+          <p:nvPr/>
+        </p:nvSpPr>
+        <p:spPr>
+          <a:xfrm>
+            <a:off x="87816" y="304056"/>
+            <a:ext cx="7946136" cy="461665"/>
+          </a:xfrm>
+          <a:prstGeom prst="rect">
+            <a:avLst/>
+          </a:prstGeom>
+          <a:noFill/>
+        </p:spPr>
+        <p:txBody>
+          <a:bodyPr wrap="square">
+            <a:spAutoFit/>
+          </a:bodyPr>
+          <a:lstStyle/>
           <a:p>
             <a:pPr marL="342900" indent="-342900">
               <a:buFont typeface="Arial" panose="020B0604020202020204" pitchFamily="34" charset="0"/>
               <a:buChar char="•"/>
             </a:pPr>
+            <a:r>
+              <a:rPr lang="en-US" sz="2400">
+                <a:solidFill>
+                  <a:schemeClr val="accent6">
+                    <a:lumMod val="60000"/>
+                    <a:lumOff val="40000"/>
+                  </a:schemeClr>
+                </a:solidFill>
+              </a:rPr>
+              <a:t>Chatbots </a:t>
+            </a:r>
             <a:r>
               <a:rPr lang="en-US" sz="2400" dirty="0">
                 <a:solidFill>
@@ -13755,7 +14615,7 @@
                   </a:schemeClr>
                 </a:solidFill>
               </a:rPr>
-              <a:t>Chatbots (like e-commerce website)</a:t>
+              <a:t>(like e-commerce website)</a:t>
             </a:r>
           </a:p>
         </p:txBody>
@@ -13765,7 +14625,7 @@
           <p:cNvPr id="6" name="Picture 5">
             <a:extLst>
               <a:ext uri="{FF2B5EF4-FFF2-40B4-BE49-F238E27FC236}">
-                <a16:creationId xmlns:a16="http://schemas.microsoft.com/office/drawing/2014/main" id="{4957CB72-F553-C0B9-B763-A63A09A6BFC2}"/>
+                <a16:creationId xmlns:a16="http://schemas.microsoft.com/office/drawing/2014/main" id="{5DBE08A0-0517-5BFD-AA81-3B819998253B}"/>
               </a:ext>
             </a:extLst>
           </p:cNvPr>
@@ -13795,7 +14655,7 @@
           <p:cNvPr id="3" name="Picture 2">
             <a:extLst>
               <a:ext uri="{FF2B5EF4-FFF2-40B4-BE49-F238E27FC236}">
-                <a16:creationId xmlns:a16="http://schemas.microsoft.com/office/drawing/2014/main" id="{C60D255A-2629-252B-53E0-895E2DAA3DA1}"/>
+                <a16:creationId xmlns:a16="http://schemas.microsoft.com/office/drawing/2014/main" id="{FC5F0D8C-B215-178E-092B-4FDE0A51E4DB}"/>
               </a:ext>
             </a:extLst>
           </p:cNvPr>
@@ -13820,14 +14680,14 @@
           </a:prstGeom>
         </p:spPr>
       </p:pic>
-      <mc:AlternateContent xmlns:mc="http://schemas.openxmlformats.org/markup-compatibility/2006" xmlns:p14="http://schemas.microsoft.com/office/powerpoint/2010/main">
-        <mc:Choice Requires="p14">
+      <mc:AlternateContent xmlns:mc="http://schemas.openxmlformats.org/markup-compatibility/2006">
+        <mc:Choice xmlns:p14="http://schemas.microsoft.com/office/powerpoint/2010/main" Requires="p14">
           <p:contentPart p14:bwMode="auto" r:id="rId4">
             <p14:nvContentPartPr>
               <p14:cNvPr id="4" name="Ink 3">
                 <a:extLst>
                   <a:ext uri="{FF2B5EF4-FFF2-40B4-BE49-F238E27FC236}">
-                    <a16:creationId xmlns:a16="http://schemas.microsoft.com/office/drawing/2014/main" id="{016CD4CA-E9FE-E3D0-699A-A56FBF4152CF}"/>
+                    <a16:creationId xmlns:a16="http://schemas.microsoft.com/office/drawing/2014/main" id="{A0655354-D617-7060-FE1B-E23CB3901876}"/>
                   </a:ext>
                 </a:extLst>
               </p14:cNvPr>
@@ -13840,13 +14700,13 @@
             </p14:xfrm>
           </p:contentPart>
         </mc:Choice>
-        <mc:Fallback xmlns="">
+        <mc:Fallback>
           <p:pic>
             <p:nvPicPr>
               <p:cNvPr id="4" name="Ink 3">
                 <a:extLst>
                   <a:ext uri="{FF2B5EF4-FFF2-40B4-BE49-F238E27FC236}">
-                    <a16:creationId xmlns:a16="http://schemas.microsoft.com/office/drawing/2014/main" id="{016CD4CA-E9FE-E3D0-699A-A56FBF4152CF}"/>
+                    <a16:creationId xmlns:a16="http://schemas.microsoft.com/office/drawing/2014/main" id="{A0655354-D617-7060-FE1B-E23CB3901876}"/>
                   </a:ext>
                 </a:extLst>
               </p:cNvPr>
@@ -13861,7 +14721,7 @@
             </p:blipFill>
             <p:spPr>
               <a:xfrm>
-                <a:off x="9171864" y="286416"/>
+                <a:off x="9171504" y="286056"/>
                 <a:ext cx="329760" cy="242280"/>
               </a:xfrm>
               <a:prstGeom prst="rect">
@@ -13871,14 +14731,14 @@
           </p:pic>
         </mc:Fallback>
       </mc:AlternateContent>
-      <mc:AlternateContent xmlns:mc="http://schemas.openxmlformats.org/markup-compatibility/2006" xmlns:p14="http://schemas.microsoft.com/office/powerpoint/2010/main">
-        <mc:Choice Requires="p14">
+      <mc:AlternateContent xmlns:mc="http://schemas.openxmlformats.org/markup-compatibility/2006">
+        <mc:Choice xmlns:p14="http://schemas.microsoft.com/office/powerpoint/2010/main" Requires="p14">
           <p:contentPart p14:bwMode="auto" r:id="rId6">
             <p14:nvContentPartPr>
               <p14:cNvPr id="5" name="Ink 4">
                 <a:extLst>
                   <a:ext uri="{FF2B5EF4-FFF2-40B4-BE49-F238E27FC236}">
-                    <a16:creationId xmlns:a16="http://schemas.microsoft.com/office/drawing/2014/main" id="{2AE7A7B7-74EA-8165-4254-07B354CDC99C}"/>
+                    <a16:creationId xmlns:a16="http://schemas.microsoft.com/office/drawing/2014/main" id="{0604C3B3-1425-DF31-FFC3-D9E407938F02}"/>
                   </a:ext>
                 </a:extLst>
               </p14:cNvPr>
@@ -13891,13 +14751,13 @@
             </p14:xfrm>
           </p:contentPart>
         </mc:Choice>
-        <mc:Fallback xmlns="">
+        <mc:Fallback>
           <p:pic>
             <p:nvPicPr>
               <p:cNvPr id="5" name="Ink 4">
                 <a:extLst>
                   <a:ext uri="{FF2B5EF4-FFF2-40B4-BE49-F238E27FC236}">
-                    <a16:creationId xmlns:a16="http://schemas.microsoft.com/office/drawing/2014/main" id="{2AE7A7B7-74EA-8165-4254-07B354CDC99C}"/>
+                    <a16:creationId xmlns:a16="http://schemas.microsoft.com/office/drawing/2014/main" id="{0604C3B3-1425-DF31-FFC3-D9E407938F02}"/>
                   </a:ext>
                 </a:extLst>
               </p:cNvPr>
@@ -13912,8 +14772,8 @@
             </p:blipFill>
             <p:spPr>
               <a:xfrm>
-                <a:off x="11274984" y="584856"/>
-                <a:ext cx="617040" cy="73440"/>
+                <a:off x="11274624" y="584323"/>
+                <a:ext cx="617040" cy="73783"/>
               </a:xfrm>
               <a:prstGeom prst="rect">
                 <a:avLst/>
@@ -13922,14 +14782,14 @@
           </p:pic>
         </mc:Fallback>
       </mc:AlternateContent>
-      <mc:AlternateContent xmlns:mc="http://schemas.openxmlformats.org/markup-compatibility/2006" xmlns:p14="http://schemas.microsoft.com/office/powerpoint/2010/main">
-        <mc:Choice Requires="p14">
+      <mc:AlternateContent xmlns:mc="http://schemas.openxmlformats.org/markup-compatibility/2006">
+        <mc:Choice xmlns:p14="http://schemas.microsoft.com/office/powerpoint/2010/main" Requires="p14">
           <p:contentPart p14:bwMode="auto" r:id="rId8">
             <p14:nvContentPartPr>
               <p14:cNvPr id="7" name="Ink 6">
                 <a:extLst>
                   <a:ext uri="{FF2B5EF4-FFF2-40B4-BE49-F238E27FC236}">
-                    <a16:creationId xmlns:a16="http://schemas.microsoft.com/office/drawing/2014/main" id="{5874A6B1-E784-23E9-5EE9-83A9C77E6E02}"/>
+                    <a16:creationId xmlns:a16="http://schemas.microsoft.com/office/drawing/2014/main" id="{6FD19153-01D0-DA2C-EA2F-91688C29DEBF}"/>
                   </a:ext>
                 </a:extLst>
               </p14:cNvPr>
@@ -13942,13 +14802,13 @@
             </p14:xfrm>
           </p:contentPart>
         </mc:Choice>
-        <mc:Fallback xmlns="">
+        <mc:Fallback>
           <p:pic>
             <p:nvPicPr>
               <p:cNvPr id="7" name="Ink 6">
                 <a:extLst>
                   <a:ext uri="{FF2B5EF4-FFF2-40B4-BE49-F238E27FC236}">
-                    <a16:creationId xmlns:a16="http://schemas.microsoft.com/office/drawing/2014/main" id="{5874A6B1-E784-23E9-5EE9-83A9C77E6E02}"/>
+                    <a16:creationId xmlns:a16="http://schemas.microsoft.com/office/drawing/2014/main" id="{6FD19153-01D0-DA2C-EA2F-91688C29DEBF}"/>
                   </a:ext>
                 </a:extLst>
               </p:cNvPr>
@@ -13963,8 +14823,8 @@
             </p:blipFill>
             <p:spPr>
               <a:xfrm>
-                <a:off x="9711504" y="1033776"/>
-                <a:ext cx="429480" cy="36000"/>
+                <a:off x="9711128" y="1033416"/>
+                <a:ext cx="429513" cy="36000"/>
               </a:xfrm>
               <a:prstGeom prst="rect">
                 <a:avLst/>
@@ -13973,14 +14833,14 @@
           </p:pic>
         </mc:Fallback>
       </mc:AlternateContent>
-      <mc:AlternateContent xmlns:mc="http://schemas.openxmlformats.org/markup-compatibility/2006" xmlns:p14="http://schemas.microsoft.com/office/powerpoint/2010/main">
-        <mc:Choice Requires="p14">
+      <mc:AlternateContent xmlns:mc="http://schemas.openxmlformats.org/markup-compatibility/2006">
+        <mc:Choice xmlns:p14="http://schemas.microsoft.com/office/powerpoint/2010/main" Requires="p14">
           <p:contentPart p14:bwMode="auto" r:id="rId10">
             <p14:nvContentPartPr>
               <p14:cNvPr id="8" name="Ink 7">
                 <a:extLst>
                   <a:ext uri="{FF2B5EF4-FFF2-40B4-BE49-F238E27FC236}">
-                    <a16:creationId xmlns:a16="http://schemas.microsoft.com/office/drawing/2014/main" id="{B1034580-57D1-6619-2567-4084BC3ADDA9}"/>
+                    <a16:creationId xmlns:a16="http://schemas.microsoft.com/office/drawing/2014/main" id="{DEFD3563-D80F-5148-4D70-607B9DAD7C36}"/>
                   </a:ext>
                 </a:extLst>
               </p14:cNvPr>
@@ -13993,13 +14853,13 @@
             </p14:xfrm>
           </p:contentPart>
         </mc:Choice>
-        <mc:Fallback xmlns="">
+        <mc:Fallback>
           <p:pic>
             <p:nvPicPr>
               <p:cNvPr id="8" name="Ink 7">
                 <a:extLst>
                   <a:ext uri="{FF2B5EF4-FFF2-40B4-BE49-F238E27FC236}">
-                    <a16:creationId xmlns:a16="http://schemas.microsoft.com/office/drawing/2014/main" id="{B1034580-57D1-6619-2567-4084BC3ADDA9}"/>
+                    <a16:creationId xmlns:a16="http://schemas.microsoft.com/office/drawing/2014/main" id="{DEFD3563-D80F-5148-4D70-607B9DAD7C36}"/>
                   </a:ext>
                 </a:extLst>
               </p:cNvPr>
@@ -14024,10 +14884,96 @@
           </p:pic>
         </mc:Fallback>
       </mc:AlternateContent>
+      <p:sp>
+        <p:nvSpPr>
+          <p:cNvPr id="2" name="TextBox 1">
+            <a:extLst>
+              <a:ext uri="{FF2B5EF4-FFF2-40B4-BE49-F238E27FC236}">
+                <a16:creationId xmlns:a16="http://schemas.microsoft.com/office/drawing/2014/main" id="{57FEC6BD-88E6-780F-6787-5BA67162D84D}"/>
+              </a:ext>
+            </a:extLst>
+          </p:cNvPr>
+          <p:cNvSpPr txBox="1"/>
+          <p:nvPr/>
+        </p:nvSpPr>
+        <p:spPr>
+          <a:xfrm>
+            <a:off x="383458" y="2723535"/>
+            <a:ext cx="6279283" cy="461665"/>
+          </a:xfrm>
+          <a:prstGeom prst="rect">
+            <a:avLst/>
+          </a:prstGeom>
+          <a:noFill/>
+        </p:spPr>
+        <p:txBody>
+          <a:bodyPr wrap="none" rtlCol="0">
+            <a:spAutoFit/>
+          </a:bodyPr>
+          <a:lstStyle/>
+          <a:p>
+            <a:r>
+              <a:rPr lang="en-IN" sz="2400" dirty="0">
+                <a:solidFill>
+                  <a:schemeClr val="accent6">
+                    <a:lumMod val="60000"/>
+                    <a:lumOff val="40000"/>
+                  </a:schemeClr>
+                </a:solidFill>
+              </a:rPr>
+              <a:t>Wearing -&gt; Casual T-shirts /  </a:t>
+            </a:r>
+            <a:r>
+              <a:rPr lang="en-IN" sz="2400" dirty="0" err="1">
+                <a:solidFill>
+                  <a:schemeClr val="accent6">
+                    <a:lumMod val="60000"/>
+                    <a:lumOff val="40000"/>
+                  </a:schemeClr>
+                </a:solidFill>
+              </a:rPr>
+              <a:t>Ausk</a:t>
+            </a:r>
+            <a:r>
+              <a:rPr lang="en-IN" sz="2400" dirty="0">
+                <a:solidFill>
+                  <a:schemeClr val="accent6">
+                    <a:lumMod val="60000"/>
+                    <a:lumOff val="40000"/>
+                  </a:schemeClr>
+                </a:solidFill>
+              </a:rPr>
+              <a:t> </a:t>
+            </a:r>
+            <a:r>
+              <a:rPr lang="en-IN" sz="2400" dirty="0" err="1">
+                <a:solidFill>
+                  <a:schemeClr val="accent6">
+                    <a:lumMod val="60000"/>
+                    <a:lumOff val="40000"/>
+                  </a:schemeClr>
+                </a:solidFill>
+              </a:rPr>
+              <a:t>Mens</a:t>
+            </a:r>
+            <a:r>
+              <a:rPr lang="en-IN" sz="2400" dirty="0">
+                <a:solidFill>
+                  <a:schemeClr val="accent6">
+                    <a:lumMod val="60000"/>
+                    <a:lumOff val="40000"/>
+                  </a:schemeClr>
+                </a:solidFill>
+              </a:rPr>
+              <a:t> Textured</a:t>
+            </a:r>
+          </a:p>
+        </p:txBody>
+      </p:sp>
     </p:spTree>
     <p:extLst>
       <p:ext uri="{BB962C8B-B14F-4D97-AF65-F5344CB8AC3E}">
-        <p14:creationId xmlns:p14="http://schemas.microsoft.com/office/powerpoint/2010/main" val="2672875228"/>
+        <p14:creationId xmlns:p14="http://schemas.microsoft.com/office/powerpoint/2010/main" val="2551387536"/>
       </p:ext>
     </p:extLst>
   </p:cSld>
@@ -14037,7 +14983,7 @@
 </p:sld>
 </file>
 
-<file path=ppt/slides/slide8.xml><?xml version="1.0" encoding="utf-8"?>
+<file path=ppt/slides/slide9.xml><?xml version="1.0" encoding="utf-8"?>
 <p:sld xmlns:a="http://schemas.openxmlformats.org/drawingml/2006/main" xmlns:r="http://schemas.openxmlformats.org/officeDocument/2006/relationships" xmlns:p="http://schemas.openxmlformats.org/presentationml/2006/main">
   <p:cSld>
     <p:spTree>
@@ -14105,7 +15051,7 @@
         <p:spPr>
           <a:xfrm>
             <a:off x="228600" y="186997"/>
-            <a:ext cx="7946136" cy="830997"/>
+            <a:ext cx="7946136" cy="461665"/>
           </a:xfrm>
           <a:prstGeom prst="rect">
             <a:avLst/>
@@ -14118,8 +15064,12 @@
           </a:bodyPr>
           <a:lstStyle/>
           <a:p>
-            <a:r>
-              <a:rPr lang="en-US" sz="2400" b="1" dirty="0">
+            <a:pPr marL="342900" indent="-342900">
+              <a:buFont typeface="Arial" panose="020B0604020202020204" pitchFamily="34" charset="0"/>
+              <a:buChar char="•"/>
+            </a:pPr>
+            <a:r>
+              <a:rPr lang="en-US" sz="2400">
                 <a:solidFill>
                   <a:schemeClr val="accent6">
                     <a:lumMod val="60000"/>
@@ -14127,14 +15077,8 @@
                   </a:schemeClr>
                 </a:solidFill>
               </a:rPr>
-              <a:t>Some Use Cases of Vector DB:</a:t>
-            </a:r>
-          </a:p>
-          <a:p>
-            <a:pPr marL="342900" indent="-342900">
-              <a:buFont typeface="Arial" panose="020B0604020202020204" pitchFamily="34" charset="0"/>
-              <a:buChar char="•"/>
-            </a:pPr>
+              <a:t>Chatbots </a:t>
+            </a:r>
             <a:r>
               <a:rPr lang="en-US" sz="2400" dirty="0">
                 <a:solidFill>
@@ -14144,7 +15088,7 @@
                   </a:schemeClr>
                 </a:solidFill>
               </a:rPr>
-              <a:t>Chatbots (like ChatGPT)</a:t>
+              <a:t>(like ChatGPT)</a:t>
             </a:r>
           </a:p>
         </p:txBody>
@@ -14204,569 +15148,6 @@
     <p:extLst>
       <p:ext uri="{BB962C8B-B14F-4D97-AF65-F5344CB8AC3E}">
         <p14:creationId xmlns:p14="http://schemas.microsoft.com/office/powerpoint/2010/main" val="1633251504"/>
-      </p:ext>
-    </p:extLst>
-  </p:cSld>
-  <p:clrMapOvr>
-    <a:masterClrMapping/>
-  </p:clrMapOvr>
-</p:sld>
-</file>
-
-<file path=ppt/slides/slide9.xml><?xml version="1.0" encoding="utf-8"?>
-<p:sld xmlns:a="http://schemas.openxmlformats.org/drawingml/2006/main" xmlns:r="http://schemas.openxmlformats.org/officeDocument/2006/relationships" xmlns:p="http://schemas.openxmlformats.org/presentationml/2006/main">
-  <p:cSld>
-    <p:spTree>
-      <p:nvGrpSpPr>
-        <p:cNvPr id="1" name="">
-          <a:extLst>
-            <a:ext uri="{FF2B5EF4-FFF2-40B4-BE49-F238E27FC236}">
-              <a16:creationId xmlns:a16="http://schemas.microsoft.com/office/drawing/2014/main" id="{D10DE8A6-A043-CC3C-2017-4B47E6CE425F}"/>
-            </a:ext>
-          </a:extLst>
-        </p:cNvPr>
-        <p:cNvGrpSpPr/>
-        <p:nvPr/>
-      </p:nvGrpSpPr>
-      <p:grpSpPr>
-        <a:xfrm>
-          <a:off x="0" y="0"/>
-          <a:ext cx="0" cy="0"/>
-          <a:chOff x="0" y="0"/>
-          <a:chExt cx="0" cy="0"/>
-        </a:xfrm>
-      </p:grpSpPr>
-      <p:sp>
-        <p:nvSpPr>
-          <p:cNvPr id="9" name="TextBox 8">
-            <a:extLst>
-              <a:ext uri="{FF2B5EF4-FFF2-40B4-BE49-F238E27FC236}">
-                <a16:creationId xmlns:a16="http://schemas.microsoft.com/office/drawing/2014/main" id="{B66C0D0E-5B14-CD7E-D32E-5FCA2A8D89FA}"/>
-              </a:ext>
-            </a:extLst>
-          </p:cNvPr>
-          <p:cNvSpPr txBox="1"/>
-          <p:nvPr/>
-        </p:nvSpPr>
-        <p:spPr>
-          <a:xfrm>
-            <a:off x="146232" y="272196"/>
-            <a:ext cx="5102352" cy="830997"/>
-          </a:xfrm>
-          <a:prstGeom prst="rect">
-            <a:avLst/>
-          </a:prstGeom>
-          <a:noFill/>
-        </p:spPr>
-        <p:txBody>
-          <a:bodyPr wrap="square">
-            <a:spAutoFit/>
-          </a:bodyPr>
-          <a:lstStyle/>
-          <a:p>
-            <a:r>
-              <a:rPr lang="en-US" sz="2400" b="1" dirty="0">
-                <a:solidFill>
-                  <a:schemeClr val="accent6">
-                    <a:lumMod val="60000"/>
-                    <a:lumOff val="40000"/>
-                  </a:schemeClr>
-                </a:solidFill>
-              </a:rPr>
-              <a:t>Some Use Cases of Vector DB:</a:t>
-            </a:r>
-          </a:p>
-          <a:p>
-            <a:pPr marL="342900" indent="-342900">
-              <a:buFont typeface="Arial" panose="020B0604020202020204" pitchFamily="34" charset="0"/>
-              <a:buChar char="•"/>
-            </a:pPr>
-            <a:r>
-              <a:rPr lang="en-US" sz="2400" dirty="0">
-                <a:solidFill>
-                  <a:schemeClr val="accent6">
-                    <a:lumMod val="60000"/>
-                    <a:lumOff val="40000"/>
-                  </a:schemeClr>
-                </a:solidFill>
-              </a:rPr>
-              <a:t>Google</a:t>
-            </a:r>
-          </a:p>
-        </p:txBody>
-      </p:sp>
-      <p:pic>
-        <p:nvPicPr>
-          <p:cNvPr id="6" name="Picture 5">
-            <a:extLst>
-              <a:ext uri="{FF2B5EF4-FFF2-40B4-BE49-F238E27FC236}">
-                <a16:creationId xmlns:a16="http://schemas.microsoft.com/office/drawing/2014/main" id="{07BDDD79-1C5F-0E09-7F74-6543E4623E36}"/>
-              </a:ext>
-            </a:extLst>
-          </p:cNvPr>
-          <p:cNvPicPr>
-            <a:picLocks noChangeAspect="1"/>
-          </p:cNvPicPr>
-          <p:nvPr/>
-        </p:nvPicPr>
-        <p:blipFill>
-          <a:blip r:embed="rId2"/>
-          <a:stretch>
-            <a:fillRect/>
-          </a:stretch>
-        </p:blipFill>
-        <p:spPr>
-          <a:xfrm>
-            <a:off x="1401855" y="4392848"/>
-            <a:ext cx="2278097" cy="2227472"/>
-          </a:xfrm>
-          <a:prstGeom prst="rect">
-            <a:avLst/>
-          </a:prstGeom>
-        </p:spPr>
-      </p:pic>
-      <mc:AlternateContent xmlns:mc="http://schemas.openxmlformats.org/markup-compatibility/2006" xmlns:p14="http://schemas.microsoft.com/office/powerpoint/2010/main">
-        <mc:Choice Requires="p14">
-          <p:contentPart p14:bwMode="auto" r:id="rId3">
-            <p14:nvContentPartPr>
-              <p14:cNvPr id="5" name="Ink 4">
-                <a:extLst>
-                  <a:ext uri="{FF2B5EF4-FFF2-40B4-BE49-F238E27FC236}">
-                    <a16:creationId xmlns:a16="http://schemas.microsoft.com/office/drawing/2014/main" id="{CB8ED9C9-AC4F-9D07-15F0-91AF9C4E557A}"/>
-                  </a:ext>
-                </a:extLst>
-              </p14:cNvPr>
-              <p14:cNvContentPartPr/>
-              <p14:nvPr/>
-            </p14:nvContentPartPr>
-            <p14:xfrm>
-              <a:off x="11292624" y="602496"/>
-              <a:ext cx="581400" cy="37800"/>
-            </p14:xfrm>
-          </p:contentPart>
-        </mc:Choice>
-        <mc:Fallback xmlns="">
-          <p:pic>
-            <p:nvPicPr>
-              <p:cNvPr id="5" name="Ink 4">
-                <a:extLst>
-                  <a:ext uri="{FF2B5EF4-FFF2-40B4-BE49-F238E27FC236}">
-                    <a16:creationId xmlns:a16="http://schemas.microsoft.com/office/drawing/2014/main" id="{CB8ED9C9-AC4F-9D07-15F0-91AF9C4E557A}"/>
-                  </a:ext>
-                </a:extLst>
-              </p:cNvPr>
-              <p:cNvPicPr/>
-              <p:nvPr/>
-            </p:nvPicPr>
-            <p:blipFill>
-              <a:blip r:embed="rId4"/>
-              <a:stretch>
-                <a:fillRect/>
-              </a:stretch>
-            </p:blipFill>
-            <p:spPr>
-              <a:xfrm>
-                <a:off x="11274624" y="584323"/>
-                <a:ext cx="617040" cy="73783"/>
-              </a:xfrm>
-              <a:prstGeom prst="rect">
-                <a:avLst/>
-              </a:prstGeom>
-            </p:spPr>
-          </p:pic>
-        </mc:Fallback>
-      </mc:AlternateContent>
-      <p:pic>
-        <p:nvPicPr>
-          <p:cNvPr id="10" name="Picture 9">
-            <a:extLst>
-              <a:ext uri="{FF2B5EF4-FFF2-40B4-BE49-F238E27FC236}">
-                <a16:creationId xmlns:a16="http://schemas.microsoft.com/office/drawing/2014/main" id="{5E4A197D-9CF8-3E90-7224-3F44B2703DC5}"/>
-              </a:ext>
-            </a:extLst>
-          </p:cNvPr>
-          <p:cNvPicPr>
-            <a:picLocks noChangeAspect="1"/>
-          </p:cNvPicPr>
-          <p:nvPr/>
-        </p:nvPicPr>
-        <p:blipFill>
-          <a:blip r:embed="rId5"/>
-          <a:stretch>
-            <a:fillRect/>
-          </a:stretch>
-        </p:blipFill>
-        <p:spPr>
-          <a:xfrm>
-            <a:off x="4839529" y="20853"/>
-            <a:ext cx="7345041" cy="5485731"/>
-          </a:xfrm>
-          <a:prstGeom prst="rect">
-            <a:avLst/>
-          </a:prstGeom>
-        </p:spPr>
-      </p:pic>
-      <mc:AlternateContent xmlns:mc="http://schemas.openxmlformats.org/markup-compatibility/2006" xmlns:p14="http://schemas.microsoft.com/office/powerpoint/2010/main">
-        <mc:Choice Requires="p14">
-          <p:contentPart p14:bwMode="auto" r:id="rId6">
-            <p14:nvContentPartPr>
-              <p14:cNvPr id="11" name="Ink 10">
-                <a:extLst>
-                  <a:ext uri="{FF2B5EF4-FFF2-40B4-BE49-F238E27FC236}">
-                    <a16:creationId xmlns:a16="http://schemas.microsoft.com/office/drawing/2014/main" id="{E09AA7DA-B1F3-44E8-AB0D-BD31050F6D65}"/>
-                  </a:ext>
-                </a:extLst>
-              </p14:cNvPr>
-              <p14:cNvContentPartPr/>
-              <p14:nvPr/>
-            </p14:nvContentPartPr>
-            <p14:xfrm>
-              <a:off x="9427464" y="119736"/>
-              <a:ext cx="456120" cy="304920"/>
-            </p14:xfrm>
-          </p:contentPart>
-        </mc:Choice>
-        <mc:Fallback xmlns="">
-          <p:pic>
-            <p:nvPicPr>
-              <p:cNvPr id="11" name="Ink 10">
-                <a:extLst>
-                  <a:ext uri="{FF2B5EF4-FFF2-40B4-BE49-F238E27FC236}">
-                    <a16:creationId xmlns:a16="http://schemas.microsoft.com/office/drawing/2014/main" id="{E09AA7DA-B1F3-44E8-AB0D-BD31050F6D65}"/>
-                  </a:ext>
-                </a:extLst>
-              </p:cNvPr>
-              <p:cNvPicPr/>
-              <p:nvPr/>
-            </p:nvPicPr>
-            <p:blipFill>
-              <a:blip r:embed="rId7"/>
-              <a:stretch>
-                <a:fillRect/>
-              </a:stretch>
-            </p:blipFill>
-            <p:spPr>
-              <a:xfrm>
-                <a:off x="9409464" y="102096"/>
-                <a:ext cx="491760" cy="340560"/>
-              </a:xfrm>
-              <a:prstGeom prst="rect">
-                <a:avLst/>
-              </a:prstGeom>
-            </p:spPr>
-          </p:pic>
-        </mc:Fallback>
-      </mc:AlternateContent>
-      <mc:AlternateContent xmlns:mc="http://schemas.openxmlformats.org/markup-compatibility/2006" xmlns:p14="http://schemas.microsoft.com/office/powerpoint/2010/main">
-        <mc:Choice Requires="p14">
-          <p:contentPart p14:bwMode="auto" r:id="rId8">
-            <p14:nvContentPartPr>
-              <p14:cNvPr id="12" name="Ink 11">
-                <a:extLst>
-                  <a:ext uri="{FF2B5EF4-FFF2-40B4-BE49-F238E27FC236}">
-                    <a16:creationId xmlns:a16="http://schemas.microsoft.com/office/drawing/2014/main" id="{45F97C7C-7CD4-7C2E-2BCB-B981A0237EDB}"/>
-                  </a:ext>
-                </a:extLst>
-              </p14:cNvPr>
-              <p14:cNvContentPartPr/>
-              <p14:nvPr/>
-            </p14:nvContentPartPr>
-            <p14:xfrm>
-              <a:off x="5989104" y="1871856"/>
-              <a:ext cx="238320" cy="185760"/>
-            </p14:xfrm>
-          </p:contentPart>
-        </mc:Choice>
-        <mc:Fallback xmlns="">
-          <p:pic>
-            <p:nvPicPr>
-              <p:cNvPr id="12" name="Ink 11">
-                <a:extLst>
-                  <a:ext uri="{FF2B5EF4-FFF2-40B4-BE49-F238E27FC236}">
-                    <a16:creationId xmlns:a16="http://schemas.microsoft.com/office/drawing/2014/main" id="{45F97C7C-7CD4-7C2E-2BCB-B981A0237EDB}"/>
-                  </a:ext>
-                </a:extLst>
-              </p:cNvPr>
-              <p:cNvPicPr/>
-              <p:nvPr/>
-            </p:nvPicPr>
-            <p:blipFill>
-              <a:blip r:embed="rId9"/>
-              <a:stretch>
-                <a:fillRect/>
-              </a:stretch>
-            </p:blipFill>
-            <p:spPr>
-              <a:xfrm>
-                <a:off x="5971464" y="1853856"/>
-                <a:ext cx="273960" cy="221400"/>
-              </a:xfrm>
-              <a:prstGeom prst="rect">
-                <a:avLst/>
-              </a:prstGeom>
-            </p:spPr>
-          </p:pic>
-        </mc:Fallback>
-      </mc:AlternateContent>
-      <mc:AlternateContent xmlns:mc="http://schemas.openxmlformats.org/markup-compatibility/2006" xmlns:p14="http://schemas.microsoft.com/office/powerpoint/2010/main">
-        <mc:Choice Requires="p14">
-          <p:contentPart p14:bwMode="auto" r:id="rId10">
-            <p14:nvContentPartPr>
-              <p14:cNvPr id="13" name="Ink 12">
-                <a:extLst>
-                  <a:ext uri="{FF2B5EF4-FFF2-40B4-BE49-F238E27FC236}">
-                    <a16:creationId xmlns:a16="http://schemas.microsoft.com/office/drawing/2014/main" id="{2B433421-F787-1B4E-BEF3-C47B654036AA}"/>
-                  </a:ext>
-                </a:extLst>
-              </p14:cNvPr>
-              <p14:cNvContentPartPr/>
-              <p14:nvPr/>
-            </p14:nvContentPartPr>
-            <p14:xfrm>
-              <a:off x="9033984" y="403056"/>
-              <a:ext cx="326520" cy="24480"/>
-            </p14:xfrm>
-          </p:contentPart>
-        </mc:Choice>
-        <mc:Fallback xmlns="">
-          <p:pic>
-            <p:nvPicPr>
-              <p:cNvPr id="13" name="Ink 12">
-                <a:extLst>
-                  <a:ext uri="{FF2B5EF4-FFF2-40B4-BE49-F238E27FC236}">
-                    <a16:creationId xmlns:a16="http://schemas.microsoft.com/office/drawing/2014/main" id="{2B433421-F787-1B4E-BEF3-C47B654036AA}"/>
-                  </a:ext>
-                </a:extLst>
-              </p:cNvPr>
-              <p:cNvPicPr/>
-              <p:nvPr/>
-            </p:nvPicPr>
-            <p:blipFill>
-              <a:blip r:embed="rId11"/>
-              <a:stretch>
-                <a:fillRect/>
-              </a:stretch>
-            </p:blipFill>
-            <p:spPr>
-              <a:xfrm>
-                <a:off x="9016344" y="385416"/>
-                <a:ext cx="362160" cy="60120"/>
-              </a:xfrm>
-              <a:prstGeom prst="rect">
-                <a:avLst/>
-              </a:prstGeom>
-            </p:spPr>
-          </p:pic>
-        </mc:Fallback>
-      </mc:AlternateContent>
-      <mc:AlternateContent xmlns:mc="http://schemas.openxmlformats.org/markup-compatibility/2006" xmlns:p14="http://schemas.microsoft.com/office/powerpoint/2010/main">
-        <mc:Choice Requires="p14">
-          <p:contentPart p14:bwMode="auto" r:id="rId12">
-            <p14:nvContentPartPr>
-              <p14:cNvPr id="14" name="Ink 13">
-                <a:extLst>
-                  <a:ext uri="{FF2B5EF4-FFF2-40B4-BE49-F238E27FC236}">
-                    <a16:creationId xmlns:a16="http://schemas.microsoft.com/office/drawing/2014/main" id="{1505E7FE-BAC4-570D-6487-FC4FC01F3880}"/>
-                  </a:ext>
-                </a:extLst>
-              </p14:cNvPr>
-              <p14:cNvContentPartPr/>
-              <p14:nvPr/>
-            </p14:nvContentPartPr>
-            <p14:xfrm>
-              <a:off x="6994944" y="429696"/>
-              <a:ext cx="686160" cy="66240"/>
-            </p14:xfrm>
-          </p:contentPart>
-        </mc:Choice>
-        <mc:Fallback xmlns="">
-          <p:pic>
-            <p:nvPicPr>
-              <p:cNvPr id="14" name="Ink 13">
-                <a:extLst>
-                  <a:ext uri="{FF2B5EF4-FFF2-40B4-BE49-F238E27FC236}">
-                    <a16:creationId xmlns:a16="http://schemas.microsoft.com/office/drawing/2014/main" id="{1505E7FE-BAC4-570D-6487-FC4FC01F3880}"/>
-                  </a:ext>
-                </a:extLst>
-              </p:cNvPr>
-              <p:cNvPicPr/>
-              <p:nvPr/>
-            </p:nvPicPr>
-            <p:blipFill>
-              <a:blip r:embed="rId13"/>
-              <a:stretch>
-                <a:fillRect/>
-              </a:stretch>
-            </p:blipFill>
-            <p:spPr>
-              <a:xfrm>
-                <a:off x="6977304" y="411696"/>
-                <a:ext cx="721800" cy="101880"/>
-              </a:xfrm>
-              <a:prstGeom prst="rect">
-                <a:avLst/>
-              </a:prstGeom>
-            </p:spPr>
-          </p:pic>
-        </mc:Fallback>
-      </mc:AlternateContent>
-      <mc:AlternateContent xmlns:mc="http://schemas.openxmlformats.org/markup-compatibility/2006" xmlns:p14="http://schemas.microsoft.com/office/powerpoint/2010/main">
-        <mc:Choice Requires="p14">
-          <p:contentPart p14:bwMode="auto" r:id="rId14">
-            <p14:nvContentPartPr>
-              <p14:cNvPr id="15" name="Ink 14">
-                <a:extLst>
-                  <a:ext uri="{FF2B5EF4-FFF2-40B4-BE49-F238E27FC236}">
-                    <a16:creationId xmlns:a16="http://schemas.microsoft.com/office/drawing/2014/main" id="{E605CB15-7CD0-5202-7EA4-3A4CE5F2DA2D}"/>
-                  </a:ext>
-                </a:extLst>
-              </p14:cNvPr>
-              <p14:cNvContentPartPr/>
-              <p14:nvPr/>
-            </p14:nvContentPartPr>
-            <p14:xfrm>
-              <a:off x="5860944" y="2993976"/>
-              <a:ext cx="237240" cy="209520"/>
-            </p14:xfrm>
-          </p:contentPart>
-        </mc:Choice>
-        <mc:Fallback xmlns="">
-          <p:pic>
-            <p:nvPicPr>
-              <p:cNvPr id="15" name="Ink 14">
-                <a:extLst>
-                  <a:ext uri="{FF2B5EF4-FFF2-40B4-BE49-F238E27FC236}">
-                    <a16:creationId xmlns:a16="http://schemas.microsoft.com/office/drawing/2014/main" id="{E605CB15-7CD0-5202-7EA4-3A4CE5F2DA2D}"/>
-                  </a:ext>
-                </a:extLst>
-              </p:cNvPr>
-              <p:cNvPicPr/>
-              <p:nvPr/>
-            </p:nvPicPr>
-            <p:blipFill>
-              <a:blip r:embed="rId15"/>
-              <a:stretch>
-                <a:fillRect/>
-              </a:stretch>
-            </p:blipFill>
-            <p:spPr>
-              <a:xfrm>
-                <a:off x="5843304" y="2976336"/>
-                <a:ext cx="272880" cy="245160"/>
-              </a:xfrm>
-              <a:prstGeom prst="rect">
-                <a:avLst/>
-              </a:prstGeom>
-            </p:spPr>
-          </p:pic>
-        </mc:Fallback>
-      </mc:AlternateContent>
-      <mc:AlternateContent xmlns:mc="http://schemas.openxmlformats.org/markup-compatibility/2006" xmlns:p14="http://schemas.microsoft.com/office/powerpoint/2010/main">
-        <mc:Choice Requires="p14">
-          <p:contentPart p14:bwMode="auto" r:id="rId16">
-            <p14:nvContentPartPr>
-              <p14:cNvPr id="16" name="Ink 15">
-                <a:extLst>
-                  <a:ext uri="{FF2B5EF4-FFF2-40B4-BE49-F238E27FC236}">
-                    <a16:creationId xmlns:a16="http://schemas.microsoft.com/office/drawing/2014/main" id="{125596A2-0349-6916-927C-EA0987A6B346}"/>
-                  </a:ext>
-                </a:extLst>
-              </p14:cNvPr>
-              <p14:cNvContentPartPr/>
-              <p14:nvPr/>
-            </p14:nvContentPartPr>
-            <p14:xfrm>
-              <a:off x="5705784" y="3556656"/>
-              <a:ext cx="449280" cy="184680"/>
-            </p14:xfrm>
-          </p:contentPart>
-        </mc:Choice>
-        <mc:Fallback xmlns="">
-          <p:pic>
-            <p:nvPicPr>
-              <p:cNvPr id="16" name="Ink 15">
-                <a:extLst>
-                  <a:ext uri="{FF2B5EF4-FFF2-40B4-BE49-F238E27FC236}">
-                    <a16:creationId xmlns:a16="http://schemas.microsoft.com/office/drawing/2014/main" id="{125596A2-0349-6916-927C-EA0987A6B346}"/>
-                  </a:ext>
-                </a:extLst>
-              </p:cNvPr>
-              <p:cNvPicPr/>
-              <p:nvPr/>
-            </p:nvPicPr>
-            <p:blipFill>
-              <a:blip r:embed="rId17"/>
-              <a:stretch>
-                <a:fillRect/>
-              </a:stretch>
-            </p:blipFill>
-            <p:spPr>
-              <a:xfrm>
-                <a:off x="5687784" y="3539016"/>
-                <a:ext cx="484920" cy="220320"/>
-              </a:xfrm>
-              <a:prstGeom prst="rect">
-                <a:avLst/>
-              </a:prstGeom>
-            </p:spPr>
-          </p:pic>
-        </mc:Fallback>
-      </mc:AlternateContent>
-      <mc:AlternateContent xmlns:mc="http://schemas.openxmlformats.org/markup-compatibility/2006" xmlns:p14="http://schemas.microsoft.com/office/powerpoint/2010/main">
-        <mc:Choice Requires="p14">
-          <p:contentPart p14:bwMode="auto" r:id="rId18">
-            <p14:nvContentPartPr>
-              <p14:cNvPr id="17" name="Ink 16">
-                <a:extLst>
-                  <a:ext uri="{FF2B5EF4-FFF2-40B4-BE49-F238E27FC236}">
-                    <a16:creationId xmlns:a16="http://schemas.microsoft.com/office/drawing/2014/main" id="{2F6BB4FC-A0C0-3F73-EEAD-C2E298AF41BA}"/>
-                  </a:ext>
-                </a:extLst>
-              </p14:cNvPr>
-              <p14:cNvContentPartPr/>
-              <p14:nvPr/>
-            </p14:nvContentPartPr>
-            <p14:xfrm>
-              <a:off x="6162984" y="3956256"/>
-              <a:ext cx="272160" cy="116280"/>
-            </p14:xfrm>
-          </p:contentPart>
-        </mc:Choice>
-        <mc:Fallback xmlns="">
-          <p:pic>
-            <p:nvPicPr>
-              <p:cNvPr id="17" name="Ink 16">
-                <a:extLst>
-                  <a:ext uri="{FF2B5EF4-FFF2-40B4-BE49-F238E27FC236}">
-                    <a16:creationId xmlns:a16="http://schemas.microsoft.com/office/drawing/2014/main" id="{2F6BB4FC-A0C0-3F73-EEAD-C2E298AF41BA}"/>
-                  </a:ext>
-                </a:extLst>
-              </p:cNvPr>
-              <p:cNvPicPr/>
-              <p:nvPr/>
-            </p:nvPicPr>
-            <p:blipFill>
-              <a:blip r:embed="rId19"/>
-              <a:stretch>
-                <a:fillRect/>
-              </a:stretch>
-            </p:blipFill>
-            <p:spPr>
-              <a:xfrm>
-                <a:off x="6144984" y="3938616"/>
-                <a:ext cx="307800" cy="151920"/>
-              </a:xfrm>
-              <a:prstGeom prst="rect">
-                <a:avLst/>
-              </a:prstGeom>
-            </p:spPr>
-          </p:pic>
-        </mc:Fallback>
-      </mc:AlternateContent>
-    </p:spTree>
-    <p:extLst>
-      <p:ext uri="{BB962C8B-B14F-4D97-AF65-F5344CB8AC3E}">
-        <p14:creationId xmlns:p14="http://schemas.microsoft.com/office/powerpoint/2010/main" val="2718215824"/>
       </p:ext>
     </p:extLst>
   </p:cSld>
@@ -15364,299 +15745,4 @@
     </a:ext>
   </a:extLst>
 </a:theme>
-</file>
-
-<file path=ppt/theme/theme3.xml><?xml version="1.0" encoding="utf-8"?>
-<a:theme xmlns:a="http://schemas.openxmlformats.org/drawingml/2006/main" name="Office Theme">
-  <a:themeElements>
-    <a:clrScheme name="Office">
-      <a:dk1>
-        <a:sysClr val="windowText" lastClr="000000"/>
-      </a:dk1>
-      <a:lt1>
-        <a:sysClr val="window" lastClr="FFFFFF"/>
-      </a:lt1>
-      <a:dk2>
-        <a:srgbClr val="44546A"/>
-      </a:dk2>
-      <a:lt2>
-        <a:srgbClr val="E7E6E6"/>
-      </a:lt2>
-      <a:accent1>
-        <a:srgbClr val="4472C4"/>
-      </a:accent1>
-      <a:accent2>
-        <a:srgbClr val="ED7D31"/>
-      </a:accent2>
-      <a:accent3>
-        <a:srgbClr val="A5A5A5"/>
-      </a:accent3>
-      <a:accent4>
-        <a:srgbClr val="FFC000"/>
-      </a:accent4>
-      <a:accent5>
-        <a:srgbClr val="5B9BD5"/>
-      </a:accent5>
-      <a:accent6>
-        <a:srgbClr val="70AD47"/>
-      </a:accent6>
-      <a:hlink>
-        <a:srgbClr val="0563C1"/>
-      </a:hlink>
-      <a:folHlink>
-        <a:srgbClr val="954F72"/>
-      </a:folHlink>
-    </a:clrScheme>
-    <a:fontScheme name="Office">
-      <a:majorFont>
-        <a:latin typeface="Calibri Light" panose="020F0302020204030204"/>
-        <a:ea typeface=""/>
-        <a:cs typeface=""/>
-        <a:font script="Jpan" typeface="游ゴシック Light"/>
-        <a:font script="Hang" typeface="맑은 고딕"/>
-        <a:font script="Hans" typeface="等线 Light"/>
-        <a:font script="Hant" typeface="新細明體"/>
-        <a:font script="Arab" typeface="Times New Roman"/>
-        <a:font script="Hebr" typeface="Times New Roman"/>
-        <a:font script="Thai" typeface="Angsana New"/>
-        <a:font script="Ethi" typeface="Nyala"/>
-        <a:font script="Beng" typeface="Vrinda"/>
-        <a:font script="Gujr" typeface="Shruti"/>
-        <a:font script="Khmr" typeface="MoolBoran"/>
-        <a:font script="Knda" typeface="Tunga"/>
-        <a:font script="Guru" typeface="Raavi"/>
-        <a:font script="Cans" typeface="Euphemia"/>
-        <a:font script="Cher" typeface="Plantagenet Cherokee"/>
-        <a:font script="Yiii" typeface="Microsoft Yi Baiti"/>
-        <a:font script="Tibt" typeface="Microsoft Himalaya"/>
-        <a:font script="Thaa" typeface="MV Boli"/>
-        <a:font script="Deva" typeface="Mangal"/>
-        <a:font script="Telu" typeface="Gautami"/>
-        <a:font script="Taml" typeface="Latha"/>
-        <a:font script="Syrc" typeface="Estrangelo Edessa"/>
-        <a:font script="Orya" typeface="Kalinga"/>
-        <a:font script="Mlym" typeface="Kartika"/>
-        <a:font script="Laoo" typeface="DokChampa"/>
-        <a:font script="Sinh" typeface="Iskoola Pota"/>
-        <a:font script="Mong" typeface="Mongolian Baiti"/>
-        <a:font script="Viet" typeface="Times New Roman"/>
-        <a:font script="Uigh" typeface="Microsoft Uighur"/>
-        <a:font script="Geor" typeface="Sylfaen"/>
-        <a:font script="Armn" typeface="Arial"/>
-        <a:font script="Bugi" typeface="Leelawadee UI"/>
-        <a:font script="Bopo" typeface="Microsoft JhengHei"/>
-        <a:font script="Java" typeface="Javanese Text"/>
-        <a:font script="Lisu" typeface="Segoe UI"/>
-        <a:font script="Mymr" typeface="Myanmar Text"/>
-        <a:font script="Nkoo" typeface="Ebrima"/>
-        <a:font script="Olck" typeface="Nirmala UI"/>
-        <a:font script="Osma" typeface="Ebrima"/>
-        <a:font script="Phag" typeface="Phagspa"/>
-        <a:font script="Syrn" typeface="Estrangelo Edessa"/>
-        <a:font script="Syrj" typeface="Estrangelo Edessa"/>
-        <a:font script="Syre" typeface="Estrangelo Edessa"/>
-        <a:font script="Sora" typeface="Nirmala UI"/>
-        <a:font script="Tale" typeface="Microsoft Tai Le"/>
-        <a:font script="Talu" typeface="Microsoft New Tai Lue"/>
-        <a:font script="Tfng" typeface="Ebrima"/>
-      </a:majorFont>
-      <a:minorFont>
-        <a:latin typeface="Calibri" panose="020F0502020204030204"/>
-        <a:ea typeface=""/>
-        <a:cs typeface=""/>
-        <a:font script="Jpan" typeface="游ゴシック"/>
-        <a:font script="Hang" typeface="맑은 고딕"/>
-        <a:font script="Hans" typeface="等线"/>
-        <a:font script="Hant" typeface="新細明體"/>
-        <a:font script="Arab" typeface="Arial"/>
-        <a:font script="Hebr" typeface="Arial"/>
-        <a:font script="Thai" typeface="Cordia New"/>
-        <a:font script="Ethi" typeface="Nyala"/>
-        <a:font script="Beng" typeface="Vrinda"/>
-        <a:font script="Gujr" typeface="Shruti"/>
-        <a:font script="Khmr" typeface="DaunPenh"/>
-        <a:font script="Knda" typeface="Tunga"/>
-        <a:font script="Guru" typeface="Raavi"/>
-        <a:font script="Cans" typeface="Euphemia"/>
-        <a:font script="Cher" typeface="Plantagenet Cherokee"/>
-        <a:font script="Yiii" typeface="Microsoft Yi Baiti"/>
-        <a:font script="Tibt" typeface="Microsoft Himalaya"/>
-        <a:font script="Thaa" typeface="MV Boli"/>
-        <a:font script="Deva" typeface="Mangal"/>
-        <a:font script="Telu" typeface="Gautami"/>
-        <a:font script="Taml" typeface="Latha"/>
-        <a:font script="Syrc" typeface="Estrangelo Edessa"/>
-        <a:font script="Orya" typeface="Kalinga"/>
-        <a:font script="Mlym" typeface="Kartika"/>
-        <a:font script="Laoo" typeface="DokChampa"/>
-        <a:font script="Sinh" typeface="Iskoola Pota"/>
-        <a:font script="Mong" typeface="Mongolian Baiti"/>
-        <a:font script="Viet" typeface="Arial"/>
-        <a:font script="Uigh" typeface="Microsoft Uighur"/>
-        <a:font script="Geor" typeface="Sylfaen"/>
-        <a:font script="Armn" typeface="Arial"/>
-        <a:font script="Bugi" typeface="Leelawadee UI"/>
-        <a:font script="Bopo" typeface="Microsoft JhengHei"/>
-        <a:font script="Java" typeface="Javanese Text"/>
-        <a:font script="Lisu" typeface="Segoe UI"/>
-        <a:font script="Mymr" typeface="Myanmar Text"/>
-        <a:font script="Nkoo" typeface="Ebrima"/>
-        <a:font script="Olck" typeface="Nirmala UI"/>
-        <a:font script="Osma" typeface="Ebrima"/>
-        <a:font script="Phag" typeface="Phagspa"/>
-        <a:font script="Syrn" typeface="Estrangelo Edessa"/>
-        <a:font script="Syrj" typeface="Estrangelo Edessa"/>
-        <a:font script="Syre" typeface="Estrangelo Edessa"/>
-        <a:font script="Sora" typeface="Nirmala UI"/>
-        <a:font script="Tale" typeface="Microsoft Tai Le"/>
-        <a:font script="Talu" typeface="Microsoft New Tai Lue"/>
-        <a:font script="Tfng" typeface="Ebrima"/>
-      </a:minorFont>
-    </a:fontScheme>
-    <a:fmtScheme name="Office">
-      <a:fillStyleLst>
-        <a:solidFill>
-          <a:schemeClr val="phClr"/>
-        </a:solidFill>
-        <a:gradFill rotWithShape="1">
-          <a:gsLst>
-            <a:gs pos="0">
-              <a:schemeClr val="phClr">
-                <a:lumMod val="110000"/>
-                <a:satMod val="105000"/>
-                <a:tint val="67000"/>
-              </a:schemeClr>
-            </a:gs>
-            <a:gs pos="50000">
-              <a:schemeClr val="phClr">
-                <a:lumMod val="105000"/>
-                <a:satMod val="103000"/>
-                <a:tint val="73000"/>
-              </a:schemeClr>
-            </a:gs>
-            <a:gs pos="100000">
-              <a:schemeClr val="phClr">
-                <a:lumMod val="105000"/>
-                <a:satMod val="109000"/>
-                <a:tint val="81000"/>
-              </a:schemeClr>
-            </a:gs>
-          </a:gsLst>
-          <a:lin ang="5400000" scaled="0"/>
-        </a:gradFill>
-        <a:gradFill rotWithShape="1">
-          <a:gsLst>
-            <a:gs pos="0">
-              <a:schemeClr val="phClr">
-                <a:satMod val="103000"/>
-                <a:lumMod val="102000"/>
-                <a:tint val="94000"/>
-              </a:schemeClr>
-            </a:gs>
-            <a:gs pos="50000">
-              <a:schemeClr val="phClr">
-                <a:satMod val="110000"/>
-                <a:lumMod val="100000"/>
-                <a:shade val="100000"/>
-              </a:schemeClr>
-            </a:gs>
-            <a:gs pos="100000">
-              <a:schemeClr val="phClr">
-                <a:lumMod val="99000"/>
-                <a:satMod val="120000"/>
-                <a:shade val="78000"/>
-              </a:schemeClr>
-            </a:gs>
-          </a:gsLst>
-          <a:lin ang="5400000" scaled="0"/>
-        </a:gradFill>
-      </a:fillStyleLst>
-      <a:lnStyleLst>
-        <a:ln w="6350" cap="flat" cmpd="sng" algn="ctr">
-          <a:solidFill>
-            <a:schemeClr val="phClr"/>
-          </a:solidFill>
-          <a:prstDash val="solid"/>
-          <a:miter lim="800000"/>
-        </a:ln>
-        <a:ln w="12700" cap="flat" cmpd="sng" algn="ctr">
-          <a:solidFill>
-            <a:schemeClr val="phClr"/>
-          </a:solidFill>
-          <a:prstDash val="solid"/>
-          <a:miter lim="800000"/>
-        </a:ln>
-        <a:ln w="19050" cap="flat" cmpd="sng" algn="ctr">
-          <a:solidFill>
-            <a:schemeClr val="phClr"/>
-          </a:solidFill>
-          <a:prstDash val="solid"/>
-          <a:miter lim="800000"/>
-        </a:ln>
-      </a:lnStyleLst>
-      <a:effectStyleLst>
-        <a:effectStyle>
-          <a:effectLst/>
-        </a:effectStyle>
-        <a:effectStyle>
-          <a:effectLst/>
-        </a:effectStyle>
-        <a:effectStyle>
-          <a:effectLst>
-            <a:outerShdw blurRad="57150" dist="19050" dir="5400000" algn="ctr" rotWithShape="0">
-              <a:srgbClr val="000000">
-                <a:alpha val="63000"/>
-              </a:srgbClr>
-            </a:outerShdw>
-          </a:effectLst>
-        </a:effectStyle>
-      </a:effectStyleLst>
-      <a:bgFillStyleLst>
-        <a:solidFill>
-          <a:schemeClr val="phClr"/>
-        </a:solidFill>
-        <a:solidFill>
-          <a:schemeClr val="phClr">
-            <a:tint val="95000"/>
-            <a:satMod val="170000"/>
-          </a:schemeClr>
-        </a:solidFill>
-        <a:gradFill rotWithShape="1">
-          <a:gsLst>
-            <a:gs pos="0">
-              <a:schemeClr val="phClr">
-                <a:tint val="93000"/>
-                <a:satMod val="150000"/>
-                <a:shade val="98000"/>
-                <a:lumMod val="102000"/>
-              </a:schemeClr>
-            </a:gs>
-            <a:gs pos="50000">
-              <a:schemeClr val="phClr">
-                <a:tint val="98000"/>
-                <a:satMod val="130000"/>
-                <a:shade val="90000"/>
-                <a:lumMod val="103000"/>
-              </a:schemeClr>
-            </a:gs>
-            <a:gs pos="100000">
-              <a:schemeClr val="phClr">
-                <a:shade val="63000"/>
-                <a:satMod val="120000"/>
-              </a:schemeClr>
-            </a:gs>
-          </a:gsLst>
-          <a:lin ang="5400000" scaled="0"/>
-        </a:gradFill>
-      </a:bgFillStyleLst>
-    </a:fmtScheme>
-  </a:themeElements>
-  <a:objectDefaults/>
-  <a:extraClrSchemeLst/>
-  <a:extLst>
-    <a:ext uri="{05A4C25C-085E-4340-85A3-A5531E510DB2}">
-      <thm15:themeFamily xmlns:thm15="http://schemas.microsoft.com/office/thememl/2012/main" name="Office Theme" id="{62F939B6-93AF-4DB8-9C6B-D6C7DFDC589F}" vid="{4A3C46E8-61CC-4603-A589-7422A47A8E4A}"/>
-    </a:ext>
-  </a:extLst>
-</a:theme>
 </file>